--- a/docs/design/servex-deck.pptx
+++ b/docs/design/servex-deck.pptx
@@ -1328,12 +1328,12 @@
         </p:nvSpPr>
         <p:spPr>
           <a:xfrm>
-            <a:off x="5707228" y="1783080"/>
-            <a:ext cx="777240" cy="777240"/>
+            <a:off x="5684368" y="1691640"/>
+            <a:ext cx="822960" cy="822960"/>
           </a:xfrm>
           <a:prstGeom prst="roundRect">
             <a:avLst>
-              <a:gd name="adj" fmla="val 21176"/>
+              <a:gd name="adj" fmla="val 20000"/>
             </a:avLst>
           </a:prstGeom>
           <a:solidFill>
@@ -1350,15 +1350,15 @@
         </p:nvSpPr>
         <p:spPr>
           <a:xfrm>
-            <a:off x="5914796" y="2015338"/>
-            <a:ext cx="362102" cy="131674"/>
+            <a:off x="5902726" y="1940723"/>
+            <a:ext cx="386243" cy="131674"/>
           </a:xfrm>
           <a:prstGeom prst="roundRect">
             <a:avLst>
               <a:gd name="adj" fmla="val 20833"/>
             </a:avLst>
           </a:prstGeom>
-          <a:ln w="15240">
+          <a:ln w="16510">
             <a:solidFill>
               <a:srgbClr val="4C8DFF"/>
             </a:solidFill>
@@ -1374,15 +1374,15 @@
         </p:nvSpPr>
         <p:spPr>
           <a:xfrm>
-            <a:off x="5914796" y="2196389"/>
-            <a:ext cx="362102" cy="131674"/>
+            <a:off x="5902726" y="2133844"/>
+            <a:ext cx="386243" cy="131674"/>
           </a:xfrm>
           <a:prstGeom prst="roundRect">
             <a:avLst>
               <a:gd name="adj" fmla="val 20833"/>
             </a:avLst>
           </a:prstGeom>
-          <a:ln w="15240">
+          <a:ln w="16510">
             <a:solidFill>
               <a:srgbClr val="4C8DFF"/>
             </a:solidFill>
@@ -1398,12 +1398,12 @@
         </p:nvSpPr>
         <p:spPr>
           <a:xfrm>
-            <a:off x="5964174" y="2064715"/>
-            <a:ext cx="24689" cy="24689"/>
+            <a:off x="5959785" y="1986808"/>
+            <a:ext cx="30724" cy="30724"/>
           </a:xfrm>
           <a:prstGeom prst="roundRect">
             <a:avLst>
-              <a:gd name="adj" fmla="val 74073"/>
+              <a:gd name="adj" fmla="val 59523"/>
             </a:avLst>
           </a:prstGeom>
           <a:solidFill>
@@ -1420,12 +1420,12 @@
         </p:nvSpPr>
         <p:spPr>
           <a:xfrm>
-            <a:off x="5964174" y="2245766"/>
-            <a:ext cx="24689" cy="24689"/>
+            <a:off x="5959785" y="2179930"/>
+            <a:ext cx="30724" cy="30724"/>
           </a:xfrm>
           <a:prstGeom prst="roundRect">
             <a:avLst>
-              <a:gd name="adj" fmla="val 74073"/>
+              <a:gd name="adj" fmla="val 59523"/>
             </a:avLst>
           </a:prstGeom>
           <a:solidFill>
@@ -1442,8 +1442,8 @@
         </p:nvSpPr>
         <p:spPr>
           <a:xfrm>
-            <a:off x="0" y="2743200"/>
-            <a:ext cx="12191695" cy="822960"/>
+            <a:off x="0" y="2697480"/>
+            <a:ext cx="12191695" cy="868680"/>
           </a:xfrm>
           <a:prstGeom prst="rect">
             <a:avLst/>
@@ -1462,7 +1462,7 @@
               <a:buNone/>
             </a:pPr>
             <a:r>
-              <a:rPr lang="en-US" sz="5200" b="1" dirty="0">
+              <a:rPr lang="en-US" sz="5400" b="1" dirty="0">
                 <a:solidFill>
                   <a:srgbClr val="E6E9EF"/>
                 </a:solidFill>
@@ -1472,7 +1472,7 @@
               </a:rPr>
               <a:t>Servex</a:t>
             </a:r>
-            <a:endParaRPr lang="en-US" sz="5200" dirty="0"/>
+            <a:endParaRPr lang="en-US" sz="5400" dirty="0"/>
           </a:p>
         </p:txBody>
       </p:sp>
@@ -1526,8 +1526,8 @@
         </p:nvSpPr>
         <p:spPr>
           <a:xfrm>
-            <a:off x="2255368" y="4297680"/>
-            <a:ext cx="2468880" cy="420624"/>
+            <a:off x="2026768" y="4389120"/>
+            <a:ext cx="2651760" cy="457200"/>
           </a:xfrm>
           <a:prstGeom prst="roundRect">
             <a:avLst>
@@ -1553,8 +1553,8 @@
         </p:nvSpPr>
         <p:spPr>
           <a:xfrm>
-            <a:off x="2255368" y="4297680"/>
-            <a:ext cx="2468880" cy="420624"/>
+            <a:off x="2026768" y="4389120"/>
+            <a:ext cx="2651760" cy="457200"/>
           </a:xfrm>
           <a:prstGeom prst="rect">
             <a:avLst/>
@@ -1573,7 +1573,7 @@
               <a:buNone/>
             </a:pPr>
             <a:r>
-              <a:rPr lang="en-US" sz="1100" dirty="0">
+              <a:rPr lang="en-US" sz="1200" dirty="0">
                 <a:solidFill>
                   <a:srgbClr val="E6E9EF"/>
                 </a:solidFill>
@@ -1583,7 +1583,7 @@
               </a:rPr>
               <a:t>다크 우선 · 미니멀</a:t>
             </a:r>
-            <a:endParaRPr lang="en-US" sz="1100" dirty="0"/>
+            <a:endParaRPr lang="en-US" sz="1200" dirty="0"/>
           </a:p>
         </p:txBody>
       </p:sp>
@@ -1595,8 +1595,8 @@
         </p:nvSpPr>
         <p:spPr>
           <a:xfrm>
-            <a:off x="4998568" y="4297680"/>
-            <a:ext cx="2468880" cy="420624"/>
+            <a:off x="4952848" y="4389120"/>
+            <a:ext cx="2468880" cy="457200"/>
           </a:xfrm>
           <a:prstGeom prst="roundRect">
             <a:avLst>
@@ -1622,8 +1622,8 @@
         </p:nvSpPr>
         <p:spPr>
           <a:xfrm>
-            <a:off x="4998568" y="4297680"/>
-            <a:ext cx="2468880" cy="420624"/>
+            <a:off x="4952848" y="4389120"/>
+            <a:ext cx="2468880" cy="457200"/>
           </a:xfrm>
           <a:prstGeom prst="rect">
             <a:avLst/>
@@ -1642,7 +1642,7 @@
               <a:buNone/>
             </a:pPr>
             <a:r>
-              <a:rPr lang="en-US" sz="1100" dirty="0">
+              <a:rPr lang="en-US" sz="1200" dirty="0">
                 <a:solidFill>
                   <a:srgbClr val="E6E9EF"/>
                 </a:solidFill>
@@ -1652,7 +1652,7 @@
               </a:rPr>
               <a:t>에이전트 직접 접속</a:t>
             </a:r>
-            <a:endParaRPr lang="en-US" sz="1100" dirty="0"/>
+            <a:endParaRPr lang="en-US" sz="1200" dirty="0"/>
           </a:p>
         </p:txBody>
       </p:sp>
@@ -1664,8 +1664,8 @@
         </p:nvSpPr>
         <p:spPr>
           <a:xfrm>
-            <a:off x="7741768" y="4297680"/>
-            <a:ext cx="2194560" cy="420624"/>
+            <a:off x="7696048" y="4389120"/>
+            <a:ext cx="2468880" cy="457200"/>
           </a:xfrm>
           <a:prstGeom prst="roundRect">
             <a:avLst>
@@ -1691,8 +1691,8 @@
         </p:nvSpPr>
         <p:spPr>
           <a:xfrm>
-            <a:off x="7741768" y="4297680"/>
-            <a:ext cx="2194560" cy="420624"/>
+            <a:off x="7696048" y="4389120"/>
+            <a:ext cx="2468880" cy="457200"/>
           </a:xfrm>
           <a:prstGeom prst="rect">
             <a:avLst/>
@@ -1711,7 +1711,7 @@
               <a:buNone/>
             </a:pPr>
             <a:r>
-              <a:rPr lang="en-US" sz="1100" dirty="0">
+              <a:rPr lang="en-US" sz="1200" dirty="0">
                 <a:solidFill>
                   <a:srgbClr val="E6E9EF"/>
                 </a:solidFill>
@@ -1721,7 +1721,7 @@
               </a:rPr>
               <a:t>GPL-3.0 오픈소스</a:t>
             </a:r>
-            <a:endParaRPr lang="en-US" sz="1100" dirty="0"/>
+            <a:endParaRPr lang="en-US" sz="1200" dirty="0"/>
           </a:p>
         </p:txBody>
       </p:sp>
@@ -1733,7 +1733,7 @@
         </p:nvSpPr>
         <p:spPr>
           <a:xfrm>
-            <a:off x="640080" y="6355080"/>
+            <a:off x="640080" y="6382512"/>
             <a:ext cx="10911535" cy="0"/>
           </a:xfrm>
           <a:prstGeom prst="line">
@@ -1756,7 +1756,7 @@
         </p:nvSpPr>
         <p:spPr>
           <a:xfrm>
-            <a:off x="640080" y="6419088"/>
+            <a:off x="640080" y="6455664"/>
             <a:ext cx="5486400" cy="274320"/>
           </a:xfrm>
           <a:prstGeom prst="rect">
@@ -1798,7 +1798,7 @@
         </p:nvSpPr>
         <p:spPr>
           <a:xfrm>
-            <a:off x="9722815" y="6419088"/>
+            <a:off x="9722815" y="6455664"/>
             <a:ext cx="1828800" cy="274320"/>
           </a:xfrm>
           <a:prstGeom prst="rect">
@@ -1826,7 +1826,7 @@
                 <a:ea typeface="Malgun Gothic" pitchFamily="34" charset="-122"/>
                 <a:cs typeface="Malgun Gothic" pitchFamily="34" charset="-120"/>
               </a:rPr>
-              <a:t>v1.0</a:t>
+              <a:t>1 / 6</a:t>
             </a:r>
             <a:endParaRPr lang="en-US" sz="1000" dirty="0"/>
           </a:p>
@@ -1872,7 +1872,7 @@
         </p:nvSpPr>
         <p:spPr>
           <a:xfrm>
-            <a:off x="640080" y="475488"/>
+            <a:off x="640080" y="457200"/>
             <a:ext cx="10911535" cy="274320"/>
           </a:xfrm>
           <a:prstGeom prst="rect">
@@ -1914,7 +1914,7 @@
         </p:nvSpPr>
         <p:spPr>
           <a:xfrm>
-            <a:off x="640080" y="749808"/>
+            <a:off x="640080" y="731520"/>
             <a:ext cx="10911535" cy="548640"/>
           </a:xfrm>
           <a:prstGeom prst="rect">
@@ -1934,7 +1934,7 @@
               <a:buNone/>
             </a:pPr>
             <a:r>
-              <a:rPr lang="en-US" sz="2700" b="1" dirty="0">
+              <a:rPr lang="en-US" sz="2600" b="1" dirty="0">
                 <a:solidFill>
                   <a:srgbClr val="E6E9EF"/>
                 </a:solidFill>
@@ -1944,7 +1944,7 @@
               </a:rPr>
               <a:t>프로젝트 소개</a:t>
             </a:r>
-            <a:endParaRPr lang="en-US" sz="2700" dirty="0"/>
+            <a:endParaRPr lang="en-US" sz="2600" dirty="0"/>
           </a:p>
         </p:txBody>
       </p:sp>
@@ -1957,7 +1957,7 @@
         <p:spPr>
           <a:xfrm>
             <a:off x="640080" y="1298448"/>
-            <a:ext cx="10911535" cy="411480"/>
+            <a:ext cx="10911535" cy="347472"/>
           </a:xfrm>
           <a:prstGeom prst="rect">
             <a:avLst/>
@@ -1976,7 +1976,7 @@
               <a:buNone/>
             </a:pPr>
             <a:r>
-              <a:rPr lang="en-US" sz="1300" dirty="0">
+              <a:rPr lang="en-US" sz="1200" dirty="0">
                 <a:solidFill>
                   <a:srgbClr val="8A9099"/>
                 </a:solidFill>
@@ -1986,7 +1986,7 @@
               </a:rPr>
               <a:t>서버에 에이전트를 두고, 앱이 직접 접속해 상태와 지표를 한 화면에서 보여줍니다.</a:t>
             </a:r>
-            <a:endParaRPr lang="en-US" sz="1300" dirty="0"/>
+            <a:endParaRPr lang="en-US" sz="1200" dirty="0"/>
           </a:p>
         </p:txBody>
       </p:sp>
@@ -1998,7 +1998,7 @@
         </p:nvSpPr>
         <p:spPr>
           <a:xfrm>
-            <a:off x="640080" y="2203704"/>
+            <a:off x="640080" y="2020824"/>
             <a:ext cx="128016" cy="128016"/>
           </a:xfrm>
           <a:prstGeom prst="roundRect">
@@ -2020,8 +2020,8 @@
         </p:nvSpPr>
         <p:spPr>
           <a:xfrm>
-            <a:off x="914400" y="2148840"/>
-            <a:ext cx="5577840" cy="274320"/>
+            <a:off x="914400" y="1965960"/>
+            <a:ext cx="5669280" cy="274320"/>
           </a:xfrm>
           <a:prstGeom prst="rect">
             <a:avLst/>
@@ -2062,8 +2062,8 @@
         </p:nvSpPr>
         <p:spPr>
           <a:xfrm>
-            <a:off x="914400" y="2432304"/>
-            <a:ext cx="5577840" cy="548640"/>
+            <a:off x="914400" y="2249424"/>
+            <a:ext cx="5669280" cy="548640"/>
           </a:xfrm>
           <a:prstGeom prst="rect">
             <a:avLst/>
@@ -2077,7 +2077,7 @@
           <a:p>
             <a:pPr algn="l" indent="0" marL="0">
               <a:lnSpc>
-                <a:spcPct val="110000"/>
+                <a:spcPct val="115000"/>
               </a:lnSpc>
               <a:buNone/>
             </a:pPr>
@@ -2104,7 +2104,7 @@
         </p:nvSpPr>
         <p:spPr>
           <a:xfrm>
-            <a:off x="640080" y="3026664"/>
+            <a:off x="640080" y="2843784"/>
             <a:ext cx="128016" cy="128016"/>
           </a:xfrm>
           <a:prstGeom prst="roundRect">
@@ -2126,8 +2126,8 @@
         </p:nvSpPr>
         <p:spPr>
           <a:xfrm>
-            <a:off x="914400" y="2971800"/>
-            <a:ext cx="5577840" cy="274320"/>
+            <a:off x="914400" y="2788920"/>
+            <a:ext cx="5669280" cy="274320"/>
           </a:xfrm>
           <a:prstGeom prst="rect">
             <a:avLst/>
@@ -2168,8 +2168,8 @@
         </p:nvSpPr>
         <p:spPr>
           <a:xfrm>
-            <a:off x="914400" y="3255264"/>
-            <a:ext cx="5577840" cy="548640"/>
+            <a:off x="914400" y="3072384"/>
+            <a:ext cx="5669280" cy="548640"/>
           </a:xfrm>
           <a:prstGeom prst="rect">
             <a:avLst/>
@@ -2183,7 +2183,7 @@
           <a:p>
             <a:pPr algn="l" indent="0" marL="0">
               <a:lnSpc>
-                <a:spcPct val="110000"/>
+                <a:spcPct val="115000"/>
               </a:lnSpc>
               <a:buNone/>
             </a:pPr>
@@ -2210,7 +2210,7 @@
         </p:nvSpPr>
         <p:spPr>
           <a:xfrm>
-            <a:off x="640080" y="3849624"/>
+            <a:off x="640080" y="3666744"/>
             <a:ext cx="128016" cy="128016"/>
           </a:xfrm>
           <a:prstGeom prst="roundRect">
@@ -2232,8 +2232,8 @@
         </p:nvSpPr>
         <p:spPr>
           <a:xfrm>
-            <a:off x="914400" y="3794760"/>
-            <a:ext cx="5577840" cy="274320"/>
+            <a:off x="914400" y="3611880"/>
+            <a:ext cx="5669280" cy="274320"/>
           </a:xfrm>
           <a:prstGeom prst="rect">
             <a:avLst/>
@@ -2260,7 +2260,7 @@
                 <a:ea typeface="Malgun Gothic" pitchFamily="34" charset="-122"/>
                 <a:cs typeface="Malgun Gothic" pitchFamily="34" charset="-120"/>
               </a:rPr>
-              <a:t>핵심 기능 한 흐름에</a:t>
+              <a:t>핵심 기능을 한 흐름에</a:t>
             </a:r>
             <a:endParaRPr lang="en-US" sz="1400" dirty="0"/>
           </a:p>
@@ -2274,8 +2274,8 @@
         </p:nvSpPr>
         <p:spPr>
           <a:xfrm>
-            <a:off x="914400" y="4078224"/>
-            <a:ext cx="5577840" cy="548640"/>
+            <a:off x="914400" y="3895344"/>
+            <a:ext cx="5669280" cy="548640"/>
           </a:xfrm>
           <a:prstGeom prst="rect">
             <a:avLst/>
@@ -2289,7 +2289,7 @@
           <a:p>
             <a:pPr algn="l" indent="0" marL="0">
               <a:lnSpc>
-                <a:spcPct val="110000"/>
+                <a:spcPct val="115000"/>
               </a:lnSpc>
               <a:buNone/>
             </a:pPr>
@@ -2316,7 +2316,7 @@
         </p:nvSpPr>
         <p:spPr>
           <a:xfrm>
-            <a:off x="640080" y="4672584"/>
+            <a:off x="640080" y="4489704"/>
             <a:ext cx="128016" cy="128016"/>
           </a:xfrm>
           <a:prstGeom prst="roundRect">
@@ -2338,8 +2338,8 @@
         </p:nvSpPr>
         <p:spPr>
           <a:xfrm>
-            <a:off x="914400" y="4617720"/>
-            <a:ext cx="5577840" cy="274320"/>
+            <a:off x="914400" y="4434840"/>
+            <a:ext cx="5669280" cy="274320"/>
           </a:xfrm>
           <a:prstGeom prst="rect">
             <a:avLst/>
@@ -2380,8 +2380,8 @@
         </p:nvSpPr>
         <p:spPr>
           <a:xfrm>
-            <a:off x="914400" y="4901184"/>
-            <a:ext cx="5577840" cy="548640"/>
+            <a:off x="914400" y="4718304"/>
+            <a:ext cx="5669280" cy="548640"/>
           </a:xfrm>
           <a:prstGeom prst="rect">
             <a:avLst/>
@@ -2395,7 +2395,7 @@
           <a:p>
             <a:pPr algn="l" indent="0" marL="0">
               <a:lnSpc>
-                <a:spcPct val="110000"/>
+                <a:spcPct val="115000"/>
               </a:lnSpc>
               <a:buNone/>
             </a:pPr>
@@ -2408,7 +2408,7 @@
                 <a:ea typeface="Malgun Gothic" pitchFamily="34" charset="-122"/>
                 <a:cs typeface="Malgun Gothic" pitchFamily="34" charset="-120"/>
               </a:rPr>
-              <a:t>중요 정보 좌상단 · 수치는 큰 글씨 · 장식 최소</a:t>
+              <a:t>중요 정보 좌상단 · 수치는 큰 글씨 · 장식 최소화</a:t>
             </a:r>
             <a:endParaRPr lang="en-US" sz="1150" dirty="0"/>
           </a:p>
@@ -2422,12 +2422,12 @@
         </p:nvSpPr>
         <p:spPr>
           <a:xfrm>
-            <a:off x="6858000" y="2148840"/>
-            <a:ext cx="4693615" cy="3246120"/>
+            <a:off x="6949440" y="1965960"/>
+            <a:ext cx="4602175" cy="3291840"/>
           </a:xfrm>
           <a:prstGeom prst="roundRect">
             <a:avLst>
-              <a:gd name="adj" fmla="val 3380"/>
+              <a:gd name="adj" fmla="val 3333"/>
             </a:avLst>
           </a:prstGeom>
           <a:solidFill>
@@ -2449,8 +2449,8 @@
         </p:nvSpPr>
         <p:spPr>
           <a:xfrm>
-            <a:off x="7114032" y="2331720"/>
-            <a:ext cx="4181551" cy="274320"/>
+            <a:off x="7205472" y="2157984"/>
+            <a:ext cx="4090111" cy="274320"/>
           </a:xfrm>
           <a:prstGeom prst="rect">
             <a:avLst/>
@@ -2491,8 +2491,8 @@
         </p:nvSpPr>
         <p:spPr>
           <a:xfrm>
-            <a:off x="7114032" y="2697480"/>
-            <a:ext cx="4181551" cy="274320"/>
+            <a:off x="7205472" y="2542032"/>
+            <a:ext cx="4090111" cy="274320"/>
           </a:xfrm>
           <a:prstGeom prst="rect">
             <a:avLst/>
@@ -2511,9 +2511,9 @@
               <a:buNone/>
             </a:pPr>
             <a:r>
-              <a:rPr lang="en-US" sz="1200" dirty="0">
-                <a:solidFill>
-                  <a:srgbClr val="E6E9EF"/>
+              <a:rPr lang="en-US" sz="1200" b="1" dirty="0">
+                <a:solidFill>
+                  <a:srgbClr val="4C8DFF"/>
                 </a:solidFill>
                 <a:latin typeface="Malgun Gothic" pitchFamily="34" charset="0"/>
                 <a:ea typeface="Malgun Gothic" pitchFamily="34" charset="-122"/>
@@ -2533,8 +2533,8 @@
         </p:nvSpPr>
         <p:spPr>
           <a:xfrm>
-            <a:off x="7114032" y="2926080"/>
-            <a:ext cx="4181551" cy="365760"/>
+            <a:off x="7205472" y="2779776"/>
+            <a:ext cx="4090111" cy="365760"/>
           </a:xfrm>
           <a:prstGeom prst="rect">
             <a:avLst/>
@@ -2548,7 +2548,7 @@
           <a:p>
             <a:pPr algn="l" indent="0" marL="0">
               <a:lnSpc>
-                <a:spcPct val="110000"/>
+                <a:spcPct val="115000"/>
               </a:lnSpc>
               <a:buNone/>
             </a:pPr>
@@ -2575,8 +2575,8 @@
         </p:nvSpPr>
         <p:spPr>
           <a:xfrm>
-            <a:off x="7114032" y="3429000"/>
-            <a:ext cx="4181551" cy="274320"/>
+            <a:off x="7205472" y="3291840"/>
+            <a:ext cx="4090111" cy="274320"/>
           </a:xfrm>
           <a:prstGeom prst="rect">
             <a:avLst/>
@@ -2595,9 +2595,9 @@
               <a:buNone/>
             </a:pPr>
             <a:r>
-              <a:rPr lang="en-US" sz="1200" dirty="0">
-                <a:solidFill>
-                  <a:srgbClr val="E6E9EF"/>
+              <a:rPr lang="en-US" sz="1200" b="1" dirty="0">
+                <a:solidFill>
+                  <a:srgbClr val="4C8DFF"/>
                 </a:solidFill>
                 <a:latin typeface="Malgun Gothic" pitchFamily="34" charset="0"/>
                 <a:ea typeface="Malgun Gothic" pitchFamily="34" charset="-122"/>
@@ -2617,8 +2617,8 @@
         </p:nvSpPr>
         <p:spPr>
           <a:xfrm>
-            <a:off x="7114032" y="3657600"/>
-            <a:ext cx="4181551" cy="365760"/>
+            <a:off x="7205472" y="3529584"/>
+            <a:ext cx="4090111" cy="365760"/>
           </a:xfrm>
           <a:prstGeom prst="rect">
             <a:avLst/>
@@ -2632,7 +2632,7 @@
           <a:p>
             <a:pPr algn="l" indent="0" marL="0">
               <a:lnSpc>
-                <a:spcPct val="110000"/>
+                <a:spcPct val="115000"/>
               </a:lnSpc>
               <a:buNone/>
             </a:pPr>
@@ -2659,8 +2659,8 @@
         </p:nvSpPr>
         <p:spPr>
           <a:xfrm>
-            <a:off x="7114032" y="4343400"/>
-            <a:ext cx="1417320" cy="365760"/>
+            <a:off x="7205472" y="4069080"/>
+            <a:ext cx="1975104" cy="384048"/>
           </a:xfrm>
           <a:prstGeom prst="roundRect">
             <a:avLst>
@@ -2686,8 +2686,8 @@
         </p:nvSpPr>
         <p:spPr>
           <a:xfrm>
-            <a:off x="7114032" y="4343400"/>
-            <a:ext cx="1417320" cy="365760"/>
+            <a:off x="7205472" y="4069080"/>
+            <a:ext cx="1975104" cy="384048"/>
           </a:xfrm>
           <a:prstGeom prst="rect">
             <a:avLst/>
@@ -2714,7 +2714,7 @@
                 <a:ea typeface="Malgun Gothic" pitchFamily="34" charset="-122"/>
                 <a:cs typeface="Malgun Gothic" pitchFamily="34" charset="-120"/>
               </a:rPr>
-              <a:t>Key: Minimal</a:t>
+              <a:t>Minimal</a:t>
             </a:r>
             <a:endParaRPr lang="en-US" sz="1000" dirty="0"/>
           </a:p>
@@ -2728,8 +2728,8 @@
         </p:nvSpPr>
         <p:spPr>
           <a:xfrm>
-            <a:off x="8641080" y="4343400"/>
-            <a:ext cx="1417320" cy="365760"/>
+            <a:off x="9290304" y="4069080"/>
+            <a:ext cx="1975104" cy="384048"/>
           </a:xfrm>
           <a:prstGeom prst="roundRect">
             <a:avLst>
@@ -2755,8 +2755,8 @@
         </p:nvSpPr>
         <p:spPr>
           <a:xfrm>
-            <a:off x="8641080" y="4343400"/>
-            <a:ext cx="1417320" cy="365760"/>
+            <a:off x="9290304" y="4069080"/>
+            <a:ext cx="1975104" cy="384048"/>
           </a:xfrm>
           <a:prstGeom prst="rect">
             <a:avLst/>
@@ -2797,8 +2797,8 @@
         </p:nvSpPr>
         <p:spPr>
           <a:xfrm>
-            <a:off x="10168128" y="4343400"/>
-            <a:ext cx="1417320" cy="365760"/>
+            <a:off x="7205472" y="4526280"/>
+            <a:ext cx="1975104" cy="384048"/>
           </a:xfrm>
           <a:prstGeom prst="roundRect">
             <a:avLst>
@@ -2824,8 +2824,8 @@
         </p:nvSpPr>
         <p:spPr>
           <a:xfrm>
-            <a:off x="10168128" y="4343400"/>
-            <a:ext cx="1417320" cy="365760"/>
+            <a:off x="7205472" y="4526280"/>
+            <a:ext cx="1975104" cy="384048"/>
           </a:xfrm>
           <a:prstGeom prst="rect">
             <a:avLst/>
@@ -2866,8 +2866,8 @@
         </p:nvSpPr>
         <p:spPr>
           <a:xfrm>
-            <a:off x="11695176" y="4343400"/>
-            <a:ext cx="1417320" cy="365760"/>
+            <a:off x="9290304" y="4526280"/>
+            <a:ext cx="1975104" cy="384048"/>
           </a:xfrm>
           <a:prstGeom prst="roundRect">
             <a:avLst>
@@ -2893,8 +2893,8 @@
         </p:nvSpPr>
         <p:spPr>
           <a:xfrm>
-            <a:off x="11695176" y="4343400"/>
-            <a:ext cx="1417320" cy="365760"/>
+            <a:off x="9290304" y="4526280"/>
+            <a:ext cx="1975104" cy="384048"/>
           </a:xfrm>
           <a:prstGeom prst="rect">
             <a:avLst/>
@@ -2935,7 +2935,7 @@
         </p:nvSpPr>
         <p:spPr>
           <a:xfrm>
-            <a:off x="640080" y="6355080"/>
+            <a:off x="640080" y="6382512"/>
             <a:ext cx="10911535" cy="0"/>
           </a:xfrm>
           <a:prstGeom prst="line">
@@ -2958,7 +2958,7 @@
         </p:nvSpPr>
         <p:spPr>
           <a:xfrm>
-            <a:off x="640080" y="6419088"/>
+            <a:off x="640080" y="6455664"/>
             <a:ext cx="5486400" cy="274320"/>
           </a:xfrm>
           <a:prstGeom prst="rect">
@@ -3000,7 +3000,7 @@
         </p:nvSpPr>
         <p:spPr>
           <a:xfrm>
-            <a:off x="9722815" y="6419088"/>
+            <a:off x="9722815" y="6455664"/>
             <a:ext cx="1828800" cy="274320"/>
           </a:xfrm>
           <a:prstGeom prst="rect">
@@ -3074,7 +3074,7 @@
         </p:nvSpPr>
         <p:spPr>
           <a:xfrm>
-            <a:off x="640080" y="475488"/>
+            <a:off x="640080" y="457200"/>
             <a:ext cx="10911535" cy="274320"/>
           </a:xfrm>
           <a:prstGeom prst="rect">
@@ -3116,7 +3116,7 @@
         </p:nvSpPr>
         <p:spPr>
           <a:xfrm>
-            <a:off x="640080" y="749808"/>
+            <a:off x="640080" y="731520"/>
             <a:ext cx="10911535" cy="548640"/>
           </a:xfrm>
           <a:prstGeom prst="rect">
@@ -3136,7 +3136,7 @@
               <a:buNone/>
             </a:pPr>
             <a:r>
-              <a:rPr lang="en-US" sz="2700" b="1" dirty="0">
+              <a:rPr lang="en-US" sz="2600" b="1" dirty="0">
                 <a:solidFill>
                   <a:srgbClr val="E6E9EF"/>
                 </a:solidFill>
@@ -3146,7 +3146,7 @@
               </a:rPr>
               <a:t>디자인 시스템</a:t>
             </a:r>
-            <a:endParaRPr lang="en-US" sz="2700" dirty="0"/>
+            <a:endParaRPr lang="en-US" sz="2600" dirty="0"/>
           </a:p>
         </p:txBody>
       </p:sp>
@@ -3159,7 +3159,7 @@
         <p:spPr>
           <a:xfrm>
             <a:off x="640080" y="1298448"/>
-            <a:ext cx="10911535" cy="411480"/>
+            <a:ext cx="10911535" cy="347472"/>
           </a:xfrm>
           <a:prstGeom prst="rect">
             <a:avLst/>
@@ -3178,7 +3178,7 @@
               <a:buNone/>
             </a:pPr>
             <a:r>
-              <a:rPr lang="en-US" sz="1300" dirty="0">
+              <a:rPr lang="en-US" sz="1200" dirty="0">
                 <a:solidFill>
                   <a:srgbClr val="8A9099"/>
                 </a:solidFill>
@@ -3188,7 +3188,7 @@
               </a:rPr>
               <a:t>토큰 하나로 색·타이포·컴포넌트를 통일합니다.</a:t>
             </a:r>
-            <a:endParaRPr lang="en-US" sz="1300" dirty="0"/>
+            <a:endParaRPr lang="en-US" sz="1200" dirty="0"/>
           </a:p>
         </p:txBody>
       </p:sp>
@@ -3200,7 +3200,7 @@
         </p:nvSpPr>
         <p:spPr>
           <a:xfrm>
-            <a:off x="640080" y="1965960"/>
+            <a:off x="640080" y="1828800"/>
             <a:ext cx="5486400" cy="228600"/>
           </a:xfrm>
           <a:prstGeom prst="rect">
@@ -3242,12 +3242,12 @@
         </p:nvSpPr>
         <p:spPr>
           <a:xfrm>
-            <a:off x="640080" y="2240280"/>
-            <a:ext cx="1999427" cy="457200"/>
+            <a:off x="640080" y="2148840"/>
+            <a:ext cx="329184" cy="329184"/>
           </a:xfrm>
           <a:prstGeom prst="roundRect">
             <a:avLst>
-              <a:gd name="adj" fmla="val 12000"/>
+              <a:gd name="adj" fmla="val 16667"/>
             </a:avLst>
           </a:prstGeom>
           <a:solidFill>
@@ -3269,8 +3269,8 @@
         </p:nvSpPr>
         <p:spPr>
           <a:xfrm>
-            <a:off x="640080" y="2734056"/>
-            <a:ext cx="1999427" cy="182880"/>
+            <a:off x="1078992" y="2130552"/>
+            <a:ext cx="2377440" cy="182880"/>
           </a:xfrm>
           <a:prstGeom prst="rect">
             <a:avLst/>
@@ -3289,7 +3289,7 @@
               <a:buNone/>
             </a:pPr>
             <a:r>
-              <a:rPr lang="en-US" sz="950" b="1" dirty="0">
+              <a:rPr lang="en-US" sz="1000" b="1" dirty="0">
                 <a:solidFill>
                   <a:srgbClr val="E6E9EF"/>
                 </a:solidFill>
@@ -3299,7 +3299,7 @@
               </a:rPr>
               <a:t>Background</a:t>
             </a:r>
-            <a:endParaRPr lang="en-US" sz="950" dirty="0"/>
+            <a:endParaRPr lang="en-US" sz="1000" dirty="0"/>
           </a:p>
         </p:txBody>
       </p:sp>
@@ -3311,8 +3311,8 @@
         </p:nvSpPr>
         <p:spPr>
           <a:xfrm>
-            <a:off x="640080" y="2898648"/>
-            <a:ext cx="1999427" cy="182880"/>
+            <a:off x="1078992" y="2304288"/>
+            <a:ext cx="2377440" cy="182880"/>
           </a:xfrm>
           <a:prstGeom prst="rect">
             <a:avLst/>
@@ -3331,7 +3331,7 @@
               <a:buNone/>
             </a:pPr>
             <a:r>
-              <a:rPr lang="en-US" sz="850" dirty="0">
+              <a:rPr lang="en-US" sz="900" dirty="0">
                 <a:solidFill>
                   <a:srgbClr val="8A9099"/>
                 </a:solidFill>
@@ -3341,7 +3341,7 @@
               </a:rPr>
               <a:t>#0F1115</a:t>
             </a:r>
-            <a:endParaRPr lang="en-US" sz="850" dirty="0"/>
+            <a:endParaRPr lang="en-US" sz="900" dirty="0"/>
           </a:p>
         </p:txBody>
       </p:sp>
@@ -3353,12 +3353,12 @@
         </p:nvSpPr>
         <p:spPr>
           <a:xfrm>
-            <a:off x="2822387" y="2240280"/>
-            <a:ext cx="1999427" cy="457200"/>
+            <a:off x="640080" y="2715768"/>
+            <a:ext cx="329184" cy="329184"/>
           </a:xfrm>
           <a:prstGeom prst="roundRect">
             <a:avLst>
-              <a:gd name="adj" fmla="val 12000"/>
+              <a:gd name="adj" fmla="val 16667"/>
             </a:avLst>
           </a:prstGeom>
           <a:solidFill>
@@ -3380,8 +3380,8 @@
         </p:nvSpPr>
         <p:spPr>
           <a:xfrm>
-            <a:off x="2822387" y="2734056"/>
-            <a:ext cx="1999427" cy="182880"/>
+            <a:off x="1078992" y="2697480"/>
+            <a:ext cx="2377440" cy="182880"/>
           </a:xfrm>
           <a:prstGeom prst="rect">
             <a:avLst/>
@@ -3400,7 +3400,7 @@
               <a:buNone/>
             </a:pPr>
             <a:r>
-              <a:rPr lang="en-US" sz="950" b="1" dirty="0">
+              <a:rPr lang="en-US" sz="1000" b="1" dirty="0">
                 <a:solidFill>
                   <a:srgbClr val="E6E9EF"/>
                 </a:solidFill>
@@ -3410,7 +3410,7 @@
               </a:rPr>
               <a:t>Surface</a:t>
             </a:r>
-            <a:endParaRPr lang="en-US" sz="950" dirty="0"/>
+            <a:endParaRPr lang="en-US" sz="1000" dirty="0"/>
           </a:p>
         </p:txBody>
       </p:sp>
@@ -3422,8 +3422,8 @@
         </p:nvSpPr>
         <p:spPr>
           <a:xfrm>
-            <a:off x="2822387" y="2898648"/>
-            <a:ext cx="1999427" cy="182880"/>
+            <a:off x="1078992" y="2871216"/>
+            <a:ext cx="2377440" cy="182880"/>
           </a:xfrm>
           <a:prstGeom prst="rect">
             <a:avLst/>
@@ -3442,7 +3442,7 @@
               <a:buNone/>
             </a:pPr>
             <a:r>
-              <a:rPr lang="en-US" sz="850" dirty="0">
+              <a:rPr lang="en-US" sz="900" dirty="0">
                 <a:solidFill>
                   <a:srgbClr val="8A9099"/>
                 </a:solidFill>
@@ -3452,7 +3452,7 @@
               </a:rPr>
               <a:t>#1A1D23</a:t>
             </a:r>
-            <a:endParaRPr lang="en-US" sz="850" dirty="0"/>
+            <a:endParaRPr lang="en-US" sz="900" dirty="0"/>
           </a:p>
         </p:txBody>
       </p:sp>
@@ -3464,12 +3464,12 @@
         </p:nvSpPr>
         <p:spPr>
           <a:xfrm>
-            <a:off x="5004694" y="2240280"/>
-            <a:ext cx="1999427" cy="457200"/>
+            <a:off x="640080" y="3282696"/>
+            <a:ext cx="329184" cy="329184"/>
           </a:xfrm>
           <a:prstGeom prst="roundRect">
             <a:avLst>
-              <a:gd name="adj" fmla="val 12000"/>
+              <a:gd name="adj" fmla="val 16667"/>
             </a:avLst>
           </a:prstGeom>
           <a:solidFill>
@@ -3491,8 +3491,8 @@
         </p:nvSpPr>
         <p:spPr>
           <a:xfrm>
-            <a:off x="5004694" y="2734056"/>
-            <a:ext cx="1999427" cy="182880"/>
+            <a:off x="1078992" y="3264408"/>
+            <a:ext cx="2377440" cy="182880"/>
           </a:xfrm>
           <a:prstGeom prst="rect">
             <a:avLst/>
@@ -3511,7 +3511,7 @@
               <a:buNone/>
             </a:pPr>
             <a:r>
-              <a:rPr lang="en-US" sz="950" b="1" dirty="0">
+              <a:rPr lang="en-US" sz="1000" b="1" dirty="0">
                 <a:solidFill>
                   <a:srgbClr val="E6E9EF"/>
                 </a:solidFill>
@@ -3521,7 +3521,7 @@
               </a:rPr>
               <a:t>Surface Variant</a:t>
             </a:r>
-            <a:endParaRPr lang="en-US" sz="950" dirty="0"/>
+            <a:endParaRPr lang="en-US" sz="1000" dirty="0"/>
           </a:p>
         </p:txBody>
       </p:sp>
@@ -3533,8 +3533,8 @@
         </p:nvSpPr>
         <p:spPr>
           <a:xfrm>
-            <a:off x="5004694" y="2898648"/>
-            <a:ext cx="1999427" cy="182880"/>
+            <a:off x="1078992" y="3438144"/>
+            <a:ext cx="2377440" cy="182880"/>
           </a:xfrm>
           <a:prstGeom prst="rect">
             <a:avLst/>
@@ -3553,7 +3553,7 @@
               <a:buNone/>
             </a:pPr>
             <a:r>
-              <a:rPr lang="en-US" sz="850" dirty="0">
+              <a:rPr lang="en-US" sz="900" dirty="0">
                 <a:solidFill>
                   <a:srgbClr val="8A9099"/>
                 </a:solidFill>
@@ -3563,7 +3563,7 @@
               </a:rPr>
               <a:t>#232732</a:t>
             </a:r>
-            <a:endParaRPr lang="en-US" sz="850" dirty="0"/>
+            <a:endParaRPr lang="en-US" sz="900" dirty="0"/>
           </a:p>
         </p:txBody>
       </p:sp>
@@ -3575,12 +3575,12 @@
         </p:nvSpPr>
         <p:spPr>
           <a:xfrm>
-            <a:off x="7187001" y="2240280"/>
-            <a:ext cx="1999427" cy="457200"/>
+            <a:off x="640080" y="3849624"/>
+            <a:ext cx="329184" cy="329184"/>
           </a:xfrm>
           <a:prstGeom prst="roundRect">
             <a:avLst>
-              <a:gd name="adj" fmla="val 12000"/>
+              <a:gd name="adj" fmla="val 16667"/>
             </a:avLst>
           </a:prstGeom>
           <a:solidFill>
@@ -3602,8 +3602,8 @@
         </p:nvSpPr>
         <p:spPr>
           <a:xfrm>
-            <a:off x="7187001" y="2734056"/>
-            <a:ext cx="1999427" cy="182880"/>
+            <a:off x="1078992" y="3831336"/>
+            <a:ext cx="2377440" cy="182880"/>
           </a:xfrm>
           <a:prstGeom prst="rect">
             <a:avLst/>
@@ -3622,7 +3622,7 @@
               <a:buNone/>
             </a:pPr>
             <a:r>
-              <a:rPr lang="en-US" sz="950" b="1" dirty="0">
+              <a:rPr lang="en-US" sz="1000" b="1" dirty="0">
                 <a:solidFill>
                   <a:srgbClr val="E6E9EF"/>
                 </a:solidFill>
@@ -3632,7 +3632,7 @@
               </a:rPr>
               <a:t>On-Surface</a:t>
             </a:r>
-            <a:endParaRPr lang="en-US" sz="950" dirty="0"/>
+            <a:endParaRPr lang="en-US" sz="1000" dirty="0"/>
           </a:p>
         </p:txBody>
       </p:sp>
@@ -3644,8 +3644,8 @@
         </p:nvSpPr>
         <p:spPr>
           <a:xfrm>
-            <a:off x="7187001" y="2898648"/>
-            <a:ext cx="1999427" cy="182880"/>
+            <a:off x="1078992" y="4005072"/>
+            <a:ext cx="2377440" cy="182880"/>
           </a:xfrm>
           <a:prstGeom prst="rect">
             <a:avLst/>
@@ -3664,7 +3664,7 @@
               <a:buNone/>
             </a:pPr>
             <a:r>
-              <a:rPr lang="en-US" sz="850" dirty="0">
+              <a:rPr lang="en-US" sz="900" dirty="0">
                 <a:solidFill>
                   <a:srgbClr val="8A9099"/>
                 </a:solidFill>
@@ -3674,7 +3674,7 @@
               </a:rPr>
               <a:t>#E6E9EF</a:t>
             </a:r>
-            <a:endParaRPr lang="en-US" sz="850" dirty="0"/>
+            <a:endParaRPr lang="en-US" sz="900" dirty="0"/>
           </a:p>
         </p:txBody>
       </p:sp>
@@ -3686,12 +3686,12 @@
         </p:nvSpPr>
         <p:spPr>
           <a:xfrm>
-            <a:off x="9369308" y="2240280"/>
-            <a:ext cx="1999427" cy="457200"/>
+            <a:off x="640080" y="4416552"/>
+            <a:ext cx="329184" cy="329184"/>
           </a:xfrm>
           <a:prstGeom prst="roundRect">
             <a:avLst>
-              <a:gd name="adj" fmla="val 12000"/>
+              <a:gd name="adj" fmla="val 16667"/>
             </a:avLst>
           </a:prstGeom>
           <a:solidFill>
@@ -3713,8 +3713,8 @@
         </p:nvSpPr>
         <p:spPr>
           <a:xfrm>
-            <a:off x="9369308" y="2734056"/>
-            <a:ext cx="1999427" cy="182880"/>
+            <a:off x="1078992" y="4398264"/>
+            <a:ext cx="2377440" cy="182880"/>
           </a:xfrm>
           <a:prstGeom prst="rect">
             <a:avLst/>
@@ -3733,7 +3733,7 @@
               <a:buNone/>
             </a:pPr>
             <a:r>
-              <a:rPr lang="en-US" sz="950" b="1" dirty="0">
+              <a:rPr lang="en-US" sz="1000" b="1" dirty="0">
                 <a:solidFill>
                   <a:srgbClr val="E6E9EF"/>
                 </a:solidFill>
@@ -3743,7 +3743,7 @@
               </a:rPr>
               <a:t>On-Variant</a:t>
             </a:r>
-            <a:endParaRPr lang="en-US" sz="950" dirty="0"/>
+            <a:endParaRPr lang="en-US" sz="1000" dirty="0"/>
           </a:p>
         </p:txBody>
       </p:sp>
@@ -3755,8 +3755,8 @@
         </p:nvSpPr>
         <p:spPr>
           <a:xfrm>
-            <a:off x="9369308" y="2898648"/>
-            <a:ext cx="1999427" cy="182880"/>
+            <a:off x="1078992" y="4572000"/>
+            <a:ext cx="2377440" cy="182880"/>
           </a:xfrm>
           <a:prstGeom prst="rect">
             <a:avLst/>
@@ -3775,7 +3775,7 @@
               <a:buNone/>
             </a:pPr>
             <a:r>
-              <a:rPr lang="en-US" sz="850" dirty="0">
+              <a:rPr lang="en-US" sz="900" dirty="0">
                 <a:solidFill>
                   <a:srgbClr val="8A9099"/>
                 </a:solidFill>
@@ -3785,7 +3785,7 @@
               </a:rPr>
               <a:t>#8A9099</a:t>
             </a:r>
-            <a:endParaRPr lang="en-US" sz="850" dirty="0"/>
+            <a:endParaRPr lang="en-US" sz="900" dirty="0"/>
           </a:p>
         </p:txBody>
       </p:sp>
@@ -3797,12 +3797,12 @@
         </p:nvSpPr>
         <p:spPr>
           <a:xfrm>
-            <a:off x="640080" y="3081528"/>
-            <a:ext cx="1999427" cy="457200"/>
+            <a:off x="3520440" y="2148840"/>
+            <a:ext cx="329184" cy="329184"/>
           </a:xfrm>
           <a:prstGeom prst="roundRect">
             <a:avLst>
-              <a:gd name="adj" fmla="val 12000"/>
+              <a:gd name="adj" fmla="val 16667"/>
             </a:avLst>
           </a:prstGeom>
           <a:solidFill>
@@ -3824,8 +3824,8 @@
         </p:nvSpPr>
         <p:spPr>
           <a:xfrm>
-            <a:off x="640080" y="3575304"/>
-            <a:ext cx="1999427" cy="182880"/>
+            <a:off x="3959352" y="2130552"/>
+            <a:ext cx="2377440" cy="182880"/>
           </a:xfrm>
           <a:prstGeom prst="rect">
             <a:avLst/>
@@ -3844,7 +3844,7 @@
               <a:buNone/>
             </a:pPr>
             <a:r>
-              <a:rPr lang="en-US" sz="950" b="1" dirty="0">
+              <a:rPr lang="en-US" sz="1000" b="1" dirty="0">
                 <a:solidFill>
                   <a:srgbClr val="E6E9EF"/>
                 </a:solidFill>
@@ -3854,7 +3854,7 @@
               </a:rPr>
               <a:t>Primary</a:t>
             </a:r>
-            <a:endParaRPr lang="en-US" sz="950" dirty="0"/>
+            <a:endParaRPr lang="en-US" sz="1000" dirty="0"/>
           </a:p>
         </p:txBody>
       </p:sp>
@@ -3866,8 +3866,8 @@
         </p:nvSpPr>
         <p:spPr>
           <a:xfrm>
-            <a:off x="640080" y="3739896"/>
-            <a:ext cx="1999427" cy="182880"/>
+            <a:off x="3959352" y="2304288"/>
+            <a:ext cx="2377440" cy="182880"/>
           </a:xfrm>
           <a:prstGeom prst="rect">
             <a:avLst/>
@@ -3886,7 +3886,7 @@
               <a:buNone/>
             </a:pPr>
             <a:r>
-              <a:rPr lang="en-US" sz="850" dirty="0">
+              <a:rPr lang="en-US" sz="900" dirty="0">
                 <a:solidFill>
                   <a:srgbClr val="8A9099"/>
                 </a:solidFill>
@@ -3896,7 +3896,7 @@
               </a:rPr>
               <a:t>#4C8DFF</a:t>
             </a:r>
-            <a:endParaRPr lang="en-US" sz="850" dirty="0"/>
+            <a:endParaRPr lang="en-US" sz="900" dirty="0"/>
           </a:p>
         </p:txBody>
       </p:sp>
@@ -3908,12 +3908,12 @@
         </p:nvSpPr>
         <p:spPr>
           <a:xfrm>
-            <a:off x="2822387" y="3081528"/>
-            <a:ext cx="1999427" cy="457200"/>
+            <a:off x="3520440" y="2715768"/>
+            <a:ext cx="329184" cy="329184"/>
           </a:xfrm>
           <a:prstGeom prst="roundRect">
             <a:avLst>
-              <a:gd name="adj" fmla="val 12000"/>
+              <a:gd name="adj" fmla="val 16667"/>
             </a:avLst>
           </a:prstGeom>
           <a:solidFill>
@@ -3935,8 +3935,8 @@
         </p:nvSpPr>
         <p:spPr>
           <a:xfrm>
-            <a:off x="2822387" y="3575304"/>
-            <a:ext cx="1999427" cy="182880"/>
+            <a:off x="3959352" y="2697480"/>
+            <a:ext cx="2377440" cy="182880"/>
           </a:xfrm>
           <a:prstGeom prst="rect">
             <a:avLst/>
@@ -3955,7 +3955,7 @@
               <a:buNone/>
             </a:pPr>
             <a:r>
-              <a:rPr lang="en-US" sz="950" b="1" dirty="0">
+              <a:rPr lang="en-US" sz="1000" b="1" dirty="0">
                 <a:solidFill>
                   <a:srgbClr val="E6E9EF"/>
                 </a:solidFill>
@@ -3965,7 +3965,7 @@
               </a:rPr>
               <a:t>Success</a:t>
             </a:r>
-            <a:endParaRPr lang="en-US" sz="950" dirty="0"/>
+            <a:endParaRPr lang="en-US" sz="1000" dirty="0"/>
           </a:p>
         </p:txBody>
       </p:sp>
@@ -3977,8 +3977,8 @@
         </p:nvSpPr>
         <p:spPr>
           <a:xfrm>
-            <a:off x="2822387" y="3739896"/>
-            <a:ext cx="1999427" cy="182880"/>
+            <a:off x="3959352" y="2871216"/>
+            <a:ext cx="2377440" cy="182880"/>
           </a:xfrm>
           <a:prstGeom prst="rect">
             <a:avLst/>
@@ -3997,7 +3997,7 @@
               <a:buNone/>
             </a:pPr>
             <a:r>
-              <a:rPr lang="en-US" sz="850" dirty="0">
+              <a:rPr lang="en-US" sz="900" dirty="0">
                 <a:solidFill>
                   <a:srgbClr val="8A9099"/>
                 </a:solidFill>
@@ -4007,7 +4007,7 @@
               </a:rPr>
               <a:t>#3DDC84</a:t>
             </a:r>
-            <a:endParaRPr lang="en-US" sz="850" dirty="0"/>
+            <a:endParaRPr lang="en-US" sz="900" dirty="0"/>
           </a:p>
         </p:txBody>
       </p:sp>
@@ -4019,12 +4019,12 @@
         </p:nvSpPr>
         <p:spPr>
           <a:xfrm>
-            <a:off x="5004694" y="3081528"/>
-            <a:ext cx="1999427" cy="457200"/>
+            <a:off x="3520440" y="3282696"/>
+            <a:ext cx="329184" cy="329184"/>
           </a:xfrm>
           <a:prstGeom prst="roundRect">
             <a:avLst>
-              <a:gd name="adj" fmla="val 12000"/>
+              <a:gd name="adj" fmla="val 16667"/>
             </a:avLst>
           </a:prstGeom>
           <a:solidFill>
@@ -4046,8 +4046,8 @@
         </p:nvSpPr>
         <p:spPr>
           <a:xfrm>
-            <a:off x="5004694" y="3575304"/>
-            <a:ext cx="1999427" cy="182880"/>
+            <a:off x="3959352" y="3264408"/>
+            <a:ext cx="2377440" cy="182880"/>
           </a:xfrm>
           <a:prstGeom prst="rect">
             <a:avLst/>
@@ -4066,7 +4066,7 @@
               <a:buNone/>
             </a:pPr>
             <a:r>
-              <a:rPr lang="en-US" sz="950" b="1" dirty="0">
+              <a:rPr lang="en-US" sz="1000" b="1" dirty="0">
                 <a:solidFill>
                   <a:srgbClr val="E6E9EF"/>
                 </a:solidFill>
@@ -4076,7 +4076,7 @@
               </a:rPr>
               <a:t>Warning</a:t>
             </a:r>
-            <a:endParaRPr lang="en-US" sz="950" dirty="0"/>
+            <a:endParaRPr lang="en-US" sz="1000" dirty="0"/>
           </a:p>
         </p:txBody>
       </p:sp>
@@ -4088,8 +4088,8 @@
         </p:nvSpPr>
         <p:spPr>
           <a:xfrm>
-            <a:off x="5004694" y="3739896"/>
-            <a:ext cx="1999427" cy="182880"/>
+            <a:off x="3959352" y="3438144"/>
+            <a:ext cx="2377440" cy="182880"/>
           </a:xfrm>
           <a:prstGeom prst="rect">
             <a:avLst/>
@@ -4108,7 +4108,7 @@
               <a:buNone/>
             </a:pPr>
             <a:r>
-              <a:rPr lang="en-US" sz="850" dirty="0">
+              <a:rPr lang="en-US" sz="900" dirty="0">
                 <a:solidFill>
                   <a:srgbClr val="8A9099"/>
                 </a:solidFill>
@@ -4118,7 +4118,7 @@
               </a:rPr>
               <a:t>#FFC93C</a:t>
             </a:r>
-            <a:endParaRPr lang="en-US" sz="850" dirty="0"/>
+            <a:endParaRPr lang="en-US" sz="900" dirty="0"/>
           </a:p>
         </p:txBody>
       </p:sp>
@@ -4130,12 +4130,12 @@
         </p:nvSpPr>
         <p:spPr>
           <a:xfrm>
-            <a:off x="7187001" y="3081528"/>
-            <a:ext cx="1999427" cy="457200"/>
+            <a:off x="3520440" y="3849624"/>
+            <a:ext cx="329184" cy="329184"/>
           </a:xfrm>
           <a:prstGeom prst="roundRect">
             <a:avLst>
-              <a:gd name="adj" fmla="val 12000"/>
+              <a:gd name="adj" fmla="val 16667"/>
             </a:avLst>
           </a:prstGeom>
           <a:solidFill>
@@ -4157,8 +4157,8 @@
         </p:nvSpPr>
         <p:spPr>
           <a:xfrm>
-            <a:off x="7187001" y="3575304"/>
-            <a:ext cx="1999427" cy="182880"/>
+            <a:off x="3959352" y="3831336"/>
+            <a:ext cx="2377440" cy="182880"/>
           </a:xfrm>
           <a:prstGeom prst="rect">
             <a:avLst/>
@@ -4177,7 +4177,7 @@
               <a:buNone/>
             </a:pPr>
             <a:r>
-              <a:rPr lang="en-US" sz="950" b="1" dirty="0">
+              <a:rPr lang="en-US" sz="1000" b="1" dirty="0">
                 <a:solidFill>
                   <a:srgbClr val="E6E9EF"/>
                 </a:solidFill>
@@ -4187,7 +4187,7 @@
               </a:rPr>
               <a:t>Error</a:t>
             </a:r>
-            <a:endParaRPr lang="en-US" sz="950" dirty="0"/>
+            <a:endParaRPr lang="en-US" sz="1000" dirty="0"/>
           </a:p>
         </p:txBody>
       </p:sp>
@@ -4199,8 +4199,8 @@
         </p:nvSpPr>
         <p:spPr>
           <a:xfrm>
-            <a:off x="7187001" y="3739896"/>
-            <a:ext cx="1999427" cy="182880"/>
+            <a:off x="3959352" y="4005072"/>
+            <a:ext cx="2377440" cy="182880"/>
           </a:xfrm>
           <a:prstGeom prst="rect">
             <a:avLst/>
@@ -4219,7 +4219,7 @@
               <a:buNone/>
             </a:pPr>
             <a:r>
-              <a:rPr lang="en-US" sz="850" dirty="0">
+              <a:rPr lang="en-US" sz="900" dirty="0">
                 <a:solidFill>
                   <a:srgbClr val="8A9099"/>
                 </a:solidFill>
@@ -4229,7 +4229,7 @@
               </a:rPr>
               <a:t>#FF5C5C</a:t>
             </a:r>
-            <a:endParaRPr lang="en-US" sz="850" dirty="0"/>
+            <a:endParaRPr lang="en-US" sz="900" dirty="0"/>
           </a:p>
         </p:txBody>
       </p:sp>
@@ -4241,12 +4241,12 @@
         </p:nvSpPr>
         <p:spPr>
           <a:xfrm>
-            <a:off x="9369308" y="3081528"/>
-            <a:ext cx="1999427" cy="457200"/>
+            <a:off x="3520440" y="4416552"/>
+            <a:ext cx="329184" cy="329184"/>
           </a:xfrm>
           <a:prstGeom prst="roundRect">
             <a:avLst>
-              <a:gd name="adj" fmla="val 12000"/>
+              <a:gd name="adj" fmla="val 16667"/>
             </a:avLst>
           </a:prstGeom>
           <a:solidFill>
@@ -4268,8 +4268,8 @@
         </p:nvSpPr>
         <p:spPr>
           <a:xfrm>
-            <a:off x="9369308" y="3575304"/>
-            <a:ext cx="1999427" cy="182880"/>
+            <a:off x="3959352" y="4398264"/>
+            <a:ext cx="2377440" cy="182880"/>
           </a:xfrm>
           <a:prstGeom prst="rect">
             <a:avLst/>
@@ -4288,7 +4288,7 @@
               <a:buNone/>
             </a:pPr>
             <a:r>
-              <a:rPr lang="en-US" sz="950" b="1" dirty="0">
+              <a:rPr lang="en-US" sz="1000" b="1" dirty="0">
                 <a:solidFill>
                   <a:srgbClr val="E6E9EF"/>
                 </a:solidFill>
@@ -4298,20 +4298,272 @@
               </a:rPr>
               <a:t>Offline</a:t>
             </a:r>
+            <a:endParaRPr lang="en-US" sz="1000" dirty="0"/>
+          </a:p>
+        </p:txBody>
+      </p:sp>
+      <p:sp>
+        <p:nvSpPr>
+          <p:cNvPr id="35" name="Text 33"/>
+          <p:cNvSpPr txBox="1"/>
+          <p:nvPr/>
+        </p:nvSpPr>
+        <p:spPr>
+          <a:xfrm>
+            <a:off x="3959352" y="4572000"/>
+            <a:ext cx="2377440" cy="182880"/>
+          </a:xfrm>
+          <a:prstGeom prst="rect">
+            <a:avLst/>
+          </a:prstGeom>
+          <a:noFill/>
+          <a:ln/>
+        </p:spPr>
+        <p:txBody>
+          <a:bodyPr wrap="square" lIns="0" tIns="0" rIns="0" bIns="0" rtlCol="0" anchor="t"/>
+          <a:lstStyle/>
+          <a:p>
+            <a:pPr algn="l" indent="0" marL="0">
+              <a:lnSpc>
+                <a:spcPct val="100000"/>
+              </a:lnSpc>
+              <a:buNone/>
+            </a:pPr>
+            <a:r>
+              <a:rPr lang="en-US" sz="900" dirty="0">
+                <a:solidFill>
+                  <a:srgbClr val="8A9099"/>
+                </a:solidFill>
+                <a:latin typeface="Malgun Gothic" pitchFamily="34" charset="0"/>
+                <a:ea typeface="Malgun Gothic" pitchFamily="34" charset="-122"/>
+                <a:cs typeface="Malgun Gothic" pitchFamily="34" charset="-120"/>
+              </a:rPr>
+              <a:t>#6B7280</a:t>
+            </a:r>
+            <a:endParaRPr lang="en-US" sz="900" dirty="0"/>
+          </a:p>
+        </p:txBody>
+      </p:sp>
+      <p:sp>
+        <p:nvSpPr>
+          <p:cNvPr id="36" name="Text 34"/>
+          <p:cNvSpPr txBox="1"/>
+          <p:nvPr/>
+        </p:nvSpPr>
+        <p:spPr>
+          <a:xfrm>
+            <a:off x="6858000" y="1828800"/>
+            <a:ext cx="4693615" cy="228600"/>
+          </a:xfrm>
+          <a:prstGeom prst="rect">
+            <a:avLst/>
+          </a:prstGeom>
+          <a:noFill/>
+          <a:ln/>
+        </p:spPr>
+        <p:txBody>
+          <a:bodyPr wrap="square" lIns="0" tIns="0" rIns="0" bIns="0" rtlCol="0" anchor="t"/>
+          <a:lstStyle/>
+          <a:p>
+            <a:pPr algn="l" indent="0" marL="0">
+              <a:lnSpc>
+                <a:spcPct val="100000"/>
+              </a:lnSpc>
+              <a:buNone/>
+            </a:pPr>
+            <a:r>
+              <a:rPr lang="en-US" sz="1050" b="1" spc="150" kern="0" dirty="0">
+                <a:solidFill>
+                  <a:srgbClr val="8A9099"/>
+                </a:solidFill>
+                <a:latin typeface="Malgun Gothic" pitchFamily="34" charset="0"/>
+                <a:ea typeface="Malgun Gothic" pitchFamily="34" charset="-122"/>
+                <a:cs typeface="Malgun Gothic" pitchFamily="34" charset="-120"/>
+              </a:rPr>
+              <a:t>TYPOGRAPHY</a:t>
+            </a:r>
+            <a:endParaRPr lang="en-US" sz="1050" dirty="0"/>
+          </a:p>
+        </p:txBody>
+      </p:sp>
+      <p:sp>
+        <p:nvSpPr>
+          <p:cNvPr id="37" name="Text 35"/>
+          <p:cNvSpPr txBox="1"/>
+          <p:nvPr/>
+        </p:nvSpPr>
+        <p:spPr>
+          <a:xfrm>
+            <a:off x="6858000" y="2084832"/>
+            <a:ext cx="548640" cy="384048"/>
+          </a:xfrm>
+          <a:prstGeom prst="rect">
+            <a:avLst/>
+          </a:prstGeom>
+          <a:noFill/>
+          <a:ln/>
+        </p:spPr>
+        <p:txBody>
+          <a:bodyPr wrap="square" lIns="0" tIns="0" rIns="0" bIns="0" rtlCol="0" anchor="t"/>
+          <a:lstStyle/>
+          <a:p>
+            <a:pPr algn="l" indent="0" marL="0">
+              <a:lnSpc>
+                <a:spcPct val="100000"/>
+              </a:lnSpc>
+              <a:buNone/>
+            </a:pPr>
+            <a:r>
+              <a:rPr lang="en-US" sz="2000" b="1" dirty="0">
+                <a:solidFill>
+                  <a:srgbClr val="E6E9EF"/>
+                </a:solidFill>
+                <a:latin typeface="Malgun Gothic" pitchFamily="34" charset="0"/>
+                <a:ea typeface="Malgun Gothic" pitchFamily="34" charset="-122"/>
+                <a:cs typeface="Malgun Gothic" pitchFamily="34" charset="-120"/>
+              </a:rPr>
+              <a:t>Aa</a:t>
+            </a:r>
+            <a:endParaRPr lang="en-US" sz="2000" dirty="0"/>
+          </a:p>
+        </p:txBody>
+      </p:sp>
+      <p:sp>
+        <p:nvSpPr>
+          <p:cNvPr id="38" name="Text 36"/>
+          <p:cNvSpPr txBox="1"/>
+          <p:nvPr/>
+        </p:nvSpPr>
+        <p:spPr>
+          <a:xfrm>
+            <a:off x="7498080" y="2121408"/>
+            <a:ext cx="548640" cy="365760"/>
+          </a:xfrm>
+          <a:prstGeom prst="rect">
+            <a:avLst/>
+          </a:prstGeom>
+          <a:noFill/>
+          <a:ln/>
+        </p:spPr>
+        <p:txBody>
+          <a:bodyPr wrap="square" lIns="0" tIns="0" rIns="0" bIns="0" rtlCol="0" anchor="t"/>
+          <a:lstStyle/>
+          <a:p>
+            <a:pPr algn="l" indent="0" marL="0">
+              <a:lnSpc>
+                <a:spcPct val="100000"/>
+              </a:lnSpc>
+              <a:buNone/>
+            </a:pPr>
+            <a:r>
+              <a:rPr lang="en-US" sz="1500" b="1" dirty="0">
+                <a:solidFill>
+                  <a:srgbClr val="E6E9EF"/>
+                </a:solidFill>
+                <a:latin typeface="Malgun Gothic" pitchFamily="34" charset="0"/>
+                <a:ea typeface="Malgun Gothic" pitchFamily="34" charset="-122"/>
+                <a:cs typeface="Malgun Gothic" pitchFamily="34" charset="-120"/>
+              </a:rPr>
+              <a:t>Aa</a:t>
+            </a:r>
+            <a:endParaRPr lang="en-US" sz="1500" dirty="0"/>
+          </a:p>
+        </p:txBody>
+      </p:sp>
+      <p:sp>
+        <p:nvSpPr>
+          <p:cNvPr id="39" name="Text 37"/>
+          <p:cNvSpPr txBox="1"/>
+          <p:nvPr/>
+        </p:nvSpPr>
+        <p:spPr>
+          <a:xfrm>
+            <a:off x="8092440" y="2176272"/>
+            <a:ext cx="548640" cy="320040"/>
+          </a:xfrm>
+          <a:prstGeom prst="rect">
+            <a:avLst/>
+          </a:prstGeom>
+          <a:noFill/>
+          <a:ln/>
+        </p:spPr>
+        <p:txBody>
+          <a:bodyPr wrap="square" lIns="0" tIns="0" rIns="0" bIns="0" rtlCol="0" anchor="t"/>
+          <a:lstStyle/>
+          <a:p>
+            <a:pPr algn="l" indent="0" marL="0">
+              <a:lnSpc>
+                <a:spcPct val="100000"/>
+              </a:lnSpc>
+              <a:buNone/>
+            </a:pPr>
+            <a:r>
+              <a:rPr lang="en-US" sz="1100" dirty="0">
+                <a:solidFill>
+                  <a:srgbClr val="E6E9EF"/>
+                </a:solidFill>
+                <a:latin typeface="Malgun Gothic" pitchFamily="34" charset="0"/>
+                <a:ea typeface="Malgun Gothic" pitchFamily="34" charset="-122"/>
+                <a:cs typeface="Malgun Gothic" pitchFamily="34" charset="-120"/>
+              </a:rPr>
+              <a:t>Aa</a:t>
+            </a:r>
+            <a:endParaRPr lang="en-US" sz="1100" dirty="0"/>
+          </a:p>
+        </p:txBody>
+      </p:sp>
+      <p:sp>
+        <p:nvSpPr>
+          <p:cNvPr id="40" name="Text 38"/>
+          <p:cNvSpPr txBox="1"/>
+          <p:nvPr/>
+        </p:nvSpPr>
+        <p:spPr>
+          <a:xfrm>
+            <a:off x="8686800" y="2240280"/>
+            <a:ext cx="2864815" cy="274320"/>
+          </a:xfrm>
+          <a:prstGeom prst="rect">
+            <a:avLst/>
+          </a:prstGeom>
+          <a:noFill/>
+          <a:ln/>
+        </p:spPr>
+        <p:txBody>
+          <a:bodyPr wrap="square" lIns="0" tIns="0" rIns="0" bIns="0" rtlCol="0" anchor="t"/>
+          <a:lstStyle/>
+          <a:p>
+            <a:pPr algn="l" indent="0" marL="0">
+              <a:lnSpc>
+                <a:spcPct val="100000"/>
+              </a:lnSpc>
+              <a:buNone/>
+            </a:pPr>
+            <a:r>
+              <a:rPr lang="en-US" sz="950" dirty="0">
+                <a:solidFill>
+                  <a:srgbClr val="8A9099"/>
+                </a:solidFill>
+                <a:latin typeface="Malgun Gothic" pitchFamily="34" charset="0"/>
+                <a:ea typeface="Malgun Gothic" pitchFamily="34" charset="-122"/>
+                <a:cs typeface="Malgun Gothic" pitchFamily="34" charset="-120"/>
+              </a:rPr>
+              <a:t>20 / 28 / 14 / 11 sp · Sans · 수치는 tabular</a:t>
+            </a:r>
             <a:endParaRPr lang="en-US" sz="950" dirty="0"/>
           </a:p>
         </p:txBody>
       </p:sp>
       <p:sp>
         <p:nvSpPr>
-          <p:cNvPr id="35" name="Text 33"/>
-          <p:cNvSpPr txBox="1"/>
-          <p:nvPr/>
-        </p:nvSpPr>
-        <p:spPr>
-          <a:xfrm>
-            <a:off x="9369308" y="3739896"/>
-            <a:ext cx="1999427" cy="182880"/>
+          <p:cNvPr id="41" name="Text 39"/>
+          <p:cNvSpPr txBox="1"/>
+          <p:nvPr/>
+        </p:nvSpPr>
+        <p:spPr>
+          <a:xfrm>
+            <a:off x="6858000" y="2788920"/>
+            <a:ext cx="4693615" cy="228600"/>
           </a:xfrm>
           <a:prstGeom prst="rect">
             <a:avLst/>
@@ -4330,7 +4582,7 @@
               <a:buNone/>
             </a:pPr>
             <a:r>
-              <a:rPr lang="en-US" sz="850" dirty="0">
+              <a:rPr lang="en-US" sz="1050" b="1" spc="150" kern="0" dirty="0">
                 <a:solidFill>
                   <a:srgbClr val="8A9099"/>
                 </a:solidFill>
@@ -4338,49 +4590,7 @@
                 <a:ea typeface="Malgun Gothic" pitchFamily="34" charset="-122"/>
                 <a:cs typeface="Malgun Gothic" pitchFamily="34" charset="-120"/>
               </a:rPr>
-              <a:t>#6B7280</a:t>
-            </a:r>
-            <a:endParaRPr lang="en-US" sz="850" dirty="0"/>
-          </a:p>
-        </p:txBody>
-      </p:sp>
-      <p:sp>
-        <p:nvSpPr>
-          <p:cNvPr id="36" name="Text 34"/>
-          <p:cNvSpPr txBox="1"/>
-          <p:nvPr/>
-        </p:nvSpPr>
-        <p:spPr>
-          <a:xfrm>
-            <a:off x="640080" y="4023360"/>
-            <a:ext cx="5486400" cy="228600"/>
-          </a:xfrm>
-          <a:prstGeom prst="rect">
-            <a:avLst/>
-          </a:prstGeom>
-          <a:noFill/>
-          <a:ln/>
-        </p:spPr>
-        <p:txBody>
-          <a:bodyPr wrap="square" lIns="0" tIns="0" rIns="0" bIns="0" rtlCol="0" anchor="t"/>
-          <a:lstStyle/>
-          <a:p>
-            <a:pPr algn="l" indent="0" marL="0">
-              <a:lnSpc>
-                <a:spcPct val="100000"/>
-              </a:lnSpc>
-              <a:buNone/>
-            </a:pPr>
-            <a:r>
-              <a:rPr lang="en-US" sz="1050" b="1" spc="150" kern="0" dirty="0">
-                <a:solidFill>
-                  <a:srgbClr val="8A9099"/>
-                </a:solidFill>
-                <a:latin typeface="Malgun Gothic" pitchFamily="34" charset="0"/>
-                <a:ea typeface="Malgun Gothic" pitchFamily="34" charset="-122"/>
-                <a:cs typeface="Malgun Gothic" pitchFamily="34" charset="-120"/>
-              </a:rPr>
-              <a:t>TYPOGRAPHY</a:t>
+              <a:t>BUTTONS</a:t>
             </a:r>
             <a:endParaRPr lang="en-US" sz="1050" dirty="0"/>
           </a:p>
@@ -4388,182 +4598,14 @@
       </p:sp>
       <p:sp>
         <p:nvSpPr>
-          <p:cNvPr id="37" name="Text 35"/>
-          <p:cNvSpPr txBox="1"/>
-          <p:nvPr/>
-        </p:nvSpPr>
-        <p:spPr>
-          <a:xfrm>
-            <a:off x="640080" y="4251960"/>
-            <a:ext cx="5943600" cy="274320"/>
-          </a:xfrm>
-          <a:prstGeom prst="rect">
-            <a:avLst/>
-          </a:prstGeom>
-          <a:noFill/>
-          <a:ln/>
-        </p:spPr>
-        <p:txBody>
-          <a:bodyPr wrap="square" lIns="0" tIns="0" rIns="0" bIns="0" rtlCol="0" anchor="t"/>
-          <a:lstStyle/>
-          <a:p>
-            <a:pPr algn="l" indent="0" marL="0">
-              <a:lnSpc>
-                <a:spcPct val="100000"/>
-              </a:lnSpc>
-              <a:buNone/>
-            </a:pPr>
-            <a:r>
-              <a:rPr lang="en-US" sz="1100" dirty="0">
-                <a:solidFill>
-                  <a:srgbClr val="E6E9EF"/>
-                </a:solidFill>
-                <a:latin typeface="Malgun Gothic" pitchFamily="34" charset="0"/>
-                <a:ea typeface="Malgun Gothic" pitchFamily="34" charset="-122"/>
-                <a:cs typeface="Malgun Gothic" pitchFamily="34" charset="-120"/>
-              </a:rPr>
-              <a:t>20 / 28 / 14 / 11 sp  ·  Sans  ·  수치는 tabular</a:t>
-            </a:r>
-            <a:endParaRPr lang="en-US" sz="1100" dirty="0"/>
-          </a:p>
-        </p:txBody>
-      </p:sp>
-      <p:sp>
-        <p:nvSpPr>
-          <p:cNvPr id="38" name="Text 36"/>
-          <p:cNvSpPr txBox="1"/>
-          <p:nvPr/>
-        </p:nvSpPr>
-        <p:spPr>
-          <a:xfrm>
-            <a:off x="6766560" y="4069080"/>
-            <a:ext cx="2011680" cy="548640"/>
-          </a:xfrm>
-          <a:prstGeom prst="rect">
-            <a:avLst/>
-          </a:prstGeom>
-          <a:noFill/>
-          <a:ln/>
-        </p:spPr>
-        <p:txBody>
-          <a:bodyPr wrap="square" lIns="0" tIns="0" rIns="0" bIns="0" rtlCol="0" anchor="t"/>
-          <a:lstStyle/>
-          <a:p>
-            <a:pPr algn="l" indent="0" marL="0">
-              <a:lnSpc>
-                <a:spcPct val="100000"/>
-              </a:lnSpc>
-              <a:buNone/>
-            </a:pPr>
-            <a:r>
-              <a:rPr lang="en-US" sz="3000" b="1" dirty="0">
-                <a:solidFill>
-                  <a:srgbClr val="E6E9EF"/>
-                </a:solidFill>
-                <a:latin typeface="Malgun Gothic" pitchFamily="34" charset="0"/>
-                <a:ea typeface="Malgun Gothic" pitchFamily="34" charset="-122"/>
-                <a:cs typeface="Malgun Gothic" pitchFamily="34" charset="-120"/>
-              </a:rPr>
-              <a:t>37%</a:t>
-            </a:r>
-            <a:endParaRPr lang="en-US" sz="3000" dirty="0"/>
-          </a:p>
-        </p:txBody>
-      </p:sp>
-      <p:sp>
-        <p:nvSpPr>
-          <p:cNvPr id="39" name="Text 37"/>
-          <p:cNvSpPr txBox="1"/>
-          <p:nvPr/>
-        </p:nvSpPr>
-        <p:spPr>
-          <a:xfrm>
-            <a:off x="8686800" y="4206240"/>
-            <a:ext cx="3017520" cy="274320"/>
-          </a:xfrm>
-          <a:prstGeom prst="rect">
-            <a:avLst/>
-          </a:prstGeom>
-          <a:noFill/>
-          <a:ln/>
-        </p:spPr>
-        <p:txBody>
-          <a:bodyPr wrap="square" lIns="0" tIns="0" rIns="0" bIns="0" rtlCol="0" anchor="t"/>
-          <a:lstStyle/>
-          <a:p>
-            <a:pPr algn="l" indent="0" marL="0">
-              <a:lnSpc>
-                <a:spcPct val="100000"/>
-              </a:lnSpc>
-              <a:buNone/>
-            </a:pPr>
-            <a:r>
-              <a:rPr lang="en-US" sz="1000" dirty="0">
-                <a:solidFill>
-                  <a:srgbClr val="8A9099"/>
-                </a:solidFill>
-                <a:latin typeface="Malgun Gothic" pitchFamily="34" charset="0"/>
-                <a:ea typeface="Malgun Gothic" pitchFamily="34" charset="-122"/>
-                <a:cs typeface="Malgun Gothic" pitchFamily="34" charset="-120"/>
-              </a:rPr>
-              <a:t>주요 수치 (headline)</a:t>
-            </a:r>
-            <a:endParaRPr lang="en-US" sz="1000" dirty="0"/>
-          </a:p>
-        </p:txBody>
-      </p:sp>
-      <p:sp>
-        <p:nvSpPr>
-          <p:cNvPr id="40" name="Text 38"/>
-          <p:cNvSpPr txBox="1"/>
-          <p:nvPr/>
-        </p:nvSpPr>
-        <p:spPr>
-          <a:xfrm>
-            <a:off x="640080" y="4800600"/>
-            <a:ext cx="5486400" cy="228600"/>
-          </a:xfrm>
-          <a:prstGeom prst="rect">
-            <a:avLst/>
-          </a:prstGeom>
-          <a:noFill/>
-          <a:ln/>
-        </p:spPr>
-        <p:txBody>
-          <a:bodyPr wrap="square" lIns="0" tIns="0" rIns="0" bIns="0" rtlCol="0" anchor="t"/>
-          <a:lstStyle/>
-          <a:p>
-            <a:pPr algn="l" indent="0" marL="0">
-              <a:lnSpc>
-                <a:spcPct val="100000"/>
-              </a:lnSpc>
-              <a:buNone/>
-            </a:pPr>
-            <a:r>
-              <a:rPr lang="en-US" sz="1050" b="1" spc="150" kern="0" dirty="0">
-                <a:solidFill>
-                  <a:srgbClr val="8A9099"/>
-                </a:solidFill>
-                <a:latin typeface="Malgun Gothic" pitchFamily="34" charset="0"/>
-                <a:ea typeface="Malgun Gothic" pitchFamily="34" charset="-122"/>
-                <a:cs typeface="Malgun Gothic" pitchFamily="34" charset="-120"/>
-              </a:rPr>
-              <a:t>BUTTONS</a:t>
-            </a:r>
-            <a:endParaRPr lang="en-US" sz="1050" dirty="0"/>
-          </a:p>
-        </p:txBody>
-      </p:sp>
-      <p:sp>
-        <p:nvSpPr>
-          <p:cNvPr id="41" name="Shape 39"/>
-          <p:cNvSpPr/>
-          <p:nvPr/>
-        </p:nvSpPr>
-        <p:spPr>
-          <a:xfrm>
-            <a:off x="640080" y="5029200"/>
-            <a:ext cx="1554480" cy="420624"/>
+          <p:cNvPr id="42" name="Shape 40"/>
+          <p:cNvSpPr/>
+          <p:nvPr/>
+        </p:nvSpPr>
+        <p:spPr>
+          <a:xfrm>
+            <a:off x="6858000" y="3035808"/>
+            <a:ext cx="1508760" cy="420624"/>
           </a:xfrm>
           <a:prstGeom prst="roundRect">
             <a:avLst>
@@ -4578,14 +4620,14 @@
       </p:sp>
       <p:sp>
         <p:nvSpPr>
-          <p:cNvPr id="42" name="Text 40"/>
-          <p:cNvSpPr txBox="1"/>
-          <p:nvPr/>
-        </p:nvSpPr>
-        <p:spPr>
-          <a:xfrm>
-            <a:off x="640080" y="5029200"/>
-            <a:ext cx="1554480" cy="420624"/>
+          <p:cNvPr id="43" name="Text 41"/>
+          <p:cNvSpPr txBox="1"/>
+          <p:nvPr/>
+        </p:nvSpPr>
+        <p:spPr>
+          <a:xfrm>
+            <a:off x="6858000" y="3035808"/>
+            <a:ext cx="1508760" cy="420624"/>
           </a:xfrm>
           <a:prstGeom prst="rect">
             <a:avLst/>
@@ -4620,14 +4662,14 @@
       </p:sp>
       <p:sp>
         <p:nvSpPr>
-          <p:cNvPr id="43" name="Shape 41"/>
-          <p:cNvSpPr/>
-          <p:nvPr/>
-        </p:nvSpPr>
-        <p:spPr>
-          <a:xfrm>
-            <a:off x="2377440" y="5029200"/>
-            <a:ext cx="1554480" cy="420624"/>
+          <p:cNvPr id="44" name="Shape 42"/>
+          <p:cNvSpPr/>
+          <p:nvPr/>
+        </p:nvSpPr>
+        <p:spPr>
+          <a:xfrm>
+            <a:off x="8522208" y="3035808"/>
+            <a:ext cx="1508760" cy="420624"/>
           </a:xfrm>
           <a:prstGeom prst="roundRect">
             <a:avLst>
@@ -4647,14 +4689,14 @@
       </p:sp>
       <p:sp>
         <p:nvSpPr>
-          <p:cNvPr id="44" name="Text 42"/>
-          <p:cNvSpPr txBox="1"/>
-          <p:nvPr/>
-        </p:nvSpPr>
-        <p:spPr>
-          <a:xfrm>
-            <a:off x="2377440" y="5029200"/>
-            <a:ext cx="1554480" cy="420624"/>
+          <p:cNvPr id="45" name="Text 43"/>
+          <p:cNvSpPr txBox="1"/>
+          <p:nvPr/>
+        </p:nvSpPr>
+        <p:spPr>
+          <a:xfrm>
+            <a:off x="8522208" y="3035808"/>
+            <a:ext cx="1508760" cy="420624"/>
           </a:xfrm>
           <a:prstGeom prst="rect">
             <a:avLst/>
@@ -4689,78 +4731,14 @@
       </p:sp>
       <p:sp>
         <p:nvSpPr>
-          <p:cNvPr id="45" name="Shape 43"/>
-          <p:cNvSpPr/>
-          <p:nvPr/>
-        </p:nvSpPr>
-        <p:spPr>
-          <a:xfrm>
-            <a:off x="4114800" y="5029200"/>
-            <a:ext cx="1554480" cy="420624"/>
-          </a:xfrm>
-          <a:prstGeom prst="roundRect">
-            <a:avLst>
-              <a:gd name="adj" fmla="val 21739"/>
-            </a:avLst>
-          </a:prstGeom>
-          <a:solidFill>
-            <a:srgbClr val="4C8DFF"/>
-          </a:solidFill>
-          <a:ln/>
-        </p:spPr>
-      </p:sp>
-      <p:sp>
-        <p:nvSpPr>
           <p:cNvPr id="46" name="Text 44"/>
           <p:cNvSpPr txBox="1"/>
           <p:nvPr/>
         </p:nvSpPr>
         <p:spPr>
           <a:xfrm>
-            <a:off x="4114800" y="5029200"/>
-            <a:ext cx="1554480" cy="420624"/>
-          </a:xfrm>
-          <a:prstGeom prst="rect">
-            <a:avLst/>
-          </a:prstGeom>
-          <a:noFill/>
-          <a:ln/>
-        </p:spPr>
-        <p:txBody>
-          <a:bodyPr wrap="square" lIns="0" tIns="0" rIns="0" bIns="0" rtlCol="0" anchor="ctr"/>
-          <a:lstStyle/>
-          <a:p>
-            <a:pPr algn="ctr" indent="0" marL="0">
-              <a:lnSpc>
-                <a:spcPct val="100000"/>
-              </a:lnSpc>
-              <a:buNone/>
-            </a:pPr>
-            <a:r>
-              <a:rPr lang="en-US" sz="1100" b="1" dirty="0">
-                <a:solidFill>
-                  <a:srgbClr val="07101F"/>
-                </a:solidFill>
-                <a:latin typeface="Malgun Gothic" pitchFamily="34" charset="0"/>
-                <a:ea typeface="Malgun Gothic" pitchFamily="34" charset="-122"/>
-                <a:cs typeface="Malgun Gothic" pitchFamily="34" charset="-120"/>
-              </a:rPr>
-              <a:t>Save</a:t>
-            </a:r>
-            <a:endParaRPr lang="en-US" sz="1100" dirty="0"/>
-          </a:p>
-        </p:txBody>
-      </p:sp>
-      <p:sp>
-        <p:nvSpPr>
-          <p:cNvPr id="47" name="Text 45"/>
-          <p:cNvSpPr txBox="1"/>
-          <p:nvPr/>
-        </p:nvSpPr>
-        <p:spPr>
-          <a:xfrm>
-            <a:off x="6766560" y="4800600"/>
-            <a:ext cx="4572000" cy="228600"/>
+            <a:off x="6858000" y="3703320"/>
+            <a:ext cx="4693615" cy="228600"/>
           </a:xfrm>
           <a:prstGeom prst="rect">
             <a:avLst/>
@@ -4795,13 +4773,13 @@
       </p:sp>
       <p:sp>
         <p:nvSpPr>
-          <p:cNvPr id="48" name="Shape 46"/>
-          <p:cNvSpPr/>
-          <p:nvPr/>
-        </p:nvSpPr>
-        <p:spPr>
-          <a:xfrm>
-            <a:off x="6766560" y="5029200"/>
+          <p:cNvPr id="47" name="Shape 45"/>
+          <p:cNvSpPr/>
+          <p:nvPr/>
+        </p:nvSpPr>
+        <p:spPr>
+          <a:xfrm>
+            <a:off x="6858000" y="3950208"/>
             <a:ext cx="1051560" cy="365760"/>
           </a:xfrm>
           <a:prstGeom prst="roundRect">
@@ -4817,13 +4795,13 @@
       </p:sp>
       <p:sp>
         <p:nvSpPr>
-          <p:cNvPr id="49" name="Text 47"/>
-          <p:cNvSpPr txBox="1"/>
-          <p:nvPr/>
-        </p:nvSpPr>
-        <p:spPr>
-          <a:xfrm>
-            <a:off x="6766560" y="5029200"/>
+          <p:cNvPr id="48" name="Text 46"/>
+          <p:cNvSpPr txBox="1"/>
+          <p:nvPr/>
+        </p:nvSpPr>
+        <p:spPr>
+          <a:xfrm>
+            <a:off x="6858000" y="3950208"/>
             <a:ext cx="1051560" cy="365760"/>
           </a:xfrm>
           <a:prstGeom prst="rect">
@@ -4859,13 +4837,13 @@
       </p:sp>
       <p:sp>
         <p:nvSpPr>
-          <p:cNvPr id="50" name="Shape 48"/>
-          <p:cNvSpPr/>
-          <p:nvPr/>
-        </p:nvSpPr>
-        <p:spPr>
-          <a:xfrm>
-            <a:off x="7909560" y="5029200"/>
+          <p:cNvPr id="49" name="Shape 47"/>
+          <p:cNvSpPr/>
+          <p:nvPr/>
+        </p:nvSpPr>
+        <p:spPr>
+          <a:xfrm>
+            <a:off x="8001000" y="3950208"/>
             <a:ext cx="1097280" cy="365760"/>
           </a:xfrm>
           <a:prstGeom prst="roundRect">
@@ -4881,13 +4859,13 @@
       </p:sp>
       <p:sp>
         <p:nvSpPr>
-          <p:cNvPr id="51" name="Text 49"/>
-          <p:cNvSpPr txBox="1"/>
-          <p:nvPr/>
-        </p:nvSpPr>
-        <p:spPr>
-          <a:xfrm>
-            <a:off x="7909560" y="5029200"/>
+          <p:cNvPr id="50" name="Text 48"/>
+          <p:cNvSpPr txBox="1"/>
+          <p:nvPr/>
+        </p:nvSpPr>
+        <p:spPr>
+          <a:xfrm>
+            <a:off x="8001000" y="3950208"/>
             <a:ext cx="1097280" cy="365760"/>
           </a:xfrm>
           <a:prstGeom prst="rect">
@@ -4923,13 +4901,13 @@
       </p:sp>
       <p:sp>
         <p:nvSpPr>
-          <p:cNvPr id="52" name="Shape 50"/>
-          <p:cNvSpPr/>
-          <p:nvPr/>
-        </p:nvSpPr>
-        <p:spPr>
-          <a:xfrm>
-            <a:off x="9098280" y="5029200"/>
+          <p:cNvPr id="51" name="Shape 49"/>
+          <p:cNvSpPr/>
+          <p:nvPr/>
+        </p:nvSpPr>
+        <p:spPr>
+          <a:xfrm>
+            <a:off x="9189720" y="3950208"/>
             <a:ext cx="960120" cy="365760"/>
           </a:xfrm>
           <a:prstGeom prst="roundRect">
@@ -4945,13 +4923,13 @@
       </p:sp>
       <p:sp>
         <p:nvSpPr>
-          <p:cNvPr id="53" name="Text 51"/>
-          <p:cNvSpPr txBox="1"/>
-          <p:nvPr/>
-        </p:nvSpPr>
-        <p:spPr>
-          <a:xfrm>
-            <a:off x="9098280" y="5029200"/>
+          <p:cNvPr id="52" name="Text 50"/>
+          <p:cNvSpPr txBox="1"/>
+          <p:nvPr/>
+        </p:nvSpPr>
+        <p:spPr>
+          <a:xfrm>
+            <a:off x="9189720" y="3950208"/>
             <a:ext cx="960120" cy="365760"/>
           </a:xfrm>
           <a:prstGeom prst="rect">
@@ -4987,14 +4965,14 @@
       </p:sp>
       <p:sp>
         <p:nvSpPr>
-          <p:cNvPr id="54" name="Shape 52"/>
-          <p:cNvSpPr/>
-          <p:nvPr/>
-        </p:nvSpPr>
-        <p:spPr>
-          <a:xfrm>
-            <a:off x="10149840" y="5029200"/>
-            <a:ext cx="1143000" cy="365760"/>
+          <p:cNvPr id="53" name="Shape 51"/>
+          <p:cNvSpPr/>
+          <p:nvPr/>
+        </p:nvSpPr>
+        <p:spPr>
+          <a:xfrm>
+            <a:off x="10241280" y="3950208"/>
+            <a:ext cx="1051560" cy="365760"/>
           </a:xfrm>
           <a:prstGeom prst="roundRect">
             <a:avLst>
@@ -5009,56 +4987,56 @@
       </p:sp>
       <p:sp>
         <p:nvSpPr>
+          <p:cNvPr id="54" name="Text 52"/>
+          <p:cNvSpPr txBox="1"/>
+          <p:nvPr/>
+        </p:nvSpPr>
+        <p:spPr>
+          <a:xfrm>
+            <a:off x="10241280" y="3950208"/>
+            <a:ext cx="1051560" cy="365760"/>
+          </a:xfrm>
+          <a:prstGeom prst="rect">
+            <a:avLst/>
+          </a:prstGeom>
+          <a:noFill/>
+          <a:ln/>
+        </p:spPr>
+        <p:txBody>
+          <a:bodyPr wrap="square" lIns="0" tIns="0" rIns="0" bIns="0" rtlCol="0" anchor="ctr"/>
+          <a:lstStyle/>
+          <a:p>
+            <a:pPr algn="ctr" indent="0" marL="0">
+              <a:lnSpc>
+                <a:spcPct val="100000"/>
+              </a:lnSpc>
+              <a:buNone/>
+            </a:pPr>
+            <a:r>
+              <a:rPr lang="en-US" sz="1000" b="1" dirty="0">
+                <a:solidFill>
+                  <a:srgbClr val="6B7280"/>
+                </a:solidFill>
+                <a:latin typeface="Malgun Gothic" pitchFamily="34" charset="0"/>
+                <a:ea typeface="Malgun Gothic" pitchFamily="34" charset="-122"/>
+                <a:cs typeface="Malgun Gothic" pitchFamily="34" charset="-120"/>
+              </a:rPr>
+              <a:t>Offline</a:t>
+            </a:r>
+            <a:endParaRPr lang="en-US" sz="1000" dirty="0"/>
+          </a:p>
+        </p:txBody>
+      </p:sp>
+      <p:sp>
+        <p:nvSpPr>
           <p:cNvPr id="55" name="Text 53"/>
           <p:cNvSpPr txBox="1"/>
           <p:nvPr/>
         </p:nvSpPr>
         <p:spPr>
           <a:xfrm>
-            <a:off x="10149840" y="5029200"/>
-            <a:ext cx="1143000" cy="365760"/>
-          </a:xfrm>
-          <a:prstGeom prst="rect">
-            <a:avLst/>
-          </a:prstGeom>
-          <a:noFill/>
-          <a:ln/>
-        </p:spPr>
-        <p:txBody>
-          <a:bodyPr wrap="square" lIns="0" tIns="0" rIns="0" bIns="0" rtlCol="0" anchor="ctr"/>
-          <a:lstStyle/>
-          <a:p>
-            <a:pPr algn="ctr" indent="0" marL="0">
-              <a:lnSpc>
-                <a:spcPct val="100000"/>
-              </a:lnSpc>
-              <a:buNone/>
-            </a:pPr>
-            <a:r>
-              <a:rPr lang="en-US" sz="1000" b="1" dirty="0">
-                <a:solidFill>
-                  <a:srgbClr val="6B7280"/>
-                </a:solidFill>
-                <a:latin typeface="Malgun Gothic" pitchFamily="34" charset="0"/>
-                <a:ea typeface="Malgun Gothic" pitchFamily="34" charset="-122"/>
-                <a:cs typeface="Malgun Gothic" pitchFamily="34" charset="-120"/>
-              </a:rPr>
-              <a:t>Offline</a:t>
-            </a:r>
-            <a:endParaRPr lang="en-US" sz="1000" dirty="0"/>
-          </a:p>
-        </p:txBody>
-      </p:sp>
-      <p:sp>
-        <p:nvSpPr>
-          <p:cNvPr id="56" name="Text 54"/>
-          <p:cNvSpPr txBox="1"/>
-          <p:nvPr/>
-        </p:nvSpPr>
-        <p:spPr>
-          <a:xfrm>
-            <a:off x="640080" y="5623560"/>
-            <a:ext cx="5943600" cy="228600"/>
+            <a:off x="6858000" y="4553712"/>
+            <a:ext cx="4693615" cy="228600"/>
           </a:xfrm>
           <a:prstGeom prst="rect">
             <a:avLst/>
@@ -5093,20 +5071,20 @@
       </p:sp>
       <p:sp>
         <p:nvSpPr>
-          <p:cNvPr id="57" name="Shape 55"/>
-          <p:cNvSpPr/>
-          <p:nvPr/>
-        </p:nvSpPr>
-        <p:spPr>
-          <a:xfrm>
-            <a:off x="681228" y="6040526"/>
-            <a:ext cx="65837" cy="71323"/>
+          <p:cNvPr id="56" name="Shape 54"/>
+          <p:cNvSpPr/>
+          <p:nvPr/>
+        </p:nvSpPr>
+        <p:spPr>
+          <a:xfrm>
+            <a:off x="6898965" y="4961169"/>
+            <a:ext cx="61448" cy="66568"/>
           </a:xfrm>
           <a:prstGeom prst="line">
             <a:avLst/>
           </a:prstGeom>
           <a:noFill/>
-          <a:ln w="15240">
+          <a:ln w="16510">
             <a:solidFill>
               <a:srgbClr val="E6E9EF"/>
             </a:solidFill>
@@ -5116,20 +5094,20 @@
       </p:sp>
       <p:sp>
         <p:nvSpPr>
-          <p:cNvPr id="58" name="Shape 56"/>
-          <p:cNvSpPr/>
-          <p:nvPr/>
-        </p:nvSpPr>
-        <p:spPr>
-          <a:xfrm>
-            <a:off x="747065" y="6111850"/>
-            <a:ext cx="126187" cy="-153619"/>
+          <p:cNvPr id="57" name="Shape 55"/>
+          <p:cNvSpPr/>
+          <p:nvPr/>
+        </p:nvSpPr>
+        <p:spPr>
+          <a:xfrm flipV="1">
+            <a:off x="6960413" y="4884359"/>
+            <a:ext cx="112654" cy="143378"/>
           </a:xfrm>
           <a:prstGeom prst="line">
             <a:avLst/>
           </a:prstGeom>
           <a:noFill/>
-          <a:ln w="15240">
+          <a:ln w="16510">
             <a:solidFill>
               <a:srgbClr val="E6E9EF"/>
             </a:solidFill>
@@ -5139,19 +5117,19 @@
       </p:sp>
       <p:sp>
         <p:nvSpPr>
-          <p:cNvPr id="59" name="Shape 57"/>
-          <p:cNvSpPr/>
-          <p:nvPr/>
-        </p:nvSpPr>
-        <p:spPr>
-          <a:xfrm>
-            <a:off x="1024128" y="5897880"/>
-            <a:ext cx="274320" cy="274320"/>
+          <p:cNvPr id="58" name="Shape 56"/>
+          <p:cNvSpPr/>
+          <p:nvPr/>
+        </p:nvSpPr>
+        <p:spPr>
+          <a:xfrm>
+            <a:off x="7178040" y="4843394"/>
+            <a:ext cx="256032" cy="230429"/>
           </a:xfrm>
           <a:prstGeom prst="triangle">
             <a:avLst/>
           </a:prstGeom>
-          <a:ln w="15240">
+          <a:ln w="16510">
             <a:solidFill>
               <a:srgbClr val="E6E9EF"/>
             </a:solidFill>
@@ -5161,20 +5139,20 @@
       </p:sp>
       <p:sp>
         <p:nvSpPr>
-          <p:cNvPr id="60" name="Shape 58"/>
-          <p:cNvSpPr/>
-          <p:nvPr/>
-        </p:nvSpPr>
-        <p:spPr>
-          <a:xfrm>
-            <a:off x="1161288" y="6013094"/>
-            <a:ext cx="0" cy="60350"/>
+          <p:cNvPr id="59" name="Shape 57"/>
+          <p:cNvSpPr/>
+          <p:nvPr/>
+        </p:nvSpPr>
+        <p:spPr>
+          <a:xfrm>
+            <a:off x="7306056" y="4925324"/>
+            <a:ext cx="0" cy="56327"/>
           </a:xfrm>
           <a:prstGeom prst="line">
             <a:avLst/>
           </a:prstGeom>
           <a:noFill/>
-          <a:ln w="15240">
+          <a:ln w="16510">
             <a:solidFill>
               <a:srgbClr val="E6E9EF"/>
             </a:solidFill>
@@ -5184,18 +5162,18 @@
       </p:sp>
       <p:sp>
         <p:nvSpPr>
-          <p:cNvPr id="61" name="Shape 59"/>
-          <p:cNvSpPr/>
-          <p:nvPr/>
-        </p:nvSpPr>
-        <p:spPr>
-          <a:xfrm>
-            <a:off x="1150315" y="6095390"/>
-            <a:ext cx="21946" cy="21946"/>
+          <p:cNvPr id="60" name="Shape 58"/>
+          <p:cNvSpPr/>
+          <p:nvPr/>
+        </p:nvSpPr>
+        <p:spPr>
+          <a:xfrm>
+            <a:off x="7294535" y="5002134"/>
+            <a:ext cx="23043" cy="23043"/>
           </a:xfrm>
           <a:prstGeom prst="roundRect">
             <a:avLst>
-              <a:gd name="adj" fmla="val 83332"/>
+              <a:gd name="adj" fmla="val 79365"/>
             </a:avLst>
           </a:prstGeom>
           <a:solidFill>
@@ -5206,19 +5184,19 @@
       </p:sp>
       <p:sp>
         <p:nvSpPr>
-          <p:cNvPr id="62" name="Shape 60"/>
-          <p:cNvSpPr/>
-          <p:nvPr/>
-        </p:nvSpPr>
-        <p:spPr>
-          <a:xfrm>
-            <a:off x="1408176" y="5897880"/>
-            <a:ext cx="274320" cy="274320"/>
+          <p:cNvPr id="61" name="Shape 59"/>
+          <p:cNvSpPr/>
+          <p:nvPr/>
+        </p:nvSpPr>
+        <p:spPr>
+          <a:xfrm>
+            <a:off x="7498080" y="4828032"/>
+            <a:ext cx="256032" cy="256032"/>
           </a:xfrm>
           <a:prstGeom prst="ellipse">
             <a:avLst/>
           </a:prstGeom>
-          <a:ln w="15240">
+          <a:ln w="16510">
             <a:solidFill>
               <a:srgbClr val="E6E9EF"/>
             </a:solidFill>
@@ -5228,20 +5206,20 @@
       </p:sp>
       <p:sp>
         <p:nvSpPr>
-          <p:cNvPr id="63" name="Shape 61"/>
-          <p:cNvSpPr/>
-          <p:nvPr/>
-        </p:nvSpPr>
-        <p:spPr>
-          <a:xfrm>
-            <a:off x="1490472" y="5980176"/>
-            <a:ext cx="109728" cy="109728"/>
+          <p:cNvPr id="62" name="Shape 60"/>
+          <p:cNvSpPr/>
+          <p:nvPr/>
+        </p:nvSpPr>
+        <p:spPr>
+          <a:xfrm>
+            <a:off x="7574890" y="4904842"/>
+            <a:ext cx="102413" cy="102413"/>
           </a:xfrm>
           <a:prstGeom prst="line">
             <a:avLst/>
           </a:prstGeom>
           <a:noFill/>
-          <a:ln w="15240">
+          <a:ln w="16510">
             <a:solidFill>
               <a:srgbClr val="E6E9EF"/>
             </a:solidFill>
@@ -5251,20 +5229,20 @@
       </p:sp>
       <p:sp>
         <p:nvSpPr>
-          <p:cNvPr id="64" name="Shape 62"/>
-          <p:cNvSpPr/>
-          <p:nvPr/>
-        </p:nvSpPr>
-        <p:spPr>
-          <a:xfrm>
-            <a:off x="1600200" y="5980176"/>
-            <a:ext cx="-109728" cy="109728"/>
+          <p:cNvPr id="63" name="Shape 61"/>
+          <p:cNvSpPr/>
+          <p:nvPr/>
+        </p:nvSpPr>
+        <p:spPr>
+          <a:xfrm flipH="1">
+            <a:off x="7574890" y="4904842"/>
+            <a:ext cx="102413" cy="102413"/>
           </a:xfrm>
           <a:prstGeom prst="line">
             <a:avLst/>
           </a:prstGeom>
           <a:noFill/>
-          <a:ln w="15240">
+          <a:ln w="16510">
             <a:solidFill>
               <a:srgbClr val="E6E9EF"/>
             </a:solidFill>
@@ -5274,19 +5252,19 @@
       </p:sp>
       <p:sp>
         <p:nvSpPr>
-          <p:cNvPr id="65" name="Shape 63"/>
-          <p:cNvSpPr/>
-          <p:nvPr/>
-        </p:nvSpPr>
-        <p:spPr>
-          <a:xfrm>
-            <a:off x="1792224" y="5914339"/>
-            <a:ext cx="274320" cy="197510"/>
+          <p:cNvPr id="64" name="Shape 62"/>
+          <p:cNvSpPr/>
+          <p:nvPr/>
+        </p:nvSpPr>
+        <p:spPr>
+          <a:xfrm>
+            <a:off x="7818120" y="4848515"/>
+            <a:ext cx="256032" cy="184343"/>
           </a:xfrm>
           <a:prstGeom prst="cloud">
             <a:avLst/>
           </a:prstGeom>
-          <a:ln w="15240">
+          <a:ln w="16510">
             <a:solidFill>
               <a:srgbClr val="E6E9EF"/>
             </a:solidFill>
@@ -5296,20 +5274,20 @@
       </p:sp>
       <p:sp>
         <p:nvSpPr>
-          <p:cNvPr id="66" name="Shape 64"/>
-          <p:cNvSpPr/>
-          <p:nvPr/>
-        </p:nvSpPr>
-        <p:spPr>
-          <a:xfrm>
-            <a:off x="1825142" y="5925312"/>
-            <a:ext cx="208483" cy="219456"/>
+          <p:cNvPr id="65" name="Shape 63"/>
+          <p:cNvSpPr/>
+          <p:nvPr/>
+        </p:nvSpPr>
+        <p:spPr>
+          <a:xfrm>
+            <a:off x="7843723" y="4853635"/>
+            <a:ext cx="204826" cy="204826"/>
           </a:xfrm>
           <a:prstGeom prst="line">
             <a:avLst/>
           </a:prstGeom>
           <a:noFill/>
-          <a:ln w="15240">
+          <a:ln w="16510">
             <a:solidFill>
               <a:srgbClr val="E6E9EF"/>
             </a:solidFill>
@@ -5319,21 +5297,21 @@
       </p:sp>
       <p:sp>
         <p:nvSpPr>
-          <p:cNvPr id="67" name="Shape 65"/>
-          <p:cNvSpPr/>
-          <p:nvPr/>
-        </p:nvSpPr>
-        <p:spPr>
-          <a:xfrm>
-            <a:off x="2253082" y="5974690"/>
-            <a:ext cx="120701" cy="120701"/>
+          <p:cNvPr id="66" name="Shape 64"/>
+          <p:cNvSpPr/>
+          <p:nvPr/>
+        </p:nvSpPr>
+        <p:spPr>
+          <a:xfrm>
+            <a:off x="8209849" y="4899721"/>
+            <a:ext cx="112654" cy="112654"/>
           </a:xfrm>
           <a:prstGeom prst="roundRect">
             <a:avLst>
-              <a:gd name="adj" fmla="val 22727"/>
+              <a:gd name="adj" fmla="val 24351"/>
             </a:avLst>
           </a:prstGeom>
-          <a:ln w="15240">
+          <a:ln w="16510">
             <a:solidFill>
               <a:srgbClr val="E6E9EF"/>
             </a:solidFill>
@@ -5343,20 +5321,20 @@
       </p:sp>
       <p:sp>
         <p:nvSpPr>
-          <p:cNvPr id="68" name="Shape 66"/>
-          <p:cNvSpPr/>
-          <p:nvPr/>
-        </p:nvSpPr>
-        <p:spPr>
-          <a:xfrm>
-            <a:off x="2313432" y="5919826"/>
-            <a:ext cx="0" cy="43891"/>
+          <p:cNvPr id="67" name="Shape 65"/>
+          <p:cNvSpPr/>
+          <p:nvPr/>
+        </p:nvSpPr>
+        <p:spPr>
+          <a:xfrm>
+            <a:off x="8266176" y="4848515"/>
+            <a:ext cx="0" cy="40965"/>
           </a:xfrm>
           <a:prstGeom prst="line">
             <a:avLst/>
           </a:prstGeom>
           <a:noFill/>
-          <a:ln w="15240">
+          <a:ln w="16510">
             <a:solidFill>
               <a:srgbClr val="E6E9EF"/>
             </a:solidFill>
@@ -5366,20 +5344,20 @@
       </p:sp>
       <p:sp>
         <p:nvSpPr>
-          <p:cNvPr id="69" name="Shape 67"/>
-          <p:cNvSpPr/>
-          <p:nvPr/>
-        </p:nvSpPr>
-        <p:spPr>
-          <a:xfrm>
-            <a:off x="2313432" y="6106363"/>
-            <a:ext cx="0" cy="43891"/>
+          <p:cNvPr id="68" name="Shape 66"/>
+          <p:cNvSpPr/>
+          <p:nvPr/>
+        </p:nvSpPr>
+        <p:spPr>
+          <a:xfrm>
+            <a:off x="8266176" y="5022616"/>
+            <a:ext cx="0" cy="40965"/>
           </a:xfrm>
           <a:prstGeom prst="line">
             <a:avLst/>
           </a:prstGeom>
           <a:noFill/>
-          <a:ln w="15240">
+          <a:ln w="16510">
             <a:solidFill>
               <a:srgbClr val="E6E9EF"/>
             </a:solidFill>
@@ -5389,20 +5367,20 @@
       </p:sp>
       <p:sp>
         <p:nvSpPr>
-          <p:cNvPr id="70" name="Shape 68"/>
-          <p:cNvSpPr/>
-          <p:nvPr/>
-        </p:nvSpPr>
-        <p:spPr>
-          <a:xfrm>
-            <a:off x="2198218" y="6035040"/>
-            <a:ext cx="43891" cy="0"/>
+          <p:cNvPr id="69" name="Shape 67"/>
+          <p:cNvSpPr/>
+          <p:nvPr/>
+        </p:nvSpPr>
+        <p:spPr>
+          <a:xfrm>
+            <a:off x="8158643" y="4956048"/>
+            <a:ext cx="40965" cy="0"/>
           </a:xfrm>
           <a:prstGeom prst="line">
             <a:avLst/>
           </a:prstGeom>
           <a:noFill/>
-          <a:ln w="15240">
+          <a:ln w="16510">
             <a:solidFill>
               <a:srgbClr val="E6E9EF"/>
             </a:solidFill>
@@ -5412,20 +5390,20 @@
       </p:sp>
       <p:sp>
         <p:nvSpPr>
-          <p:cNvPr id="71" name="Shape 69"/>
-          <p:cNvSpPr/>
-          <p:nvPr/>
-        </p:nvSpPr>
-        <p:spPr>
-          <a:xfrm>
-            <a:off x="2384755" y="6035040"/>
-            <a:ext cx="43891" cy="0"/>
+          <p:cNvPr id="70" name="Shape 68"/>
+          <p:cNvSpPr/>
+          <p:nvPr/>
+        </p:nvSpPr>
+        <p:spPr>
+          <a:xfrm>
+            <a:off x="8332744" y="4956048"/>
+            <a:ext cx="40965" cy="0"/>
           </a:xfrm>
           <a:prstGeom prst="line">
             <a:avLst/>
           </a:prstGeom>
           <a:noFill/>
-          <a:ln w="15240">
+          <a:ln w="16510">
             <a:solidFill>
               <a:srgbClr val="E6E9EF"/>
             </a:solidFill>
@@ -5435,21 +5413,21 @@
       </p:sp>
       <p:sp>
         <p:nvSpPr>
-          <p:cNvPr id="72" name="Shape 70"/>
-          <p:cNvSpPr/>
-          <p:nvPr/>
-        </p:nvSpPr>
-        <p:spPr>
-          <a:xfrm>
-            <a:off x="2576779" y="5941771"/>
-            <a:ext cx="241402" cy="76810"/>
+          <p:cNvPr id="71" name="Shape 69"/>
+          <p:cNvSpPr/>
+          <p:nvPr/>
+        </p:nvSpPr>
+        <p:spPr>
+          <a:xfrm>
+            <a:off x="8473562" y="4871557"/>
+            <a:ext cx="225308" cy="66568"/>
           </a:xfrm>
           <a:prstGeom prst="roundRect">
             <a:avLst>
-              <a:gd name="adj" fmla="val 35714"/>
+              <a:gd name="adj" fmla="val 41209"/>
             </a:avLst>
           </a:prstGeom>
-          <a:ln w="15240">
+          <a:ln w="16510">
             <a:solidFill>
               <a:srgbClr val="E6E9EF"/>
             </a:solidFill>
@@ -5459,21 +5437,21 @@
       </p:sp>
       <p:sp>
         <p:nvSpPr>
-          <p:cNvPr id="73" name="Shape 71"/>
-          <p:cNvSpPr/>
-          <p:nvPr/>
-        </p:nvSpPr>
-        <p:spPr>
-          <a:xfrm>
-            <a:off x="2576779" y="6051499"/>
-            <a:ext cx="241402" cy="76810"/>
+          <p:cNvPr id="72" name="Shape 70"/>
+          <p:cNvSpPr/>
+          <p:nvPr/>
+        </p:nvSpPr>
+        <p:spPr>
+          <a:xfrm>
+            <a:off x="8473562" y="4973970"/>
+            <a:ext cx="225308" cy="66568"/>
           </a:xfrm>
           <a:prstGeom prst="roundRect">
             <a:avLst>
-              <a:gd name="adj" fmla="val 35714"/>
+              <a:gd name="adj" fmla="val 41209"/>
             </a:avLst>
           </a:prstGeom>
-          <a:ln w="15240">
+          <a:ln w="16510">
             <a:solidFill>
               <a:srgbClr val="E6E9EF"/>
             </a:solidFill>
@@ -5483,21 +5461,21 @@
       </p:sp>
       <p:sp>
         <p:nvSpPr>
-          <p:cNvPr id="74" name="Shape 72"/>
-          <p:cNvSpPr/>
-          <p:nvPr/>
-        </p:nvSpPr>
-        <p:spPr>
-          <a:xfrm>
-            <a:off x="2960827" y="5930798"/>
-            <a:ext cx="241402" cy="87782"/>
+          <p:cNvPr id="73" name="Shape 71"/>
+          <p:cNvSpPr/>
+          <p:nvPr/>
+        </p:nvSpPr>
+        <p:spPr>
+          <a:xfrm>
+            <a:off x="8793602" y="4861316"/>
+            <a:ext cx="225308" cy="76810"/>
           </a:xfrm>
           <a:prstGeom prst="roundRect">
             <a:avLst>
-              <a:gd name="adj" fmla="val 31250"/>
+              <a:gd name="adj" fmla="val 35714"/>
             </a:avLst>
           </a:prstGeom>
-          <a:ln w="15240">
+          <a:ln w="16510">
             <a:solidFill>
               <a:srgbClr val="E6E9EF"/>
             </a:solidFill>
@@ -5507,21 +5485,21 @@
       </p:sp>
       <p:sp>
         <p:nvSpPr>
-          <p:cNvPr id="75" name="Shape 73"/>
-          <p:cNvSpPr/>
-          <p:nvPr/>
-        </p:nvSpPr>
-        <p:spPr>
-          <a:xfrm>
-            <a:off x="2960827" y="6051499"/>
-            <a:ext cx="241402" cy="87782"/>
+          <p:cNvPr id="74" name="Shape 72"/>
+          <p:cNvSpPr/>
+          <p:nvPr/>
+        </p:nvSpPr>
+        <p:spPr>
+          <a:xfrm>
+            <a:off x="8793602" y="4973970"/>
+            <a:ext cx="225308" cy="76810"/>
           </a:xfrm>
           <a:prstGeom prst="roundRect">
             <a:avLst>
-              <a:gd name="adj" fmla="val 31250"/>
+              <a:gd name="adj" fmla="val 35714"/>
             </a:avLst>
           </a:prstGeom>
-          <a:ln w="15240">
+          <a:ln w="16510">
             <a:solidFill>
               <a:srgbClr val="E6E9EF"/>
             </a:solidFill>
@@ -5531,18 +5509,18 @@
       </p:sp>
       <p:sp>
         <p:nvSpPr>
-          <p:cNvPr id="76" name="Shape 74"/>
-          <p:cNvSpPr/>
-          <p:nvPr/>
-        </p:nvSpPr>
-        <p:spPr>
-          <a:xfrm>
-            <a:off x="2993746" y="5963717"/>
-            <a:ext cx="16459" cy="16459"/>
+          <p:cNvPr id="75" name="Shape 73"/>
+          <p:cNvSpPr/>
+          <p:nvPr/>
+        </p:nvSpPr>
+        <p:spPr>
+          <a:xfrm>
+            <a:off x="8826886" y="4888200"/>
+            <a:ext cx="17922" cy="17922"/>
           </a:xfrm>
           <a:prstGeom prst="roundRect">
             <a:avLst>
-              <a:gd name="adj" fmla="val 111112"/>
+              <a:gd name="adj" fmla="val 102042"/>
             </a:avLst>
           </a:prstGeom>
           <a:solidFill>
@@ -5553,18 +5531,18 @@
       </p:sp>
       <p:sp>
         <p:nvSpPr>
-          <p:cNvPr id="77" name="Shape 75"/>
-          <p:cNvSpPr/>
-          <p:nvPr/>
-        </p:nvSpPr>
-        <p:spPr>
-          <a:xfrm>
-            <a:off x="2993746" y="6084418"/>
-            <a:ext cx="16459" cy="16459"/>
+          <p:cNvPr id="76" name="Shape 74"/>
+          <p:cNvSpPr/>
+          <p:nvPr/>
+        </p:nvSpPr>
+        <p:spPr>
+          <a:xfrm>
+            <a:off x="8826886" y="5000854"/>
+            <a:ext cx="17922" cy="17922"/>
           </a:xfrm>
           <a:prstGeom prst="roundRect">
             <a:avLst>
-              <a:gd name="adj" fmla="val 111112"/>
+              <a:gd name="adj" fmla="val 102042"/>
             </a:avLst>
           </a:prstGeom>
           <a:solidFill>
@@ -5575,20 +5553,20 @@
       </p:sp>
       <p:sp>
         <p:nvSpPr>
-          <p:cNvPr id="78" name="Shape 76"/>
-          <p:cNvSpPr/>
-          <p:nvPr/>
-        </p:nvSpPr>
-        <p:spPr>
-          <a:xfrm>
-            <a:off x="3350362" y="6007608"/>
-            <a:ext cx="197510" cy="0"/>
+          <p:cNvPr id="77" name="Shape 75"/>
+          <p:cNvSpPr/>
+          <p:nvPr/>
+        </p:nvSpPr>
+        <p:spPr>
+          <a:xfrm>
+            <a:off x="9118763" y="4930445"/>
+            <a:ext cx="184343" cy="0"/>
           </a:xfrm>
           <a:prstGeom prst="line">
             <a:avLst/>
           </a:prstGeom>
           <a:noFill/>
-          <a:ln w="15240">
+          <a:ln w="16510">
             <a:solidFill>
               <a:srgbClr val="E6E9EF"/>
             </a:solidFill>
@@ -5598,14 +5576,14 @@
       </p:sp>
       <p:sp>
         <p:nvSpPr>
-          <p:cNvPr id="79" name="Shape 77"/>
+          <p:cNvPr id="78" name="Shape 76"/>
           <p:cNvSpPr/>
           <p:nvPr/>
         </p:nvSpPr>
         <p:spPr>
           <a:xfrm rot="5400000">
-            <a:off x="3525926" y="5969203"/>
-            <a:ext cx="54864" cy="76810"/>
+            <a:off x="9287744" y="4897161"/>
+            <a:ext cx="56327" cy="66568"/>
           </a:xfrm>
           <a:prstGeom prst="triangle">
             <a:avLst/>
@@ -5618,20 +5596,20 @@
       </p:sp>
       <p:sp>
         <p:nvSpPr>
-          <p:cNvPr id="80" name="Shape 78"/>
-          <p:cNvSpPr/>
-          <p:nvPr/>
-        </p:nvSpPr>
-        <p:spPr>
-          <a:xfrm>
-            <a:off x="3383280" y="6067958"/>
-            <a:ext cx="197510" cy="0"/>
+          <p:cNvPr id="79" name="Shape 77"/>
+          <p:cNvSpPr/>
+          <p:nvPr/>
+        </p:nvSpPr>
+        <p:spPr>
+          <a:xfrm>
+            <a:off x="9149486" y="4986772"/>
+            <a:ext cx="184343" cy="0"/>
           </a:xfrm>
           <a:prstGeom prst="line">
             <a:avLst/>
           </a:prstGeom>
           <a:noFill/>
-          <a:ln w="15240">
+          <a:ln w="16510">
             <a:solidFill>
               <a:srgbClr val="E6E9EF"/>
             </a:solidFill>
@@ -5641,14 +5619,14 @@
       </p:sp>
       <p:sp>
         <p:nvSpPr>
-          <p:cNvPr id="81" name="Shape 79"/>
+          <p:cNvPr id="80" name="Shape 78"/>
           <p:cNvSpPr/>
           <p:nvPr/>
         </p:nvSpPr>
         <p:spPr>
           <a:xfrm rot="16200000">
-            <a:off x="3350362" y="6029554"/>
-            <a:ext cx="54864" cy="76810"/>
+            <a:off x="9108521" y="4953488"/>
+            <a:ext cx="56327" cy="66568"/>
           </a:xfrm>
           <a:prstGeom prst="triangle">
             <a:avLst/>
@@ -5661,14 +5639,14 @@
       </p:sp>
       <p:sp>
         <p:nvSpPr>
-          <p:cNvPr id="82" name="Shape 80"/>
-          <p:cNvSpPr/>
-          <p:nvPr/>
-        </p:nvSpPr>
-        <p:spPr>
-          <a:xfrm>
-            <a:off x="3712464" y="5897880"/>
-            <a:ext cx="274320" cy="274320"/>
+          <p:cNvPr id="81" name="Shape 79"/>
+          <p:cNvSpPr/>
+          <p:nvPr/>
+        </p:nvSpPr>
+        <p:spPr>
+          <a:xfrm>
+            <a:off x="9418320" y="4828032"/>
+            <a:ext cx="256032" cy="256032"/>
           </a:xfrm>
           <a:prstGeom prst="circularArrow">
             <a:avLst/>
@@ -5681,14 +5659,14 @@
       </p:sp>
       <p:sp>
         <p:nvSpPr>
-          <p:cNvPr id="83" name="Shape 81"/>
-          <p:cNvSpPr/>
-          <p:nvPr/>
-        </p:nvSpPr>
-        <p:spPr>
-          <a:xfrm>
-            <a:off x="4096512" y="5897880"/>
-            <a:ext cx="274320" cy="274320"/>
+          <p:cNvPr id="82" name="Shape 80"/>
+          <p:cNvSpPr/>
+          <p:nvPr/>
+        </p:nvSpPr>
+        <p:spPr>
+          <a:xfrm>
+            <a:off x="9738360" y="4828032"/>
+            <a:ext cx="256032" cy="256032"/>
           </a:xfrm>
           <a:prstGeom prst="gear6">
             <a:avLst/>
@@ -5701,20 +5679,20 @@
       </p:sp>
       <p:sp>
         <p:nvSpPr>
-          <p:cNvPr id="84" name="Shape 82"/>
-          <p:cNvSpPr/>
-          <p:nvPr/>
-        </p:nvSpPr>
-        <p:spPr>
-          <a:xfrm>
-            <a:off x="4650638" y="5952744"/>
-            <a:ext cx="-82296" cy="82296"/>
+          <p:cNvPr id="83" name="Shape 81"/>
+          <p:cNvSpPr/>
+          <p:nvPr/>
+        </p:nvSpPr>
+        <p:spPr>
+          <a:xfrm flipH="1">
+            <a:off x="10145451" y="4879238"/>
+            <a:ext cx="71689" cy="76810"/>
           </a:xfrm>
           <a:prstGeom prst="line">
             <a:avLst/>
           </a:prstGeom>
           <a:noFill/>
-          <a:ln w="15240">
+          <a:ln w="16510">
             <a:solidFill>
               <a:srgbClr val="E6E9EF"/>
             </a:solidFill>
@@ -5724,20 +5702,20 @@
       </p:sp>
       <p:sp>
         <p:nvSpPr>
-          <p:cNvPr id="85" name="Shape 83"/>
-          <p:cNvSpPr/>
-          <p:nvPr/>
-        </p:nvSpPr>
-        <p:spPr>
-          <a:xfrm>
-            <a:off x="4568342" y="6035040"/>
-            <a:ext cx="82296" cy="82296"/>
+          <p:cNvPr id="84" name="Shape 82"/>
+          <p:cNvSpPr/>
+          <p:nvPr/>
+        </p:nvSpPr>
+        <p:spPr>
+          <a:xfrm>
+            <a:off x="10145451" y="4956048"/>
+            <a:ext cx="71689" cy="76810"/>
           </a:xfrm>
           <a:prstGeom prst="line">
             <a:avLst/>
           </a:prstGeom>
           <a:noFill/>
-          <a:ln w="15240">
+          <a:ln w="16510">
             <a:solidFill>
               <a:srgbClr val="E6E9EF"/>
             </a:solidFill>
@@ -5747,20 +5725,20 @@
       </p:sp>
       <p:sp>
         <p:nvSpPr>
-          <p:cNvPr id="86" name="Shape 84"/>
-          <p:cNvSpPr/>
-          <p:nvPr/>
-        </p:nvSpPr>
-        <p:spPr>
-          <a:xfrm>
-            <a:off x="5001768" y="5939028"/>
-            <a:ext cx="0" cy="192024"/>
+          <p:cNvPr id="85" name="Shape 83"/>
+          <p:cNvSpPr/>
+          <p:nvPr/>
+        </p:nvSpPr>
+        <p:spPr>
+          <a:xfrm>
+            <a:off x="10506456" y="4868997"/>
+            <a:ext cx="0" cy="174102"/>
           </a:xfrm>
           <a:prstGeom prst="line">
             <a:avLst/>
           </a:prstGeom>
           <a:noFill/>
-          <a:ln w="15240">
+          <a:ln w="16510">
             <a:solidFill>
               <a:srgbClr val="E6E9EF"/>
             </a:solidFill>
@@ -5770,20 +5748,20 @@
       </p:sp>
       <p:sp>
         <p:nvSpPr>
-          <p:cNvPr id="87" name="Shape 85"/>
-          <p:cNvSpPr/>
-          <p:nvPr/>
-        </p:nvSpPr>
-        <p:spPr>
-          <a:xfrm>
-            <a:off x="4905756" y="6035040"/>
-            <a:ext cx="192024" cy="0"/>
+          <p:cNvPr id="86" name="Shape 84"/>
+          <p:cNvSpPr/>
+          <p:nvPr/>
+        </p:nvSpPr>
+        <p:spPr>
+          <a:xfrm>
+            <a:off x="10419405" y="4956048"/>
+            <a:ext cx="174102" cy="0"/>
           </a:xfrm>
           <a:prstGeom prst="line">
             <a:avLst/>
           </a:prstGeom>
           <a:noFill/>
-          <a:ln w="15240">
+          <a:ln w="16510">
             <a:solidFill>
               <a:srgbClr val="E6E9EF"/>
             </a:solidFill>
@@ -5793,20 +5771,20 @@
       </p:sp>
       <p:sp>
         <p:nvSpPr>
-          <p:cNvPr id="88" name="Shape 86"/>
-          <p:cNvSpPr/>
-          <p:nvPr/>
-        </p:nvSpPr>
-        <p:spPr>
-          <a:xfrm>
-            <a:off x="5298034" y="6073445"/>
-            <a:ext cx="126187" cy="-126187"/>
+          <p:cNvPr id="87" name="Shape 85"/>
+          <p:cNvSpPr/>
+          <p:nvPr/>
+        </p:nvSpPr>
+        <p:spPr>
+          <a:xfrm flipV="1">
+            <a:off x="10744566" y="4874118"/>
+            <a:ext cx="128016" cy="128016"/>
           </a:xfrm>
           <a:prstGeom prst="line">
             <a:avLst/>
           </a:prstGeom>
           <a:noFill/>
-          <a:ln w="22860">
+          <a:ln w="24130">
             <a:solidFill>
               <a:srgbClr val="E6E9EF"/>
             </a:solidFill>
@@ -5816,20 +5794,20 @@
       </p:sp>
       <p:sp>
         <p:nvSpPr>
-          <p:cNvPr id="89" name="Shape 87"/>
-          <p:cNvSpPr/>
-          <p:nvPr/>
-        </p:nvSpPr>
-        <p:spPr>
-          <a:xfrm>
-            <a:off x="5298034" y="6073445"/>
-            <a:ext cx="49378" cy="13716"/>
+          <p:cNvPr id="88" name="Shape 86"/>
+          <p:cNvSpPr/>
+          <p:nvPr/>
+        </p:nvSpPr>
+        <p:spPr>
+          <a:xfrm>
+            <a:off x="10744566" y="5002134"/>
+            <a:ext cx="40965" cy="15362"/>
           </a:xfrm>
           <a:prstGeom prst="line">
             <a:avLst/>
           </a:prstGeom>
           <a:noFill/>
-          <a:ln w="15240">
+          <a:ln w="16510">
             <a:solidFill>
               <a:srgbClr val="E6E9EF"/>
             </a:solidFill>
@@ -5839,20 +5817,20 @@
       </p:sp>
       <p:sp>
         <p:nvSpPr>
-          <p:cNvPr id="90" name="Shape 88"/>
-          <p:cNvSpPr/>
-          <p:nvPr/>
-        </p:nvSpPr>
-        <p:spPr>
-          <a:xfrm>
-            <a:off x="5693054" y="5969203"/>
-            <a:ext cx="153619" cy="0"/>
+          <p:cNvPr id="89" name="Shape 87"/>
+          <p:cNvSpPr/>
+          <p:nvPr/>
+        </p:nvSpPr>
+        <p:spPr>
+          <a:xfrm>
+            <a:off x="11079968" y="4899721"/>
+            <a:ext cx="133137" cy="0"/>
           </a:xfrm>
           <a:prstGeom prst="line">
             <a:avLst/>
           </a:prstGeom>
           <a:noFill/>
-          <a:ln w="15240">
+          <a:ln w="16510">
             <a:solidFill>
               <a:srgbClr val="E6E9EF"/>
             </a:solidFill>
@@ -5862,21 +5840,20 @@
       </p:sp>
       <p:sp>
         <p:nvSpPr>
-          <p:cNvPr id="91" name="Shape 89"/>
-          <p:cNvSpPr/>
-          <p:nvPr/>
-        </p:nvSpPr>
-        <p:spPr>
-          <a:xfrm>
-            <a:off x="5720486" y="5980176"/>
-            <a:ext cx="98755" cy="137160"/>
-          </a:xfrm>
-          <a:prstGeom prst="roundRect">
-            <a:avLst>
-              <a:gd name="adj" fmla="val 27778"/>
-            </a:avLst>
-          </a:prstGeom>
-          <a:ln w="15240">
+          <p:cNvPr id="90" name="Shape 88"/>
+          <p:cNvSpPr/>
+          <p:nvPr/>
+        </p:nvSpPr>
+        <p:spPr>
+          <a:xfrm>
+            <a:off x="11126053" y="4868997"/>
+            <a:ext cx="40965" cy="0"/>
+          </a:xfrm>
+          <a:prstGeom prst="line">
+            <a:avLst/>
+          </a:prstGeom>
+          <a:noFill/>
+          <a:ln w="16510">
             <a:solidFill>
               <a:srgbClr val="E6E9EF"/>
             </a:solidFill>
@@ -5886,13 +5863,37 @@
       </p:sp>
       <p:sp>
         <p:nvSpPr>
+          <p:cNvPr id="91" name="Shape 89"/>
+          <p:cNvSpPr/>
+          <p:nvPr/>
+        </p:nvSpPr>
+        <p:spPr>
+          <a:xfrm>
+            <a:off x="11100450" y="4915083"/>
+            <a:ext cx="92172" cy="122895"/>
+          </a:xfrm>
+          <a:prstGeom prst="roundRect">
+            <a:avLst>
+              <a:gd name="adj" fmla="val 29762"/>
+            </a:avLst>
+          </a:prstGeom>
+          <a:ln w="16510">
+            <a:solidFill>
+              <a:srgbClr val="E6E9EF"/>
+            </a:solidFill>
+            <a:prstDash val="solid"/>
+          </a:ln>
+        </p:spPr>
+      </p:sp>
+      <p:sp>
+        <p:nvSpPr>
           <p:cNvPr id="92" name="Shape 90"/>
           <p:cNvSpPr/>
           <p:nvPr/>
         </p:nvSpPr>
         <p:spPr>
           <a:xfrm>
-            <a:off x="640080" y="6355080"/>
+            <a:off x="640080" y="6382512"/>
             <a:ext cx="10911535" cy="0"/>
           </a:xfrm>
           <a:prstGeom prst="line">
@@ -5915,7 +5916,7 @@
         </p:nvSpPr>
         <p:spPr>
           <a:xfrm>
-            <a:off x="640080" y="6419088"/>
+            <a:off x="640080" y="6455664"/>
             <a:ext cx="5486400" cy="274320"/>
           </a:xfrm>
           <a:prstGeom prst="rect">
@@ -5957,7 +5958,7 @@
         </p:nvSpPr>
         <p:spPr>
           <a:xfrm>
-            <a:off x="9722815" y="6419088"/>
+            <a:off x="9722815" y="6455664"/>
             <a:ext cx="1828800" cy="274320"/>
           </a:xfrm>
           <a:prstGeom prst="rect">
@@ -6031,7 +6032,7 @@
         </p:nvSpPr>
         <p:spPr>
           <a:xfrm>
-            <a:off x="640080" y="475488"/>
+            <a:off x="640080" y="457200"/>
             <a:ext cx="10911535" cy="274320"/>
           </a:xfrm>
           <a:prstGeom prst="rect">
@@ -6073,7 +6074,7 @@
         </p:nvSpPr>
         <p:spPr>
           <a:xfrm>
-            <a:off x="640080" y="749808"/>
+            <a:off x="640080" y="731520"/>
             <a:ext cx="10911535" cy="548640"/>
           </a:xfrm>
           <a:prstGeom prst="rect">
@@ -6093,7 +6094,7 @@
               <a:buNone/>
             </a:pPr>
             <a:r>
-              <a:rPr lang="en-US" sz="2700" b="1" dirty="0">
+              <a:rPr lang="en-US" sz="2600" b="1" dirty="0">
                 <a:solidFill>
                   <a:srgbClr val="E6E9EF"/>
                 </a:solidFill>
@@ -6103,7 +6104,7 @@
               </a:rPr>
               <a:t>연결 전 — 서버 연결 화면</a:t>
             </a:r>
-            <a:endParaRPr lang="en-US" sz="2700" dirty="0"/>
+            <a:endParaRPr lang="en-US" sz="2600" dirty="0"/>
           </a:p>
         </p:txBody>
       </p:sp>
@@ -6116,7 +6117,7 @@
         <p:spPr>
           <a:xfrm>
             <a:off x="640080" y="1298448"/>
-            <a:ext cx="10911535" cy="411480"/>
+            <a:ext cx="10911535" cy="347472"/>
           </a:xfrm>
           <a:prstGeom prst="rect">
             <a:avLst/>
@@ -6135,7 +6136,7 @@
               <a:buNone/>
             </a:pPr>
             <a:r>
-              <a:rPr lang="en-US" sz="1300" dirty="0">
+              <a:rPr lang="en-US" sz="1200" dirty="0">
                 <a:solidFill>
                   <a:srgbClr val="8A9099"/>
                 </a:solidFill>
@@ -6145,7 +6146,7 @@
               </a:rPr>
               <a:t>주소와 토큰을 입력해 에이전트에 연결합니다.</a:t>
             </a:r>
-            <a:endParaRPr lang="en-US" sz="1300" dirty="0"/>
+            <a:endParaRPr lang="en-US" sz="1200" dirty="0"/>
           </a:p>
         </p:txBody>
       </p:sp>
@@ -6157,8 +6158,8 @@
         </p:nvSpPr>
         <p:spPr>
           <a:xfrm>
-            <a:off x="914400" y="1371600"/>
-            <a:ext cx="2468880" cy="4846320"/>
+            <a:off x="868680" y="1783080"/>
+            <a:ext cx="2468880" cy="4434840"/>
           </a:xfrm>
           <a:prstGeom prst="roundRect">
             <a:avLst>
@@ -6184,7 +6185,7 @@
         </p:nvSpPr>
         <p:spPr>
           <a:xfrm>
-            <a:off x="1097280" y="1481328"/>
+            <a:off x="1051560" y="1892808"/>
             <a:ext cx="914400" cy="182880"/>
           </a:xfrm>
           <a:prstGeom prst="rect">
@@ -6226,8 +6227,8 @@
         </p:nvSpPr>
         <p:spPr>
           <a:xfrm>
-            <a:off x="2633472" y="1517904"/>
-            <a:ext cx="146304" cy="91440"/>
+            <a:off x="2587752" y="1938528"/>
+            <a:ext cx="137160" cy="91440"/>
           </a:xfrm>
           <a:prstGeom prst="roundRect">
             <a:avLst>
@@ -6248,8 +6249,8 @@
         </p:nvSpPr>
         <p:spPr>
           <a:xfrm>
-            <a:off x="2816352" y="1508760"/>
-            <a:ext cx="146304" cy="109728"/>
+            <a:off x="2761488" y="1929384"/>
+            <a:ext cx="137160" cy="109728"/>
           </a:xfrm>
           <a:prstGeom prst="roundRect">
             <a:avLst>
@@ -6270,7 +6271,7 @@
         </p:nvSpPr>
         <p:spPr>
           <a:xfrm>
-            <a:off x="2999232" y="1499616"/>
+            <a:off x="2935224" y="1920240"/>
             <a:ext cx="201168" cy="128016"/>
           </a:xfrm>
           <a:prstGeom prst="roundRect">
@@ -6292,12 +6293,12 @@
         </p:nvSpPr>
         <p:spPr>
           <a:xfrm>
-            <a:off x="1920240" y="1828800"/>
-            <a:ext cx="457200" cy="457200"/>
+            <a:off x="1883664" y="2167128"/>
+            <a:ext cx="438912" cy="438912"/>
           </a:xfrm>
           <a:prstGeom prst="roundRect">
             <a:avLst>
-              <a:gd name="adj" fmla="val 24000"/>
+              <a:gd name="adj" fmla="val 25000"/>
             </a:avLst>
           </a:prstGeom>
           <a:solidFill>
@@ -6314,15 +6315,15 @@
         </p:nvSpPr>
         <p:spPr>
           <a:xfrm>
-            <a:off x="2036186" y="1960108"/>
-            <a:ext cx="225308" cy="81930"/>
+            <a:off x="1998513" y="2298619"/>
+            <a:ext cx="209215" cy="71323"/>
           </a:xfrm>
           <a:prstGeom prst="roundRect">
             <a:avLst>
-              <a:gd name="adj" fmla="val 33482"/>
+              <a:gd name="adj" fmla="val 38462"/>
             </a:avLst>
           </a:prstGeom>
-          <a:ln w="15240">
+          <a:ln w="16510">
             <a:solidFill>
               <a:srgbClr val="4C8DFF"/>
             </a:solidFill>
@@ -6338,15 +6339,15 @@
         </p:nvSpPr>
         <p:spPr>
           <a:xfrm>
-            <a:off x="2036186" y="2072762"/>
-            <a:ext cx="225308" cy="81930"/>
+            <a:off x="1998513" y="2403226"/>
+            <a:ext cx="209215" cy="71323"/>
           </a:xfrm>
           <a:prstGeom prst="roundRect">
             <a:avLst>
-              <a:gd name="adj" fmla="val 33482"/>
+              <a:gd name="adj" fmla="val 38462"/>
             </a:avLst>
           </a:prstGeom>
-          <a:ln w="15240">
+          <a:ln w="16510">
             <a:solidFill>
               <a:srgbClr val="4C8DFF"/>
             </a:solidFill>
@@ -6362,12 +6363,12 @@
         </p:nvSpPr>
         <p:spPr>
           <a:xfrm>
-            <a:off x="2066910" y="1990832"/>
-            <a:ext cx="15362" cy="15362"/>
+            <a:off x="2029419" y="2323582"/>
+            <a:ext cx="16642" cy="16642"/>
           </a:xfrm>
           <a:prstGeom prst="roundRect">
             <a:avLst>
-              <a:gd name="adj" fmla="val 119047"/>
+              <a:gd name="adj" fmla="val 109891"/>
             </a:avLst>
           </a:prstGeom>
           <a:solidFill>
@@ -6384,12 +6385,12 @@
         </p:nvSpPr>
         <p:spPr>
           <a:xfrm>
-            <a:off x="2066910" y="2103486"/>
-            <a:ext cx="15362" cy="15362"/>
+            <a:off x="2029419" y="2428189"/>
+            <a:ext cx="16642" cy="16642"/>
           </a:xfrm>
           <a:prstGeom prst="roundRect">
             <a:avLst>
-              <a:gd name="adj" fmla="val 119047"/>
+              <a:gd name="adj" fmla="val 109891"/>
             </a:avLst>
           </a:prstGeom>
           <a:solidFill>
@@ -6406,8 +6407,8 @@
         </p:nvSpPr>
         <p:spPr>
           <a:xfrm>
-            <a:off x="1097280" y="2377440"/>
-            <a:ext cx="2103120" cy="274320"/>
+            <a:off x="1051560" y="2679192"/>
+            <a:ext cx="2103120" cy="237744"/>
           </a:xfrm>
           <a:prstGeom prst="rect">
             <a:avLst/>
@@ -6426,7 +6427,7 @@
               <a:buNone/>
             </a:pPr>
             <a:r>
-              <a:rPr lang="en-US" sz="1300" b="1" dirty="0">
+              <a:rPr lang="en-US" sz="1250" b="1" dirty="0">
                 <a:solidFill>
                   <a:srgbClr val="E6E9EF"/>
                 </a:solidFill>
@@ -6436,7 +6437,7 @@
               </a:rPr>
               <a:t>Connect to a server</a:t>
             </a:r>
-            <a:endParaRPr lang="en-US" sz="1300" dirty="0"/>
+            <a:endParaRPr lang="en-US" sz="1250" dirty="0"/>
           </a:p>
         </p:txBody>
       </p:sp>
@@ -6448,8 +6449,8 @@
         </p:nvSpPr>
         <p:spPr>
           <a:xfrm>
-            <a:off x="1097280" y="2670048"/>
-            <a:ext cx="2103120" cy="365760"/>
+            <a:off x="1051560" y="2953512"/>
+            <a:ext cx="2103120" cy="219456"/>
           </a:xfrm>
           <a:prstGeom prst="rect">
             <a:avLst/>
@@ -6463,12 +6464,12 @@
           <a:p>
             <a:pPr algn="ctr" indent="0" marL="0">
               <a:lnSpc>
-                <a:spcPct val="110000"/>
-              </a:lnSpc>
-              <a:buNone/>
-            </a:pPr>
-            <a:r>
-              <a:rPr lang="en-US" sz="850" dirty="0">
+                <a:spcPct val="100000"/>
+              </a:lnSpc>
+              <a:buNone/>
+            </a:pPr>
+            <a:r>
+              <a:rPr lang="en-US" sz="750" dirty="0">
                 <a:solidFill>
                   <a:srgbClr val="8A9099"/>
                 </a:solidFill>
@@ -6476,9 +6477,9 @@
                 <a:ea typeface="Malgun Gothic" pitchFamily="34" charset="-122"/>
                 <a:cs typeface="Malgun Gothic" pitchFamily="34" charset="-120"/>
               </a:rPr>
-              <a:t>Enter the agent address and token to start monitoring.</a:t>
-            </a:r>
-            <a:endParaRPr lang="en-US" sz="850" dirty="0"/>
+              <a:t>Enter the agent address and token.</a:t>
+            </a:r>
+            <a:endParaRPr lang="en-US" sz="750" dirty="0"/>
           </a:p>
         </p:txBody>
       </p:sp>
@@ -6490,12 +6491,12 @@
         </p:nvSpPr>
         <p:spPr>
           <a:xfrm>
-            <a:off x="1097280" y="3108960"/>
-            <a:ext cx="2103120" cy="457200"/>
+            <a:off x="1051560" y="3264408"/>
+            <a:ext cx="2103120" cy="420624"/>
           </a:xfrm>
           <a:prstGeom prst="roundRect">
             <a:avLst>
-              <a:gd name="adj" fmla="val 16000"/>
+              <a:gd name="adj" fmla="val 17391"/>
             </a:avLst>
           </a:prstGeom>
           <a:solidFill>
@@ -6517,8 +6518,8 @@
         </p:nvSpPr>
         <p:spPr>
           <a:xfrm>
-            <a:off x="1207008" y="3154680"/>
-            <a:ext cx="1883664" cy="164592"/>
+            <a:off x="1152144" y="3310128"/>
+            <a:ext cx="1901952" cy="146304"/>
           </a:xfrm>
           <a:prstGeom prst="rect">
             <a:avLst/>
@@ -6537,7 +6538,7 @@
               <a:buNone/>
             </a:pPr>
             <a:r>
-              <a:rPr lang="en-US" sz="700" dirty="0">
+              <a:rPr lang="en-US" sz="650" dirty="0">
                 <a:solidFill>
                   <a:srgbClr val="8A9099"/>
                 </a:solidFill>
@@ -6547,7 +6548,7 @@
               </a:rPr>
               <a:t>Server address</a:t>
             </a:r>
-            <a:endParaRPr lang="en-US" sz="700" dirty="0"/>
+            <a:endParaRPr lang="en-US" sz="650" dirty="0"/>
           </a:p>
         </p:txBody>
       </p:sp>
@@ -6559,8 +6560,8 @@
         </p:nvSpPr>
         <p:spPr>
           <a:xfrm>
-            <a:off x="1207008" y="3310128"/>
-            <a:ext cx="1883664" cy="182880"/>
+            <a:off x="1152144" y="3456432"/>
+            <a:ext cx="1901952" cy="182880"/>
           </a:xfrm>
           <a:prstGeom prst="rect">
             <a:avLst/>
@@ -6579,7 +6580,7 @@
               <a:buNone/>
             </a:pPr>
             <a:r>
-              <a:rPr lang="en-US" sz="900" dirty="0">
+              <a:rPr lang="en-US" sz="850" dirty="0">
                 <a:solidFill>
                   <a:srgbClr val="E6E9EF"/>
                 </a:solidFill>
@@ -6589,7 +6590,7 @@
               </a:rPr>
               <a:t>https://web-01.lan:8765</a:t>
             </a:r>
-            <a:endParaRPr lang="en-US" sz="900" dirty="0"/>
+            <a:endParaRPr lang="en-US" sz="850" dirty="0"/>
           </a:p>
         </p:txBody>
       </p:sp>
@@ -6601,12 +6602,12 @@
         </p:nvSpPr>
         <p:spPr>
           <a:xfrm>
-            <a:off x="1097280" y="3657600"/>
-            <a:ext cx="2103120" cy="457200"/>
+            <a:off x="1051560" y="3739896"/>
+            <a:ext cx="2103120" cy="420624"/>
           </a:xfrm>
           <a:prstGeom prst="roundRect">
             <a:avLst>
-              <a:gd name="adj" fmla="val 16000"/>
+              <a:gd name="adj" fmla="val 17391"/>
             </a:avLst>
           </a:prstGeom>
           <a:solidFill>
@@ -6628,8 +6629,8 @@
         </p:nvSpPr>
         <p:spPr>
           <a:xfrm>
-            <a:off x="1207008" y="3703320"/>
-            <a:ext cx="1883664" cy="164592"/>
+            <a:off x="1152144" y="3785616"/>
+            <a:ext cx="1901952" cy="146304"/>
           </a:xfrm>
           <a:prstGeom prst="rect">
             <a:avLst/>
@@ -6648,7 +6649,7 @@
               <a:buNone/>
             </a:pPr>
             <a:r>
-              <a:rPr lang="en-US" sz="700" dirty="0">
+              <a:rPr lang="en-US" sz="650" dirty="0">
                 <a:solidFill>
                   <a:srgbClr val="8A9099"/>
                 </a:solidFill>
@@ -6658,7 +6659,7 @@
               </a:rPr>
               <a:t>Token</a:t>
             </a:r>
-            <a:endParaRPr lang="en-US" sz="700" dirty="0"/>
+            <a:endParaRPr lang="en-US" sz="650" dirty="0"/>
           </a:p>
         </p:txBody>
       </p:sp>
@@ -6670,8 +6671,8 @@
         </p:nvSpPr>
         <p:spPr>
           <a:xfrm>
-            <a:off x="1207008" y="3858768"/>
-            <a:ext cx="1883664" cy="182880"/>
+            <a:off x="1152144" y="3931920"/>
+            <a:ext cx="1901952" cy="182880"/>
           </a:xfrm>
           <a:prstGeom prst="rect">
             <a:avLst/>
@@ -6690,7 +6691,7 @@
               <a:buNone/>
             </a:pPr>
             <a:r>
-              <a:rPr lang="en-US" sz="900" dirty="0">
+              <a:rPr lang="en-US" sz="850" dirty="0">
                 <a:solidFill>
                   <a:srgbClr val="E6E9EF"/>
                 </a:solidFill>
@@ -6700,7 +6701,7 @@
               </a:rPr>
               <a:t>••••••••••••••</a:t>
             </a:r>
-            <a:endParaRPr lang="en-US" sz="900" dirty="0"/>
+            <a:endParaRPr lang="en-US" sz="850" dirty="0"/>
           </a:p>
         </p:txBody>
       </p:sp>
@@ -6712,12 +6713,12 @@
         </p:nvSpPr>
         <p:spPr>
           <a:xfrm>
-            <a:off x="1097280" y="4224528"/>
-            <a:ext cx="2103120" cy="457200"/>
+            <a:off x="1051560" y="4233672"/>
+            <a:ext cx="2103120" cy="420624"/>
           </a:xfrm>
           <a:prstGeom prst="roundRect">
             <a:avLst>
-              <a:gd name="adj" fmla="val 20000"/>
+              <a:gd name="adj" fmla="val 21739"/>
             </a:avLst>
           </a:prstGeom>
           <a:solidFill>
@@ -6734,8 +6735,8 @@
         </p:nvSpPr>
         <p:spPr>
           <a:xfrm>
-            <a:off x="1097280" y="4224528"/>
-            <a:ext cx="2103120" cy="457200"/>
+            <a:off x="1051560" y="4233672"/>
+            <a:ext cx="2103120" cy="420624"/>
           </a:xfrm>
           <a:prstGeom prst="rect">
             <a:avLst/>
@@ -6776,8 +6777,8 @@
         </p:nvSpPr>
         <p:spPr>
           <a:xfrm rot="2700000">
-            <a:off x="1097280" y="4800600"/>
-            <a:ext cx="164592" cy="164592"/>
+            <a:off x="1051560" y="4764024"/>
+            <a:ext cx="155448" cy="155448"/>
           </a:xfrm>
           <a:prstGeom prst="blockArc">
             <a:avLst/>
@@ -6796,8 +6797,8 @@
         </p:nvSpPr>
         <p:spPr>
           <a:xfrm>
-            <a:off x="1335024" y="4782312"/>
-            <a:ext cx="1865376" cy="201168"/>
+            <a:off x="1280160" y="4745736"/>
+            <a:ext cx="1874520" cy="182880"/>
           </a:xfrm>
           <a:prstGeom prst="rect">
             <a:avLst/>
@@ -6816,7 +6817,7 @@
               <a:buNone/>
             </a:pPr>
             <a:r>
-              <a:rPr lang="en-US" sz="850" dirty="0">
+              <a:rPr lang="en-US" sz="800" dirty="0">
                 <a:solidFill>
                   <a:srgbClr val="8A9099"/>
                 </a:solidFill>
@@ -6826,7 +6827,7 @@
               </a:rPr>
               <a:t>Connecting…</a:t>
             </a:r>
-            <a:endParaRPr lang="en-US" sz="850" dirty="0"/>
+            <a:endParaRPr lang="en-US" sz="800" dirty="0"/>
           </a:p>
         </p:txBody>
       </p:sp>
@@ -6838,7 +6839,7 @@
         </p:nvSpPr>
         <p:spPr>
           <a:xfrm>
-            <a:off x="1097280" y="5138928"/>
+            <a:off x="1051560" y="4928616"/>
             <a:ext cx="2103120" cy="182880"/>
           </a:xfrm>
           <a:prstGeom prst="rect">
@@ -6858,7 +6859,7 @@
               <a:buNone/>
             </a:pPr>
             <a:r>
-              <a:rPr lang="en-US" sz="750" b="1" spc="100" kern="0" dirty="0">
+              <a:rPr lang="en-US" sz="700" b="1" spc="100" kern="0" dirty="0">
                 <a:solidFill>
                   <a:srgbClr val="8A9099"/>
                 </a:solidFill>
@@ -6868,7 +6869,7 @@
               </a:rPr>
               <a:t>SAVED SERVERS</a:t>
             </a:r>
-            <a:endParaRPr lang="en-US" sz="750" dirty="0"/>
+            <a:endParaRPr lang="en-US" sz="700" dirty="0"/>
           </a:p>
         </p:txBody>
       </p:sp>
@@ -6880,12 +6881,12 @@
         </p:nvSpPr>
         <p:spPr>
           <a:xfrm>
-            <a:off x="1097280" y="5376672"/>
-            <a:ext cx="2103120" cy="384048"/>
+            <a:off x="1051560" y="5129784"/>
+            <a:ext cx="2103120" cy="347472"/>
           </a:xfrm>
           <a:prstGeom prst="roundRect">
             <a:avLst>
-              <a:gd name="adj" fmla="val 19048"/>
+              <a:gd name="adj" fmla="val 21053"/>
             </a:avLst>
           </a:prstGeom>
           <a:solidFill>
@@ -6907,8 +6908,8 @@
         </p:nvSpPr>
         <p:spPr>
           <a:xfrm>
-            <a:off x="1207008" y="5376672"/>
-            <a:ext cx="1188720" cy="384048"/>
+            <a:off x="1152144" y="5129784"/>
+            <a:ext cx="1188720" cy="347472"/>
           </a:xfrm>
           <a:prstGeom prst="rect">
             <a:avLst/>
@@ -6927,7 +6928,7 @@
               <a:buNone/>
             </a:pPr>
             <a:r>
-              <a:rPr lang="en-US" sz="900" dirty="0">
+              <a:rPr lang="en-US" sz="850" dirty="0">
                 <a:solidFill>
                   <a:srgbClr val="E6E9EF"/>
                 </a:solidFill>
@@ -6937,7 +6938,7 @@
               </a:rPr>
               <a:t>web-01</a:t>
             </a:r>
-            <a:endParaRPr lang="en-US" sz="900" dirty="0"/>
+            <a:endParaRPr lang="en-US" sz="850" dirty="0"/>
           </a:p>
         </p:txBody>
       </p:sp>
@@ -6949,8 +6950,8 @@
         </p:nvSpPr>
         <p:spPr>
           <a:xfrm>
-            <a:off x="2359152" y="5477256"/>
-            <a:ext cx="566928" cy="182880"/>
+            <a:off x="2313432" y="5221224"/>
+            <a:ext cx="566928" cy="164592"/>
           </a:xfrm>
           <a:prstGeom prst="roundRect">
             <a:avLst>
@@ -6971,8 +6972,8 @@
         </p:nvSpPr>
         <p:spPr>
           <a:xfrm>
-            <a:off x="2359152" y="5477256"/>
-            <a:ext cx="566928" cy="182880"/>
+            <a:off x="2313432" y="5221224"/>
+            <a:ext cx="566928" cy="164592"/>
           </a:xfrm>
           <a:prstGeom prst="rect">
             <a:avLst/>
@@ -6991,7 +6992,7 @@
               <a:buNone/>
             </a:pPr>
             <a:r>
-              <a:rPr lang="en-US" sz="700" b="1" dirty="0">
+              <a:rPr lang="en-US" sz="650" b="1" dirty="0">
                 <a:solidFill>
                   <a:srgbClr val="6B7280"/>
                 </a:solidFill>
@@ -7001,7 +7002,7 @@
               </a:rPr>
               <a:t>Offline</a:t>
             </a:r>
-            <a:endParaRPr lang="en-US" sz="700" dirty="0"/>
+            <a:endParaRPr lang="en-US" sz="650" dirty="0"/>
           </a:p>
         </p:txBody>
       </p:sp>
@@ -7013,8 +7014,8 @@
         </p:nvSpPr>
         <p:spPr>
           <a:xfrm>
-            <a:off x="2999232" y="5376672"/>
-            <a:ext cx="137160" cy="384048"/>
+            <a:off x="2971800" y="5129784"/>
+            <a:ext cx="137160" cy="347472"/>
           </a:xfrm>
           <a:prstGeom prst="rect">
             <a:avLst/>
@@ -7055,12 +7056,12 @@
         </p:nvSpPr>
         <p:spPr>
           <a:xfrm>
-            <a:off x="1097280" y="5833872"/>
-            <a:ext cx="2103120" cy="384048"/>
+            <a:off x="1051560" y="5513832"/>
+            <a:ext cx="2103120" cy="347472"/>
           </a:xfrm>
           <a:prstGeom prst="roundRect">
             <a:avLst>
-              <a:gd name="adj" fmla="val 19048"/>
+              <a:gd name="adj" fmla="val 21053"/>
             </a:avLst>
           </a:prstGeom>
           <a:solidFill>
@@ -7082,8 +7083,8 @@
         </p:nvSpPr>
         <p:spPr>
           <a:xfrm>
-            <a:off x="1207008" y="5833872"/>
-            <a:ext cx="1188720" cy="384048"/>
+            <a:off x="1152144" y="5513832"/>
+            <a:ext cx="1188720" cy="347472"/>
           </a:xfrm>
           <a:prstGeom prst="rect">
             <a:avLst/>
@@ -7102,7 +7103,7 @@
               <a:buNone/>
             </a:pPr>
             <a:r>
-              <a:rPr lang="en-US" sz="900" dirty="0">
+              <a:rPr lang="en-US" sz="850" dirty="0">
                 <a:solidFill>
                   <a:srgbClr val="E6E9EF"/>
                 </a:solidFill>
@@ -7112,7 +7113,7 @@
               </a:rPr>
               <a:t>db-01</a:t>
             </a:r>
-            <a:endParaRPr lang="en-US" sz="900" dirty="0"/>
+            <a:endParaRPr lang="en-US" sz="850" dirty="0"/>
           </a:p>
         </p:txBody>
       </p:sp>
@@ -7124,8 +7125,8 @@
         </p:nvSpPr>
         <p:spPr>
           <a:xfrm>
-            <a:off x="2359152" y="5934456"/>
-            <a:ext cx="566928" cy="182880"/>
+            <a:off x="2313432" y="5605272"/>
+            <a:ext cx="566928" cy="164592"/>
           </a:xfrm>
           <a:prstGeom prst="roundRect">
             <a:avLst>
@@ -7146,8 +7147,8 @@
         </p:nvSpPr>
         <p:spPr>
           <a:xfrm>
-            <a:off x="2359152" y="5934456"/>
-            <a:ext cx="566928" cy="182880"/>
+            <a:off x="2313432" y="5605272"/>
+            <a:ext cx="566928" cy="164592"/>
           </a:xfrm>
           <a:prstGeom prst="rect">
             <a:avLst/>
@@ -7166,7 +7167,7 @@
               <a:buNone/>
             </a:pPr>
             <a:r>
-              <a:rPr lang="en-US" sz="700" b="1" dirty="0">
+              <a:rPr lang="en-US" sz="650" b="1" dirty="0">
                 <a:solidFill>
                   <a:srgbClr val="6B7280"/>
                 </a:solidFill>
@@ -7176,7 +7177,7 @@
               </a:rPr>
               <a:t>Offline</a:t>
             </a:r>
-            <a:endParaRPr lang="en-US" sz="700" dirty="0"/>
+            <a:endParaRPr lang="en-US" sz="650" dirty="0"/>
           </a:p>
         </p:txBody>
       </p:sp>
@@ -7188,8 +7189,8 @@
         </p:nvSpPr>
         <p:spPr>
           <a:xfrm>
-            <a:off x="2999232" y="5833872"/>
-            <a:ext cx="137160" cy="384048"/>
+            <a:off x="2971800" y="5513832"/>
+            <a:ext cx="137160" cy="347472"/>
           </a:xfrm>
           <a:prstGeom prst="rect">
             <a:avLst/>
@@ -7230,8 +7231,8 @@
         </p:nvSpPr>
         <p:spPr>
           <a:xfrm>
-            <a:off x="1097280" y="5852160"/>
-            <a:ext cx="2103120" cy="228600"/>
+            <a:off x="1051560" y="5916168"/>
+            <a:ext cx="2103120" cy="219456"/>
           </a:xfrm>
           <a:prstGeom prst="rect">
             <a:avLst/>
@@ -7250,7 +7251,7 @@
               <a:buNone/>
             </a:pPr>
             <a:r>
-              <a:rPr lang="en-US" sz="900" dirty="0">
+              <a:rPr lang="en-US" sz="850" dirty="0">
                 <a:solidFill>
                   <a:srgbClr val="4C8DFF"/>
                 </a:solidFill>
@@ -7260,7 +7261,7 @@
               </a:rPr>
               <a:t>+  Add a new server</a:t>
             </a:r>
-            <a:endParaRPr lang="en-US" sz="900" dirty="0"/>
+            <a:endParaRPr lang="en-US" sz="850" dirty="0"/>
           </a:p>
         </p:txBody>
       </p:sp>
@@ -7272,7 +7273,7 @@
         </p:nvSpPr>
         <p:spPr>
           <a:xfrm>
-            <a:off x="4023360" y="2203704"/>
+            <a:off x="4114800" y="2157984"/>
             <a:ext cx="128016" cy="128016"/>
           </a:xfrm>
           <a:prstGeom prst="roundRect">
@@ -7294,8 +7295,8 @@
         </p:nvSpPr>
         <p:spPr>
           <a:xfrm>
-            <a:off x="4297680" y="2148840"/>
-            <a:ext cx="7253935" cy="274320"/>
+            <a:off x="4389120" y="2103120"/>
+            <a:ext cx="7162495" cy="274320"/>
           </a:xfrm>
           <a:prstGeom prst="rect">
             <a:avLst/>
@@ -7336,8 +7337,8 @@
         </p:nvSpPr>
         <p:spPr>
           <a:xfrm>
-            <a:off x="4297680" y="2432304"/>
-            <a:ext cx="7253935" cy="548640"/>
+            <a:off x="4389120" y="2386584"/>
+            <a:ext cx="7162495" cy="548640"/>
           </a:xfrm>
           <a:prstGeom prst="rect">
             <a:avLst/>
@@ -7351,7 +7352,7 @@
           <a:p>
             <a:pPr algn="l" indent="0" marL="0">
               <a:lnSpc>
-                <a:spcPct val="110000"/>
+                <a:spcPct val="115000"/>
               </a:lnSpc>
               <a:buNone/>
             </a:pPr>
@@ -7378,7 +7379,7 @@
         </p:nvSpPr>
         <p:spPr>
           <a:xfrm>
-            <a:off x="4023360" y="3026664"/>
+            <a:off x="4114800" y="2980944"/>
             <a:ext cx="128016" cy="128016"/>
           </a:xfrm>
           <a:prstGeom prst="roundRect">
@@ -7400,8 +7401,8 @@
         </p:nvSpPr>
         <p:spPr>
           <a:xfrm>
-            <a:off x="4297680" y="2971800"/>
-            <a:ext cx="7253935" cy="274320"/>
+            <a:off x="4389120" y="2926080"/>
+            <a:ext cx="7162495" cy="274320"/>
           </a:xfrm>
           <a:prstGeom prst="rect">
             <a:avLst/>
@@ -7442,8 +7443,8 @@
         </p:nvSpPr>
         <p:spPr>
           <a:xfrm>
-            <a:off x="4297680" y="3255264"/>
-            <a:ext cx="7253935" cy="548640"/>
+            <a:off x="4389120" y="3209544"/>
+            <a:ext cx="7162495" cy="548640"/>
           </a:xfrm>
           <a:prstGeom prst="rect">
             <a:avLst/>
@@ -7457,7 +7458,7 @@
           <a:p>
             <a:pPr algn="l" indent="0" marL="0">
               <a:lnSpc>
-                <a:spcPct val="110000"/>
+                <a:spcPct val="115000"/>
               </a:lnSpc>
               <a:buNone/>
             </a:pPr>
@@ -7484,7 +7485,7 @@
         </p:nvSpPr>
         <p:spPr>
           <a:xfrm>
-            <a:off x="4023360" y="3849624"/>
+            <a:off x="4114800" y="3803904"/>
             <a:ext cx="128016" cy="128016"/>
           </a:xfrm>
           <a:prstGeom prst="roundRect">
@@ -7506,8 +7507,8 @@
         </p:nvSpPr>
         <p:spPr>
           <a:xfrm>
-            <a:off x="4297680" y="3794760"/>
-            <a:ext cx="7253935" cy="274320"/>
+            <a:off x="4389120" y="3749040"/>
+            <a:ext cx="7162495" cy="274320"/>
           </a:xfrm>
           <a:prstGeom prst="rect">
             <a:avLst/>
@@ -7548,8 +7549,8 @@
         </p:nvSpPr>
         <p:spPr>
           <a:xfrm>
-            <a:off x="4297680" y="4078224"/>
-            <a:ext cx="7253935" cy="548640"/>
+            <a:off x="4389120" y="4032504"/>
+            <a:ext cx="7162495" cy="548640"/>
           </a:xfrm>
           <a:prstGeom prst="rect">
             <a:avLst/>
@@ -7563,7 +7564,7 @@
           <a:p>
             <a:pPr algn="l" indent="0" marL="0">
               <a:lnSpc>
-                <a:spcPct val="110000"/>
+                <a:spcPct val="115000"/>
               </a:lnSpc>
               <a:buNone/>
             </a:pPr>
@@ -7590,7 +7591,7 @@
         </p:nvSpPr>
         <p:spPr>
           <a:xfrm>
-            <a:off x="640080" y="6355080"/>
+            <a:off x="640080" y="6382512"/>
             <a:ext cx="10911535" cy="0"/>
           </a:xfrm>
           <a:prstGeom prst="line">
@@ -7613,7 +7614,7 @@
         </p:nvSpPr>
         <p:spPr>
           <a:xfrm>
-            <a:off x="640080" y="6419088"/>
+            <a:off x="640080" y="6455664"/>
             <a:ext cx="5486400" cy="274320"/>
           </a:xfrm>
           <a:prstGeom prst="rect">
@@ -7655,7 +7656,7 @@
         </p:nvSpPr>
         <p:spPr>
           <a:xfrm>
-            <a:off x="9722815" y="6419088"/>
+            <a:off x="9722815" y="6455664"/>
             <a:ext cx="1828800" cy="274320"/>
           </a:xfrm>
           <a:prstGeom prst="rect">
@@ -7729,7 +7730,7 @@
         </p:nvSpPr>
         <p:spPr>
           <a:xfrm>
-            <a:off x="640080" y="475488"/>
+            <a:off x="640080" y="457200"/>
             <a:ext cx="10911535" cy="274320"/>
           </a:xfrm>
           <a:prstGeom prst="rect">
@@ -7771,7 +7772,7 @@
         </p:nvSpPr>
         <p:spPr>
           <a:xfrm>
-            <a:off x="640080" y="749808"/>
+            <a:off x="640080" y="731520"/>
             <a:ext cx="10911535" cy="548640"/>
           </a:xfrm>
           <a:prstGeom prst="rect">
@@ -7791,7 +7792,7 @@
               <a:buNone/>
             </a:pPr>
             <a:r>
-              <a:rPr lang="en-US" sz="2700" b="1" dirty="0">
+              <a:rPr lang="en-US" sz="2600" b="1" dirty="0">
                 <a:solidFill>
                   <a:srgbClr val="E6E9EF"/>
                 </a:solidFill>
@@ -7801,7 +7802,7 @@
               </a:rPr>
               <a:t>연결 후 — 메인 화면</a:t>
             </a:r>
-            <a:endParaRPr lang="en-US" sz="2700" dirty="0"/>
+            <a:endParaRPr lang="en-US" sz="2600" dirty="0"/>
           </a:p>
         </p:txBody>
       </p:sp>
@@ -7814,7 +7815,7 @@
         <p:spPr>
           <a:xfrm>
             <a:off x="640080" y="1298448"/>
-            <a:ext cx="10911535" cy="411480"/>
+            <a:ext cx="10911535" cy="347472"/>
           </a:xfrm>
           <a:prstGeom prst="rect">
             <a:avLst/>
@@ -7833,7 +7834,7 @@
               <a:buNone/>
             </a:pPr>
             <a:r>
-              <a:rPr lang="en-US" sz="1300" dirty="0">
+              <a:rPr lang="en-US" sz="1200" dirty="0">
                 <a:solidFill>
                   <a:srgbClr val="8A9099"/>
                 </a:solidFill>
@@ -7843,7 +7844,7 @@
               </a:rPr>
               <a:t>전체 상태와 서버별 요약을 한눈에 확인합니다.</a:t>
             </a:r>
-            <a:endParaRPr lang="en-US" sz="1300" dirty="0"/>
+            <a:endParaRPr lang="en-US" sz="1200" dirty="0"/>
           </a:p>
         </p:txBody>
       </p:sp>
@@ -7855,8 +7856,8 @@
         </p:nvSpPr>
         <p:spPr>
           <a:xfrm>
-            <a:off x="914400" y="1371600"/>
-            <a:ext cx="2468880" cy="4846320"/>
+            <a:off x="868680" y="1783080"/>
+            <a:ext cx="2468880" cy="4434840"/>
           </a:xfrm>
           <a:prstGeom prst="roundRect">
             <a:avLst>
@@ -7882,7 +7883,7 @@
         </p:nvSpPr>
         <p:spPr>
           <a:xfrm>
-            <a:off x="1097280" y="1481328"/>
+            <a:off x="1051560" y="1892808"/>
             <a:ext cx="914400" cy="182880"/>
           </a:xfrm>
           <a:prstGeom prst="rect">
@@ -7924,8 +7925,8 @@
         </p:nvSpPr>
         <p:spPr>
           <a:xfrm>
-            <a:off x="2633472" y="1517904"/>
-            <a:ext cx="146304" cy="91440"/>
+            <a:off x="2587752" y="1938528"/>
+            <a:ext cx="137160" cy="91440"/>
           </a:xfrm>
           <a:prstGeom prst="roundRect">
             <a:avLst>
@@ -7946,8 +7947,8 @@
         </p:nvSpPr>
         <p:spPr>
           <a:xfrm>
-            <a:off x="2816352" y="1508760"/>
-            <a:ext cx="146304" cy="109728"/>
+            <a:off x="2761488" y="1929384"/>
+            <a:ext cx="137160" cy="109728"/>
           </a:xfrm>
           <a:prstGeom prst="roundRect">
             <a:avLst>
@@ -7968,7 +7969,7 @@
         </p:nvSpPr>
         <p:spPr>
           <a:xfrm>
-            <a:off x="2999232" y="1499616"/>
+            <a:off x="2935224" y="1920240"/>
             <a:ext cx="201168" cy="128016"/>
           </a:xfrm>
           <a:prstGeom prst="roundRect">
@@ -7990,15 +7991,15 @@
         </p:nvSpPr>
         <p:spPr>
           <a:xfrm>
-            <a:off x="1110447" y="1809415"/>
-            <a:ext cx="193121" cy="70226"/>
+            <a:off x="1063630" y="2211568"/>
+            <a:ext cx="177028" cy="60350"/>
           </a:xfrm>
           <a:prstGeom prst="roundRect">
             <a:avLst>
-              <a:gd name="adj" fmla="val 39062"/>
+              <a:gd name="adj" fmla="val 45455"/>
             </a:avLst>
           </a:prstGeom>
-          <a:ln w="15240">
+          <a:ln w="16510">
             <a:solidFill>
               <a:srgbClr val="4C8DFF"/>
             </a:solidFill>
@@ -8014,15 +8015,15 @@
         </p:nvSpPr>
         <p:spPr>
           <a:xfrm>
-            <a:off x="1110447" y="1905975"/>
-            <a:ext cx="193121" cy="70226"/>
+            <a:off x="1063630" y="2300082"/>
+            <a:ext cx="177028" cy="60350"/>
           </a:xfrm>
           <a:prstGeom prst="roundRect">
             <a:avLst>
-              <a:gd name="adj" fmla="val 39062"/>
+              <a:gd name="adj" fmla="val 45455"/>
             </a:avLst>
           </a:prstGeom>
-          <a:ln w="15240">
+          <a:ln w="16510">
             <a:solidFill>
               <a:srgbClr val="4C8DFF"/>
             </a:solidFill>
@@ -8038,12 +8039,12 @@
         </p:nvSpPr>
         <p:spPr>
           <a:xfrm>
-            <a:off x="1136782" y="1835749"/>
-            <a:ext cx="13167" cy="13167"/>
+            <a:off x="1089782" y="2232690"/>
+            <a:ext cx="14082" cy="14082"/>
           </a:xfrm>
           <a:prstGeom prst="roundRect">
             <a:avLst>
-              <a:gd name="adj" fmla="val 138893"/>
+              <a:gd name="adj" fmla="val 129868"/>
             </a:avLst>
           </a:prstGeom>
           <a:solidFill>
@@ -8060,12 +8061,12 @@
         </p:nvSpPr>
         <p:spPr>
           <a:xfrm>
-            <a:off x="1136782" y="1932310"/>
-            <a:ext cx="13167" cy="13167"/>
+            <a:off x="1089782" y="2321204"/>
+            <a:ext cx="14082" cy="14082"/>
           </a:xfrm>
           <a:prstGeom prst="roundRect">
             <a:avLst>
-              <a:gd name="adj" fmla="val 138893"/>
+              <a:gd name="adj" fmla="val 129868"/>
             </a:avLst>
           </a:prstGeom>
           <a:solidFill>
@@ -8082,8 +8083,8 @@
         </p:nvSpPr>
         <p:spPr>
           <a:xfrm>
-            <a:off x="1371600" y="1755648"/>
-            <a:ext cx="1188720" cy="256032"/>
+            <a:off x="1307592" y="2157984"/>
+            <a:ext cx="1097280" cy="237744"/>
           </a:xfrm>
           <a:prstGeom prst="rect">
             <a:avLst/>
@@ -8102,7 +8103,7 @@
               <a:buNone/>
             </a:pPr>
             <a:r>
-              <a:rPr lang="en-US" sz="1200" b="1" dirty="0">
+              <a:rPr lang="en-US" sz="1150" b="1" dirty="0">
                 <a:solidFill>
                   <a:srgbClr val="E6E9EF"/>
                 </a:solidFill>
@@ -8112,7 +8113,7 @@
               </a:rPr>
               <a:t>Servex</a:t>
             </a:r>
-            <a:endParaRPr lang="en-US" sz="1200" dirty="0"/>
+            <a:endParaRPr lang="en-US" sz="1150" dirty="0"/>
           </a:p>
         </p:txBody>
       </p:sp>
@@ -8124,8 +8125,8 @@
         </p:nvSpPr>
         <p:spPr>
           <a:xfrm>
-            <a:off x="2487168" y="1792224"/>
-            <a:ext cx="201168" cy="201168"/>
+            <a:off x="2496312" y="2194560"/>
+            <a:ext cx="182880" cy="182880"/>
           </a:xfrm>
           <a:prstGeom prst="circularArrow">
             <a:avLst/>
@@ -8144,14 +8145,14 @@
         </p:nvSpPr>
         <p:spPr>
           <a:xfrm>
-            <a:off x="2843784" y="1822399"/>
-            <a:ext cx="0" cy="140818"/>
+            <a:off x="2825496" y="2223821"/>
+            <a:ext cx="0" cy="124358"/>
           </a:xfrm>
           <a:prstGeom prst="line">
             <a:avLst/>
           </a:prstGeom>
           <a:noFill/>
-          <a:ln w="15240">
+          <a:ln w="16510">
             <a:solidFill>
               <a:srgbClr val="8A9099"/>
             </a:solidFill>
@@ -8167,14 +8168,14 @@
         </p:nvSpPr>
         <p:spPr>
           <a:xfrm>
-            <a:off x="2773375" y="1892808"/>
-            <a:ext cx="140818" cy="0"/>
+            <a:off x="2763317" y="2286000"/>
+            <a:ext cx="124358" cy="0"/>
           </a:xfrm>
           <a:prstGeom prst="line">
             <a:avLst/>
           </a:prstGeom>
           <a:noFill/>
-          <a:ln w="15240">
+          <a:ln w="16510">
             <a:solidFill>
               <a:srgbClr val="8A9099"/>
             </a:solidFill>
@@ -8190,8 +8191,8 @@
         </p:nvSpPr>
         <p:spPr>
           <a:xfrm>
-            <a:off x="2980944" y="1792224"/>
-            <a:ext cx="201168" cy="201168"/>
+            <a:off x="2971800" y="2194560"/>
+            <a:ext cx="182880" cy="182880"/>
           </a:xfrm>
           <a:prstGeom prst="gear6">
             <a:avLst/>
@@ -8210,12 +8211,12 @@
         </p:nvSpPr>
         <p:spPr>
           <a:xfrm>
-            <a:off x="1097280" y="2240280"/>
-            <a:ext cx="484632" cy="310896"/>
+            <a:off x="1051560" y="2569464"/>
+            <a:ext cx="1005840" cy="329184"/>
           </a:xfrm>
           <a:prstGeom prst="roundRect">
             <a:avLst>
-              <a:gd name="adj" fmla="val 23529"/>
+              <a:gd name="adj" fmla="val 22222"/>
             </a:avLst>
           </a:prstGeom>
           <a:solidFill>
@@ -8237,7 +8238,7 @@
         </p:nvSpPr>
         <p:spPr>
           <a:xfrm>
-            <a:off x="1170432" y="2331720"/>
+            <a:off x="1143000" y="2692908"/>
             <a:ext cx="82296" cy="82296"/>
           </a:xfrm>
           <a:prstGeom prst="roundRect">
@@ -8259,8 +8260,8 @@
         </p:nvSpPr>
         <p:spPr>
           <a:xfrm>
-            <a:off x="1298448" y="2240280"/>
-            <a:ext cx="265176" cy="310896"/>
+            <a:off x="1271016" y="2569464"/>
+            <a:ext cx="731520" cy="329184"/>
           </a:xfrm>
           <a:prstGeom prst="rect">
             <a:avLst/>
@@ -8301,27 +8302,27 @@
         </p:nvSpPr>
         <p:spPr>
           <a:xfrm>
-            <a:off x="1298448" y="2404872"/>
-            <a:ext cx="265176" cy="146304"/>
-          </a:xfrm>
-          <a:prstGeom prst="rect">
-            <a:avLst/>
-          </a:prstGeom>
-          <a:noFill/>
-          <a:ln/>
-        </p:spPr>
-        <p:txBody>
-          <a:bodyPr wrap="square" lIns="0" tIns="0" rIns="0" bIns="0" rtlCol="0" anchor="t"/>
-          <a:lstStyle/>
-          <a:p>
-            <a:pPr algn="l" indent="0" marL="0">
-              <a:lnSpc>
-                <a:spcPct val="100000"/>
-              </a:lnSpc>
-              <a:buNone/>
-            </a:pPr>
-            <a:r>
-              <a:rPr lang="en-US" sz="650" dirty="0">
+            <a:off x="1435608" y="2569464"/>
+            <a:ext cx="566928" cy="329184"/>
+          </a:xfrm>
+          <a:prstGeom prst="rect">
+            <a:avLst/>
+          </a:prstGeom>
+          <a:noFill/>
+          <a:ln/>
+        </p:spPr>
+        <p:txBody>
+          <a:bodyPr wrap="square" lIns="0" tIns="0" rIns="0" bIns="0" rtlCol="0" anchor="ctr"/>
+          <a:lstStyle/>
+          <a:p>
+            <a:pPr algn="l" indent="0" marL="0">
+              <a:lnSpc>
+                <a:spcPct val="100000"/>
+              </a:lnSpc>
+              <a:buNone/>
+            </a:pPr>
+            <a:r>
+              <a:rPr lang="en-US" sz="700" dirty="0">
                 <a:solidFill>
                   <a:srgbClr val="8A9099"/>
                 </a:solidFill>
@@ -8331,7 +8332,7 @@
               </a:rPr>
               <a:t>Normal</a:t>
             </a:r>
-            <a:endParaRPr lang="en-US" sz="650" dirty="0"/>
+            <a:endParaRPr lang="en-US" sz="700" dirty="0"/>
           </a:p>
         </p:txBody>
       </p:sp>
@@ -8343,12 +8344,12 @@
         </p:nvSpPr>
         <p:spPr>
           <a:xfrm>
-            <a:off x="1636776" y="2240280"/>
-            <a:ext cx="484632" cy="310896"/>
+            <a:off x="2148840" y="2569464"/>
+            <a:ext cx="1005840" cy="329184"/>
           </a:xfrm>
           <a:prstGeom prst="roundRect">
             <a:avLst>
-              <a:gd name="adj" fmla="val 23529"/>
+              <a:gd name="adj" fmla="val 22222"/>
             </a:avLst>
           </a:prstGeom>
           <a:solidFill>
@@ -8370,7 +8371,7 @@
         </p:nvSpPr>
         <p:spPr>
           <a:xfrm>
-            <a:off x="1709928" y="2331720"/>
+            <a:off x="2240280" y="2692908"/>
             <a:ext cx="82296" cy="82296"/>
           </a:xfrm>
           <a:prstGeom prst="roundRect">
@@ -8392,8 +8393,8 @@
         </p:nvSpPr>
         <p:spPr>
           <a:xfrm>
-            <a:off x="1837944" y="2240280"/>
-            <a:ext cx="265176" cy="310896"/>
+            <a:off x="2368296" y="2569464"/>
+            <a:ext cx="731520" cy="329184"/>
           </a:xfrm>
           <a:prstGeom prst="rect">
             <a:avLst/>
@@ -8434,27 +8435,27 @@
         </p:nvSpPr>
         <p:spPr>
           <a:xfrm>
-            <a:off x="1837944" y="2404872"/>
-            <a:ext cx="265176" cy="146304"/>
-          </a:xfrm>
-          <a:prstGeom prst="rect">
-            <a:avLst/>
-          </a:prstGeom>
-          <a:noFill/>
-          <a:ln/>
-        </p:spPr>
-        <p:txBody>
-          <a:bodyPr wrap="square" lIns="0" tIns="0" rIns="0" bIns="0" rtlCol="0" anchor="t"/>
-          <a:lstStyle/>
-          <a:p>
-            <a:pPr algn="l" indent="0" marL="0">
-              <a:lnSpc>
-                <a:spcPct val="100000"/>
-              </a:lnSpc>
-              <a:buNone/>
-            </a:pPr>
-            <a:r>
-              <a:rPr lang="en-US" sz="650" dirty="0">
+            <a:off x="2532888" y="2569464"/>
+            <a:ext cx="566928" cy="329184"/>
+          </a:xfrm>
+          <a:prstGeom prst="rect">
+            <a:avLst/>
+          </a:prstGeom>
+          <a:noFill/>
+          <a:ln/>
+        </p:spPr>
+        <p:txBody>
+          <a:bodyPr wrap="square" lIns="0" tIns="0" rIns="0" bIns="0" rtlCol="0" anchor="ctr"/>
+          <a:lstStyle/>
+          <a:p>
+            <a:pPr algn="l" indent="0" marL="0">
+              <a:lnSpc>
+                <a:spcPct val="100000"/>
+              </a:lnSpc>
+              <a:buNone/>
+            </a:pPr>
+            <a:r>
+              <a:rPr lang="en-US" sz="700" dirty="0">
                 <a:solidFill>
                   <a:srgbClr val="8A9099"/>
                 </a:solidFill>
@@ -8464,7 +8465,7 @@
               </a:rPr>
               <a:t>Warning</a:t>
             </a:r>
-            <a:endParaRPr lang="en-US" sz="650" dirty="0"/>
+            <a:endParaRPr lang="en-US" sz="700" dirty="0"/>
           </a:p>
         </p:txBody>
       </p:sp>
@@ -8476,12 +8477,12 @@
         </p:nvSpPr>
         <p:spPr>
           <a:xfrm>
-            <a:off x="2176272" y="2240280"/>
-            <a:ext cx="484632" cy="310896"/>
+            <a:off x="1051560" y="2953512"/>
+            <a:ext cx="1005840" cy="329184"/>
           </a:xfrm>
           <a:prstGeom prst="roundRect">
             <a:avLst>
-              <a:gd name="adj" fmla="val 23529"/>
+              <a:gd name="adj" fmla="val 22222"/>
             </a:avLst>
           </a:prstGeom>
           <a:solidFill>
@@ -8503,7 +8504,7 @@
         </p:nvSpPr>
         <p:spPr>
           <a:xfrm>
-            <a:off x="2249424" y="2331720"/>
+            <a:off x="1143000" y="3076956"/>
             <a:ext cx="82296" cy="82296"/>
           </a:xfrm>
           <a:prstGeom prst="roundRect">
@@ -8525,8 +8526,8 @@
         </p:nvSpPr>
         <p:spPr>
           <a:xfrm>
-            <a:off x="2377440" y="2240280"/>
-            <a:ext cx="265176" cy="310896"/>
+            <a:off x="1271016" y="2953512"/>
+            <a:ext cx="731520" cy="329184"/>
           </a:xfrm>
           <a:prstGeom prst="rect">
             <a:avLst/>
@@ -8567,27 +8568,27 @@
         </p:nvSpPr>
         <p:spPr>
           <a:xfrm>
-            <a:off x="2377440" y="2404872"/>
-            <a:ext cx="265176" cy="146304"/>
-          </a:xfrm>
-          <a:prstGeom prst="rect">
-            <a:avLst/>
-          </a:prstGeom>
-          <a:noFill/>
-          <a:ln/>
-        </p:spPr>
-        <p:txBody>
-          <a:bodyPr wrap="square" lIns="0" tIns="0" rIns="0" bIns="0" rtlCol="0" anchor="t"/>
-          <a:lstStyle/>
-          <a:p>
-            <a:pPr algn="l" indent="0" marL="0">
-              <a:lnSpc>
-                <a:spcPct val="100000"/>
-              </a:lnSpc>
-              <a:buNone/>
-            </a:pPr>
-            <a:r>
-              <a:rPr lang="en-US" sz="650" dirty="0">
+            <a:off x="1435608" y="2953512"/>
+            <a:ext cx="566928" cy="329184"/>
+          </a:xfrm>
+          <a:prstGeom prst="rect">
+            <a:avLst/>
+          </a:prstGeom>
+          <a:noFill/>
+          <a:ln/>
+        </p:spPr>
+        <p:txBody>
+          <a:bodyPr wrap="square" lIns="0" tIns="0" rIns="0" bIns="0" rtlCol="0" anchor="ctr"/>
+          <a:lstStyle/>
+          <a:p>
+            <a:pPr algn="l" indent="0" marL="0">
+              <a:lnSpc>
+                <a:spcPct val="100000"/>
+              </a:lnSpc>
+              <a:buNone/>
+            </a:pPr>
+            <a:r>
+              <a:rPr lang="en-US" sz="700" dirty="0">
                 <a:solidFill>
                   <a:srgbClr val="8A9099"/>
                 </a:solidFill>
@@ -8597,7 +8598,7 @@
               </a:rPr>
               <a:t>Error</a:t>
             </a:r>
-            <a:endParaRPr lang="en-US" sz="650" dirty="0"/>
+            <a:endParaRPr lang="en-US" sz="700" dirty="0"/>
           </a:p>
         </p:txBody>
       </p:sp>
@@ -8609,12 +8610,12 @@
         </p:nvSpPr>
         <p:spPr>
           <a:xfrm>
-            <a:off x="2715768" y="2240280"/>
-            <a:ext cx="484632" cy="310896"/>
+            <a:off x="2148840" y="2953512"/>
+            <a:ext cx="1005840" cy="329184"/>
           </a:xfrm>
           <a:prstGeom prst="roundRect">
             <a:avLst>
-              <a:gd name="adj" fmla="val 23529"/>
+              <a:gd name="adj" fmla="val 22222"/>
             </a:avLst>
           </a:prstGeom>
           <a:solidFill>
@@ -8636,7 +8637,7 @@
         </p:nvSpPr>
         <p:spPr>
           <a:xfrm>
-            <a:off x="2788920" y="2331720"/>
+            <a:off x="2240280" y="3076956"/>
             <a:ext cx="82296" cy="82296"/>
           </a:xfrm>
           <a:prstGeom prst="roundRect">
@@ -8658,8 +8659,8 @@
         </p:nvSpPr>
         <p:spPr>
           <a:xfrm>
-            <a:off x="2916936" y="2240280"/>
-            <a:ext cx="265176" cy="310896"/>
+            <a:off x="2368296" y="2953512"/>
+            <a:ext cx="731520" cy="329184"/>
           </a:xfrm>
           <a:prstGeom prst="rect">
             <a:avLst/>
@@ -8700,27 +8701,27 @@
         </p:nvSpPr>
         <p:spPr>
           <a:xfrm>
-            <a:off x="2916936" y="2404872"/>
-            <a:ext cx="265176" cy="146304"/>
-          </a:xfrm>
-          <a:prstGeom prst="rect">
-            <a:avLst/>
-          </a:prstGeom>
-          <a:noFill/>
-          <a:ln/>
-        </p:spPr>
-        <p:txBody>
-          <a:bodyPr wrap="square" lIns="0" tIns="0" rIns="0" bIns="0" rtlCol="0" anchor="t"/>
-          <a:lstStyle/>
-          <a:p>
-            <a:pPr algn="l" indent="0" marL="0">
-              <a:lnSpc>
-                <a:spcPct val="100000"/>
-              </a:lnSpc>
-              <a:buNone/>
-            </a:pPr>
-            <a:r>
-              <a:rPr lang="en-US" sz="650" dirty="0">
+            <a:off x="2532888" y="2953512"/>
+            <a:ext cx="566928" cy="329184"/>
+          </a:xfrm>
+          <a:prstGeom prst="rect">
+            <a:avLst/>
+          </a:prstGeom>
+          <a:noFill/>
+          <a:ln/>
+        </p:spPr>
+        <p:txBody>
+          <a:bodyPr wrap="square" lIns="0" tIns="0" rIns="0" bIns="0" rtlCol="0" anchor="ctr"/>
+          <a:lstStyle/>
+          <a:p>
+            <a:pPr algn="l" indent="0" marL="0">
+              <a:lnSpc>
+                <a:spcPct val="100000"/>
+              </a:lnSpc>
+              <a:buNone/>
+            </a:pPr>
+            <a:r>
+              <a:rPr lang="en-US" sz="700" dirty="0">
                 <a:solidFill>
                   <a:srgbClr val="8A9099"/>
                 </a:solidFill>
@@ -8730,7 +8731,7 @@
               </a:rPr>
               <a:t>Offline</a:t>
             </a:r>
-            <a:endParaRPr lang="en-US" sz="650" dirty="0"/>
+            <a:endParaRPr lang="en-US" sz="700" dirty="0"/>
           </a:p>
         </p:txBody>
       </p:sp>
@@ -8742,12 +8743,12 @@
         </p:nvSpPr>
         <p:spPr>
           <a:xfrm>
-            <a:off x="1097280" y="2697480"/>
-            <a:ext cx="2103120" cy="850392"/>
+            <a:off x="1051560" y="3410712"/>
+            <a:ext cx="2103120" cy="822960"/>
           </a:xfrm>
           <a:prstGeom prst="roundRect">
             <a:avLst>
-              <a:gd name="adj" fmla="val 10753"/>
+              <a:gd name="adj" fmla="val 11111"/>
             </a:avLst>
           </a:prstGeom>
           <a:solidFill>
@@ -8769,8 +8770,8 @@
         </p:nvSpPr>
         <p:spPr>
           <a:xfrm>
-            <a:off x="1207008" y="2770632"/>
-            <a:ext cx="1005840" cy="219456"/>
+            <a:off x="1161288" y="3493008"/>
+            <a:ext cx="1005840" cy="201168"/>
           </a:xfrm>
           <a:prstGeom prst="rect">
             <a:avLst/>
@@ -8789,7 +8790,7 @@
               <a:buNone/>
             </a:pPr>
             <a:r>
-              <a:rPr lang="en-US" sz="1000" b="1" dirty="0">
+              <a:rPr lang="en-US" sz="950" b="1" dirty="0">
                 <a:solidFill>
                   <a:srgbClr val="E6E9EF"/>
                 </a:solidFill>
@@ -8799,7 +8800,7 @@
               </a:rPr>
               <a:t>web-01</a:t>
             </a:r>
-            <a:endParaRPr lang="en-US" sz="1000" dirty="0"/>
+            <a:endParaRPr lang="en-US" sz="950" dirty="0"/>
           </a:p>
         </p:txBody>
       </p:sp>
@@ -8811,8 +8812,8 @@
         </p:nvSpPr>
         <p:spPr>
           <a:xfrm>
-            <a:off x="2450592" y="2770632"/>
-            <a:ext cx="640080" cy="182880"/>
+            <a:off x="2423160" y="3493008"/>
+            <a:ext cx="621792" cy="173736"/>
           </a:xfrm>
           <a:prstGeom prst="roundRect">
             <a:avLst>
@@ -8833,8 +8834,8 @@
         </p:nvSpPr>
         <p:spPr>
           <a:xfrm>
-            <a:off x="2450592" y="2770632"/>
-            <a:ext cx="640080" cy="182880"/>
+            <a:off x="2423160" y="3493008"/>
+            <a:ext cx="621792" cy="173736"/>
           </a:xfrm>
           <a:prstGeom prst="rect">
             <a:avLst/>
@@ -8853,7 +8854,7 @@
               <a:buNone/>
             </a:pPr>
             <a:r>
-              <a:rPr lang="en-US" sz="700" b="1" dirty="0">
+              <a:rPr lang="en-US" sz="650" b="1" dirty="0">
                 <a:solidFill>
                   <a:srgbClr val="3DDC84"/>
                 </a:solidFill>
@@ -8863,7 +8864,7 @@
               </a:rPr>
               <a:t>Normal</a:t>
             </a:r>
-            <a:endParaRPr lang="en-US" sz="700" dirty="0"/>
+            <a:endParaRPr lang="en-US" sz="650" dirty="0"/>
           </a:p>
         </p:txBody>
       </p:sp>
@@ -8875,7 +8876,7 @@
         </p:nvSpPr>
         <p:spPr>
           <a:xfrm>
-            <a:off x="1207008" y="2971800"/>
+            <a:off x="1161288" y="3694176"/>
             <a:ext cx="1280160" cy="164592"/>
           </a:xfrm>
           <a:prstGeom prst="rect">
@@ -8895,7 +8896,7 @@
               <a:buNone/>
             </a:pPr>
             <a:r>
-              <a:rPr lang="en-US" sz="700" dirty="0">
+              <a:rPr lang="en-US" sz="650" dirty="0">
                 <a:solidFill>
                   <a:srgbClr val="8A9099"/>
                 </a:solidFill>
@@ -8905,7 +8906,7 @@
               </a:rPr>
               <a:t>10.0.0.5</a:t>
             </a:r>
-            <a:endParaRPr lang="en-US" sz="700" dirty="0"/>
+            <a:endParaRPr lang="en-US" sz="650" dirty="0"/>
           </a:p>
         </p:txBody>
       </p:sp>
@@ -8916,15 +8917,15 @@
           <p:nvPr/>
         </p:nvSpPr>
         <p:spPr>
-          <a:xfrm>
-            <a:off x="1207008" y="3456432"/>
-            <a:ext cx="269095" cy="-85344"/>
+          <a:xfrm flipV="1">
+            <a:off x="1161288" y="4072128"/>
+            <a:ext cx="269095" cy="79248"/>
           </a:xfrm>
           <a:prstGeom prst="line">
             <a:avLst/>
           </a:prstGeom>
           <a:noFill/>
-          <a:ln w="17780">
+          <a:ln w="20320">
             <a:solidFill>
               <a:srgbClr val="3DDC84"/>
             </a:solidFill>
@@ -8940,14 +8941,14 @@
         </p:nvSpPr>
         <p:spPr>
           <a:xfrm>
-            <a:off x="1476103" y="3371088"/>
-            <a:ext cx="269095" cy="42672"/>
+            <a:off x="1430383" y="4072128"/>
+            <a:ext cx="269095" cy="39624"/>
           </a:xfrm>
           <a:prstGeom prst="line">
             <a:avLst/>
           </a:prstGeom>
           <a:noFill/>
-          <a:ln w="17780">
+          <a:ln w="20320">
             <a:solidFill>
               <a:srgbClr val="3DDC84"/>
             </a:solidFill>
@@ -8962,15 +8963,15 @@
           <p:nvPr/>
         </p:nvSpPr>
         <p:spPr>
-          <a:xfrm>
-            <a:off x="1745198" y="3413760"/>
-            <a:ext cx="269095" cy="-128016"/>
+          <a:xfrm flipV="1">
+            <a:off x="1699478" y="3992880"/>
+            <a:ext cx="269095" cy="118872"/>
           </a:xfrm>
           <a:prstGeom prst="line">
             <a:avLst/>
           </a:prstGeom>
           <a:noFill/>
-          <a:ln w="17780">
+          <a:ln w="20320">
             <a:solidFill>
               <a:srgbClr val="3DDC84"/>
             </a:solidFill>
@@ -8986,14 +8987,14 @@
         </p:nvSpPr>
         <p:spPr>
           <a:xfrm>
-            <a:off x="2014293" y="3285744"/>
-            <a:ext cx="269095" cy="42672"/>
+            <a:off x="1968573" y="3992880"/>
+            <a:ext cx="269095" cy="39624"/>
           </a:xfrm>
           <a:prstGeom prst="line">
             <a:avLst/>
           </a:prstGeom>
           <a:noFill/>
-          <a:ln w="17780">
+          <a:ln w="20320">
             <a:solidFill>
               <a:srgbClr val="3DDC84"/>
             </a:solidFill>
@@ -9008,15 +9009,15 @@
           <p:nvPr/>
         </p:nvSpPr>
         <p:spPr>
-          <a:xfrm>
-            <a:off x="2283387" y="3328416"/>
-            <a:ext cx="269095" cy="-85344"/>
+          <a:xfrm flipV="1">
+            <a:off x="2237667" y="3953256"/>
+            <a:ext cx="269095" cy="79248"/>
           </a:xfrm>
           <a:prstGeom prst="line">
             <a:avLst/>
           </a:prstGeom>
           <a:noFill/>
-          <a:ln w="17780">
+          <a:ln w="20320">
             <a:solidFill>
               <a:srgbClr val="3DDC84"/>
             </a:solidFill>
@@ -9032,14 +9033,14 @@
         </p:nvSpPr>
         <p:spPr>
           <a:xfrm>
-            <a:off x="2552482" y="3243072"/>
-            <a:ext cx="269095" cy="42672"/>
+            <a:off x="2506762" y="3953256"/>
+            <a:ext cx="269095" cy="39624"/>
           </a:xfrm>
           <a:prstGeom prst="line">
             <a:avLst/>
           </a:prstGeom>
           <a:noFill/>
-          <a:ln w="17780">
+          <a:ln w="20320">
             <a:solidFill>
               <a:srgbClr val="3DDC84"/>
             </a:solidFill>
@@ -9054,15 +9055,15 @@
           <p:nvPr/>
         </p:nvSpPr>
         <p:spPr>
-          <a:xfrm>
-            <a:off x="2821577" y="3285744"/>
-            <a:ext cx="269095" cy="-85344"/>
+          <a:xfrm flipV="1">
+            <a:off x="2775857" y="3913632"/>
+            <a:ext cx="269095" cy="79248"/>
           </a:xfrm>
           <a:prstGeom prst="line">
             <a:avLst/>
           </a:prstGeom>
           <a:noFill/>
-          <a:ln w="17780">
+          <a:ln w="20320">
             <a:solidFill>
               <a:srgbClr val="3DDC84"/>
             </a:solidFill>
@@ -9078,12 +9079,12 @@
         </p:nvSpPr>
         <p:spPr>
           <a:xfrm>
-            <a:off x="1097280" y="3639312"/>
-            <a:ext cx="2103120" cy="850392"/>
+            <a:off x="1051560" y="4325112"/>
+            <a:ext cx="2103120" cy="822960"/>
           </a:xfrm>
           <a:prstGeom prst="roundRect">
             <a:avLst>
-              <a:gd name="adj" fmla="val 10753"/>
+              <a:gd name="adj" fmla="val 11111"/>
             </a:avLst>
           </a:prstGeom>
           <a:solidFill>
@@ -9105,8 +9106,8 @@
         </p:nvSpPr>
         <p:spPr>
           <a:xfrm>
-            <a:off x="1207008" y="3712464"/>
-            <a:ext cx="1005840" cy="219456"/>
+            <a:off x="1161288" y="4407408"/>
+            <a:ext cx="1005840" cy="201168"/>
           </a:xfrm>
           <a:prstGeom prst="rect">
             <a:avLst/>
@@ -9125,7 +9126,7 @@
               <a:buNone/>
             </a:pPr>
             <a:r>
-              <a:rPr lang="en-US" sz="1000" b="1" dirty="0">
+              <a:rPr lang="en-US" sz="950" b="1" dirty="0">
                 <a:solidFill>
                   <a:srgbClr val="E6E9EF"/>
                 </a:solidFill>
@@ -9135,7 +9136,7 @@
               </a:rPr>
               <a:t>db-01</a:t>
             </a:r>
-            <a:endParaRPr lang="en-US" sz="1000" dirty="0"/>
+            <a:endParaRPr lang="en-US" sz="950" dirty="0"/>
           </a:p>
         </p:txBody>
       </p:sp>
@@ -9147,8 +9148,8 @@
         </p:nvSpPr>
         <p:spPr>
           <a:xfrm>
-            <a:off x="2450592" y="3712464"/>
-            <a:ext cx="640080" cy="182880"/>
+            <a:off x="2423160" y="4407408"/>
+            <a:ext cx="621792" cy="173736"/>
           </a:xfrm>
           <a:prstGeom prst="roundRect">
             <a:avLst>
@@ -9169,8 +9170,8 @@
         </p:nvSpPr>
         <p:spPr>
           <a:xfrm>
-            <a:off x="2450592" y="3712464"/>
-            <a:ext cx="640080" cy="182880"/>
+            <a:off x="2423160" y="4407408"/>
+            <a:ext cx="621792" cy="173736"/>
           </a:xfrm>
           <a:prstGeom prst="rect">
             <a:avLst/>
@@ -9189,7 +9190,7 @@
               <a:buNone/>
             </a:pPr>
             <a:r>
-              <a:rPr lang="en-US" sz="700" b="1" dirty="0">
+              <a:rPr lang="en-US" sz="650" b="1" dirty="0">
                 <a:solidFill>
                   <a:srgbClr val="FFC93C"/>
                 </a:solidFill>
@@ -9199,7 +9200,7 @@
               </a:rPr>
               <a:t>Warning</a:t>
             </a:r>
-            <a:endParaRPr lang="en-US" sz="700" dirty="0"/>
+            <a:endParaRPr lang="en-US" sz="650" dirty="0"/>
           </a:p>
         </p:txBody>
       </p:sp>
@@ -9211,7 +9212,7 @@
         </p:nvSpPr>
         <p:spPr>
           <a:xfrm>
-            <a:off x="1207008" y="3913632"/>
+            <a:off x="1161288" y="4608576"/>
             <a:ext cx="1280160" cy="164592"/>
           </a:xfrm>
           <a:prstGeom prst="rect">
@@ -9231,7 +9232,7 @@
               <a:buNone/>
             </a:pPr>
             <a:r>
-              <a:rPr lang="en-US" sz="700" dirty="0">
+              <a:rPr lang="en-US" sz="650" dirty="0">
                 <a:solidFill>
                   <a:srgbClr val="8A9099"/>
                 </a:solidFill>
@@ -9241,7 +9242,7 @@
               </a:rPr>
               <a:t>10.0.0.9</a:t>
             </a:r>
-            <a:endParaRPr lang="en-US" sz="700" dirty="0"/>
+            <a:endParaRPr lang="en-US" sz="650" dirty="0"/>
           </a:p>
         </p:txBody>
       </p:sp>
@@ -9253,14 +9254,14 @@
         </p:nvSpPr>
         <p:spPr>
           <a:xfrm>
-            <a:off x="1207008" y="4334256"/>
-            <a:ext cx="269095" cy="64008"/>
+            <a:off x="1161288" y="5006340"/>
+            <a:ext cx="269095" cy="59436"/>
           </a:xfrm>
           <a:prstGeom prst="line">
             <a:avLst/>
           </a:prstGeom>
           <a:noFill/>
-          <a:ln w="17780">
+          <a:ln w="20320">
             <a:solidFill>
               <a:srgbClr val="FFC93C"/>
             </a:solidFill>
@@ -9275,15 +9276,15 @@
           <p:nvPr/>
         </p:nvSpPr>
         <p:spPr>
-          <a:xfrm>
-            <a:off x="1476103" y="4398264"/>
-            <a:ext cx="269095" cy="-128016"/>
+          <a:xfrm flipV="1">
+            <a:off x="1430383" y="4946904"/>
+            <a:ext cx="269095" cy="118872"/>
           </a:xfrm>
           <a:prstGeom prst="line">
             <a:avLst/>
           </a:prstGeom>
           <a:noFill/>
-          <a:ln w="17780">
+          <a:ln w="20320">
             <a:solidFill>
               <a:srgbClr val="FFC93C"/>
             </a:solidFill>
@@ -9299,14 +9300,14 @@
         </p:nvSpPr>
         <p:spPr>
           <a:xfrm>
-            <a:off x="1745198" y="4270248"/>
-            <a:ext cx="269095" cy="64008"/>
+            <a:off x="1699478" y="4946904"/>
+            <a:ext cx="269095" cy="59436"/>
           </a:xfrm>
           <a:prstGeom prst="line">
             <a:avLst/>
           </a:prstGeom>
           <a:noFill/>
-          <a:ln w="17780">
+          <a:ln w="20320">
             <a:solidFill>
               <a:srgbClr val="FFC93C"/>
             </a:solidFill>
@@ -9321,15 +9322,15 @@
           <p:nvPr/>
         </p:nvSpPr>
         <p:spPr>
-          <a:xfrm>
-            <a:off x="2014293" y="4334256"/>
-            <a:ext cx="269095" cy="-128016"/>
+          <a:xfrm flipV="1">
+            <a:off x="1968573" y="4887468"/>
+            <a:ext cx="269095" cy="118872"/>
           </a:xfrm>
           <a:prstGeom prst="line">
             <a:avLst/>
           </a:prstGeom>
           <a:noFill/>
-          <a:ln w="17780">
+          <a:ln w="20320">
             <a:solidFill>
               <a:srgbClr val="FFC93C"/>
             </a:solidFill>
@@ -9345,14 +9346,14 @@
         </p:nvSpPr>
         <p:spPr>
           <a:xfrm>
-            <a:off x="2283387" y="4206240"/>
-            <a:ext cx="269095" cy="128016"/>
+            <a:off x="2237667" y="4887468"/>
+            <a:ext cx="269095" cy="118872"/>
           </a:xfrm>
           <a:prstGeom prst="line">
             <a:avLst/>
           </a:prstGeom>
           <a:noFill/>
-          <a:ln w="17780">
+          <a:ln w="20320">
             <a:solidFill>
               <a:srgbClr val="FFC93C"/>
             </a:solidFill>
@@ -9367,15 +9368,15 @@
           <p:nvPr/>
         </p:nvSpPr>
         <p:spPr>
-          <a:xfrm>
-            <a:off x="2552482" y="4334256"/>
-            <a:ext cx="269095" cy="-192024"/>
+          <a:xfrm flipV="1">
+            <a:off x="2506762" y="4828032"/>
+            <a:ext cx="269095" cy="178308"/>
           </a:xfrm>
           <a:prstGeom prst="line">
             <a:avLst/>
           </a:prstGeom>
           <a:noFill/>
-          <a:ln w="17780">
+          <a:ln w="20320">
             <a:solidFill>
               <a:srgbClr val="FFC93C"/>
             </a:solidFill>
@@ -9391,14 +9392,14 @@
         </p:nvSpPr>
         <p:spPr>
           <a:xfrm>
-            <a:off x="2821577" y="4142232"/>
-            <a:ext cx="269095" cy="64008"/>
+            <a:off x="2775857" y="4828032"/>
+            <a:ext cx="269095" cy="59436"/>
           </a:xfrm>
           <a:prstGeom prst="line">
             <a:avLst/>
           </a:prstGeom>
           <a:noFill/>
-          <a:ln w="17780">
+          <a:ln w="20320">
             <a:solidFill>
               <a:srgbClr val="FFC93C"/>
             </a:solidFill>
@@ -9414,12 +9415,12 @@
         </p:nvSpPr>
         <p:spPr>
           <a:xfrm>
-            <a:off x="1097280" y="4581144"/>
-            <a:ext cx="2103120" cy="850392"/>
+            <a:off x="1051560" y="5239512"/>
+            <a:ext cx="2103120" cy="822960"/>
           </a:xfrm>
           <a:prstGeom prst="roundRect">
             <a:avLst>
-              <a:gd name="adj" fmla="val 10753"/>
+              <a:gd name="adj" fmla="val 11111"/>
             </a:avLst>
           </a:prstGeom>
           <a:solidFill>
@@ -9441,8 +9442,8 @@
         </p:nvSpPr>
         <p:spPr>
           <a:xfrm>
-            <a:off x="1207008" y="4654296"/>
-            <a:ext cx="1005840" cy="219456"/>
+            <a:off x="1161288" y="5321808"/>
+            <a:ext cx="1005840" cy="201168"/>
           </a:xfrm>
           <a:prstGeom prst="rect">
             <a:avLst/>
@@ -9461,7 +9462,7 @@
               <a:buNone/>
             </a:pPr>
             <a:r>
-              <a:rPr lang="en-US" sz="1000" b="1" dirty="0">
+              <a:rPr lang="en-US" sz="950" b="1" dirty="0">
                 <a:solidFill>
                   <a:srgbClr val="E6E9EF"/>
                 </a:solidFill>
@@ -9471,7 +9472,7 @@
               </a:rPr>
               <a:t>nas-01</a:t>
             </a:r>
-            <a:endParaRPr lang="en-US" sz="1000" dirty="0"/>
+            <a:endParaRPr lang="en-US" sz="950" dirty="0"/>
           </a:p>
         </p:txBody>
       </p:sp>
@@ -9483,8 +9484,8 @@
         </p:nvSpPr>
         <p:spPr>
           <a:xfrm>
-            <a:off x="2450592" y="4654296"/>
-            <a:ext cx="640080" cy="182880"/>
+            <a:off x="2423160" y="5321808"/>
+            <a:ext cx="621792" cy="173736"/>
           </a:xfrm>
           <a:prstGeom prst="roundRect">
             <a:avLst>
@@ -9505,8 +9506,8 @@
         </p:nvSpPr>
         <p:spPr>
           <a:xfrm>
-            <a:off x="2450592" y="4654296"/>
-            <a:ext cx="640080" cy="182880"/>
+            <a:off x="2423160" y="5321808"/>
+            <a:ext cx="621792" cy="173736"/>
           </a:xfrm>
           <a:prstGeom prst="rect">
             <a:avLst/>
@@ -9525,7 +9526,7 @@
               <a:buNone/>
             </a:pPr>
             <a:r>
-              <a:rPr lang="en-US" sz="700" b="1" dirty="0">
+              <a:rPr lang="en-US" sz="650" b="1" dirty="0">
                 <a:solidFill>
                   <a:srgbClr val="6B7280"/>
                 </a:solidFill>
@@ -9535,7 +9536,7 @@
               </a:rPr>
               <a:t>Offline</a:t>
             </a:r>
-            <a:endParaRPr lang="en-US" sz="700" dirty="0"/>
+            <a:endParaRPr lang="en-US" sz="650" dirty="0"/>
           </a:p>
         </p:txBody>
       </p:sp>
@@ -9547,7 +9548,7 @@
         </p:nvSpPr>
         <p:spPr>
           <a:xfrm>
-            <a:off x="1207008" y="4855464"/>
+            <a:off x="1161288" y="5522976"/>
             <a:ext cx="1280160" cy="164592"/>
           </a:xfrm>
           <a:prstGeom prst="rect">
@@ -9567,7 +9568,7 @@
               <a:buNone/>
             </a:pPr>
             <a:r>
-              <a:rPr lang="en-US" sz="700" dirty="0">
+              <a:rPr lang="en-US" sz="650" dirty="0">
                 <a:solidFill>
                   <a:srgbClr val="8A9099"/>
                 </a:solidFill>
@@ -9577,7 +9578,7 @@
               </a:rPr>
               <a:t>10.0.0.13</a:t>
             </a:r>
-            <a:endParaRPr lang="en-US" sz="700" dirty="0"/>
+            <a:endParaRPr lang="en-US" sz="650" dirty="0"/>
           </a:p>
         </p:txBody>
       </p:sp>
@@ -9589,7 +9590,7 @@
         </p:nvSpPr>
         <p:spPr>
           <a:xfrm>
-            <a:off x="1207008" y="5202936"/>
+            <a:off x="1161288" y="5861304"/>
             <a:ext cx="1883664" cy="0"/>
           </a:xfrm>
           <a:prstGeom prst="line">
@@ -9612,8 +9613,8 @@
         </p:nvSpPr>
         <p:spPr>
           <a:xfrm>
-            <a:off x="2816352" y="5650992"/>
-            <a:ext cx="384048" cy="384048"/>
+            <a:off x="2788920" y="5669280"/>
+            <a:ext cx="365760" cy="365760"/>
           </a:xfrm>
           <a:prstGeom prst="roundRect">
             <a:avLst>
@@ -9627,7 +9628,7 @@
           <a:effectLst>
             <a:outerShdw sx="100000" sy="100000" kx="0" ky="0" algn="bl" rotWithShape="0" blurRad="76200" dist="25400" dir="5400000">
               <a:srgbClr val="000000">
-                <a:alpha val="50000"/>
+                <a:alpha val="45000"/>
               </a:srgbClr>
             </a:outerShdw>
           </a:effectLst>
@@ -9641,14 +9642,14 @@
         </p:nvSpPr>
         <p:spPr>
           <a:xfrm>
-            <a:off x="3008376" y="5772607"/>
-            <a:ext cx="0" cy="140818"/>
+            <a:off x="2971800" y="5789981"/>
+            <a:ext cx="0" cy="124358"/>
           </a:xfrm>
           <a:prstGeom prst="line">
             <a:avLst/>
           </a:prstGeom>
           <a:noFill/>
-          <a:ln w="15240">
+          <a:ln w="16510">
             <a:solidFill>
               <a:srgbClr val="07101F"/>
             </a:solidFill>
@@ -9664,14 +9665,14 @@
         </p:nvSpPr>
         <p:spPr>
           <a:xfrm>
-            <a:off x="2937967" y="5843016"/>
-            <a:ext cx="140818" cy="0"/>
+            <a:off x="2909621" y="5852160"/>
+            <a:ext cx="124358" cy="0"/>
           </a:xfrm>
           <a:prstGeom prst="line">
             <a:avLst/>
           </a:prstGeom>
           <a:noFill/>
-          <a:ln w="15240">
+          <a:ln w="16510">
             <a:solidFill>
               <a:srgbClr val="07101F"/>
             </a:solidFill>
@@ -9687,7 +9688,7 @@
         </p:nvSpPr>
         <p:spPr>
           <a:xfrm>
-            <a:off x="4023360" y="2203704"/>
+            <a:off x="4114800" y="2157984"/>
             <a:ext cx="128016" cy="128016"/>
           </a:xfrm>
           <a:prstGeom prst="roundRect">
@@ -9709,8 +9710,8 @@
         </p:nvSpPr>
         <p:spPr>
           <a:xfrm>
-            <a:off x="4297680" y="2148840"/>
-            <a:ext cx="7253935" cy="274320"/>
+            <a:off x="4389120" y="2103120"/>
+            <a:ext cx="7162495" cy="274320"/>
           </a:xfrm>
           <a:prstGeom prst="rect">
             <a:avLst/>
@@ -9751,8 +9752,8 @@
         </p:nvSpPr>
         <p:spPr>
           <a:xfrm>
-            <a:off x="4297680" y="2432304"/>
-            <a:ext cx="7253935" cy="548640"/>
+            <a:off x="4389120" y="2386584"/>
+            <a:ext cx="7162495" cy="548640"/>
           </a:xfrm>
           <a:prstGeom prst="rect">
             <a:avLst/>
@@ -9766,7 +9767,7 @@
           <a:p>
             <a:pPr algn="l" indent="0" marL="0">
               <a:lnSpc>
-                <a:spcPct val="110000"/>
+                <a:spcPct val="115000"/>
               </a:lnSpc>
               <a:buNone/>
             </a:pPr>
@@ -9793,7 +9794,7 @@
         </p:nvSpPr>
         <p:spPr>
           <a:xfrm>
-            <a:off x="4023360" y="3026664"/>
+            <a:off x="4114800" y="2980944"/>
             <a:ext cx="128016" cy="128016"/>
           </a:xfrm>
           <a:prstGeom prst="roundRect">
@@ -9815,8 +9816,8 @@
         </p:nvSpPr>
         <p:spPr>
           <a:xfrm>
-            <a:off x="4297680" y="2971800"/>
-            <a:ext cx="7253935" cy="274320"/>
+            <a:off x="4389120" y="2926080"/>
+            <a:ext cx="7162495" cy="274320"/>
           </a:xfrm>
           <a:prstGeom prst="rect">
             <a:avLst/>
@@ -9857,8 +9858,8 @@
         </p:nvSpPr>
         <p:spPr>
           <a:xfrm>
-            <a:off x="4297680" y="3255264"/>
-            <a:ext cx="7253935" cy="548640"/>
+            <a:off x="4389120" y="3209544"/>
+            <a:ext cx="7162495" cy="548640"/>
           </a:xfrm>
           <a:prstGeom prst="rect">
             <a:avLst/>
@@ -9872,7 +9873,7 @@
           <a:p>
             <a:pPr algn="l" indent="0" marL="0">
               <a:lnSpc>
-                <a:spcPct val="110000"/>
+                <a:spcPct val="115000"/>
               </a:lnSpc>
               <a:buNone/>
             </a:pPr>
@@ -9899,7 +9900,7 @@
         </p:nvSpPr>
         <p:spPr>
           <a:xfrm>
-            <a:off x="4023360" y="3849624"/>
+            <a:off x="4114800" y="3803904"/>
             <a:ext cx="128016" cy="128016"/>
           </a:xfrm>
           <a:prstGeom prst="roundRect">
@@ -9921,8 +9922,8 @@
         </p:nvSpPr>
         <p:spPr>
           <a:xfrm>
-            <a:off x="4297680" y="3794760"/>
-            <a:ext cx="7253935" cy="274320"/>
+            <a:off x="4389120" y="3749040"/>
+            <a:ext cx="7162495" cy="274320"/>
           </a:xfrm>
           <a:prstGeom prst="rect">
             <a:avLst/>
@@ -9963,8 +9964,8 @@
         </p:nvSpPr>
         <p:spPr>
           <a:xfrm>
-            <a:off x="4297680" y="4078224"/>
-            <a:ext cx="7253935" cy="548640"/>
+            <a:off x="4389120" y="4032504"/>
+            <a:ext cx="7162495" cy="548640"/>
           </a:xfrm>
           <a:prstGeom prst="rect">
             <a:avLst/>
@@ -9978,7 +9979,7 @@
           <a:p>
             <a:pPr algn="l" indent="0" marL="0">
               <a:lnSpc>
-                <a:spcPct val="110000"/>
+                <a:spcPct val="115000"/>
               </a:lnSpc>
               <a:buNone/>
             </a:pPr>
@@ -10005,7 +10006,7 @@
         </p:nvSpPr>
         <p:spPr>
           <a:xfrm>
-            <a:off x="640080" y="6355080"/>
+            <a:off x="640080" y="6382512"/>
             <a:ext cx="10911535" cy="0"/>
           </a:xfrm>
           <a:prstGeom prst="line">
@@ -10028,7 +10029,7 @@
         </p:nvSpPr>
         <p:spPr>
           <a:xfrm>
-            <a:off x="640080" y="6419088"/>
+            <a:off x="640080" y="6455664"/>
             <a:ext cx="5486400" cy="274320"/>
           </a:xfrm>
           <a:prstGeom prst="rect">
@@ -10070,7 +10071,7 @@
         </p:nvSpPr>
         <p:spPr>
           <a:xfrm>
-            <a:off x="9722815" y="6419088"/>
+            <a:off x="9722815" y="6455664"/>
             <a:ext cx="1828800" cy="274320"/>
           </a:xfrm>
           <a:prstGeom prst="rect">
@@ -10144,7 +10145,7 @@
         </p:nvSpPr>
         <p:spPr>
           <a:xfrm>
-            <a:off x="640080" y="475488"/>
+            <a:off x="640080" y="457200"/>
             <a:ext cx="10911535" cy="274320"/>
           </a:xfrm>
           <a:prstGeom prst="rect">
@@ -10186,7 +10187,7 @@
         </p:nvSpPr>
         <p:spPr>
           <a:xfrm>
-            <a:off x="640080" y="749808"/>
+            <a:off x="640080" y="731520"/>
             <a:ext cx="10911535" cy="548640"/>
           </a:xfrm>
           <a:prstGeom prst="rect">
@@ -10206,7 +10207,7 @@
               <a:buNone/>
             </a:pPr>
             <a:r>
-              <a:rPr lang="en-US" sz="2700" b="1" dirty="0">
+              <a:rPr lang="en-US" sz="2600" b="1" dirty="0">
                 <a:solidFill>
                   <a:srgbClr val="E6E9EF"/>
                 </a:solidFill>
@@ -10216,7 +10217,7 @@
               </a:rPr>
               <a:t>기술 스택 · 라이선스</a:t>
             </a:r>
-            <a:endParaRPr lang="en-US" sz="2700" dirty="0"/>
+            <a:endParaRPr lang="en-US" sz="2600" dirty="0"/>
           </a:p>
         </p:txBody>
       </p:sp>
@@ -10228,12 +10229,12 @@
         </p:nvSpPr>
         <p:spPr>
           <a:xfrm>
-            <a:off x="640080" y="2011680"/>
-            <a:ext cx="5318608" cy="1737360"/>
+            <a:off x="640080" y="1920240"/>
+            <a:ext cx="5318608" cy="1783080"/>
           </a:xfrm>
           <a:prstGeom prst="roundRect">
             <a:avLst>
-              <a:gd name="adj" fmla="val 6316"/>
+              <a:gd name="adj" fmla="val 6154"/>
             </a:avLst>
           </a:prstGeom>
           <a:solidFill>
@@ -10255,8 +10256,8 @@
         </p:nvSpPr>
         <p:spPr>
           <a:xfrm>
-            <a:off x="896112" y="2212848"/>
-            <a:ext cx="4806544" cy="320040"/>
+            <a:off x="896112" y="2121408"/>
+            <a:ext cx="4806544" cy="292608"/>
           </a:xfrm>
           <a:prstGeom prst="rect">
             <a:avLst/>
@@ -10275,7 +10276,7 @@
               <a:buNone/>
             </a:pPr>
             <a:r>
-              <a:rPr lang="en-US" sz="1600" b="1" dirty="0">
+              <a:rPr lang="en-US" sz="1500" b="1" dirty="0">
                 <a:solidFill>
                   <a:srgbClr val="4C8DFF"/>
                 </a:solidFill>
@@ -10285,7 +10286,7 @@
               </a:rPr>
               <a:t>App</a:t>
             </a:r>
-            <a:endParaRPr lang="en-US" sz="1600" dirty="0"/>
+            <a:endParaRPr lang="en-US" sz="1500" dirty="0"/>
           </a:p>
         </p:txBody>
       </p:sp>
@@ -10297,8 +10298,8 @@
         </p:nvSpPr>
         <p:spPr>
           <a:xfrm>
-            <a:off x="896112" y="2651760"/>
-            <a:ext cx="4806544" cy="914400"/>
+            <a:off x="896112" y="2542032"/>
+            <a:ext cx="4806544" cy="978408"/>
           </a:xfrm>
           <a:prstGeom prst="rect">
             <a:avLst/>
@@ -10312,12 +10313,12 @@
           <a:p>
             <a:pPr algn="l" indent="0" marL="0">
               <a:lnSpc>
-                <a:spcPct val="135000"/>
-              </a:lnSpc>
-              <a:buNone/>
-            </a:pPr>
-            <a:r>
-              <a:rPr lang="en-US" sz="1100" dirty="0">
+                <a:spcPct val="140000"/>
+              </a:lnSpc>
+              <a:buNone/>
+            </a:pPr>
+            <a:r>
+              <a:rPr lang="en-US" sz="1050" dirty="0">
                 <a:solidFill>
                   <a:srgbClr val="E6E9EF"/>
                 </a:solidFill>
@@ -10327,17 +10328,17 @@
               </a:rPr>
               <a:t>Kotlin · Jetpack Compose</a:t>
             </a:r>
-            <a:endParaRPr lang="en-US" sz="1100" dirty="0"/>
-          </a:p>
-          <a:p>
-            <a:pPr algn="l" indent="0" marL="0">
-              <a:lnSpc>
-                <a:spcPct val="135000"/>
-              </a:lnSpc>
-              <a:buNone/>
-            </a:pPr>
-            <a:r>
-              <a:rPr lang="en-US" sz="1100" dirty="0">
+            <a:endParaRPr lang="en-US" sz="1050" dirty="0"/>
+          </a:p>
+          <a:p>
+            <a:pPr algn="l" indent="0" marL="0">
+              <a:lnSpc>
+                <a:spcPct val="140000"/>
+              </a:lnSpc>
+              <a:buNone/>
+            </a:pPr>
+            <a:r>
+              <a:rPr lang="en-US" sz="1050" dirty="0">
                 <a:solidFill>
                   <a:srgbClr val="E6E9EF"/>
                 </a:solidFill>
@@ -10347,17 +10348,17 @@
               </a:rPr>
               <a:t>MVVM · StateFlow · 수동 DI</a:t>
             </a:r>
-            <a:endParaRPr lang="en-US" sz="1100" dirty="0"/>
-          </a:p>
-          <a:p>
-            <a:pPr algn="l" indent="0" marL="0">
-              <a:lnSpc>
-                <a:spcPct val="135000"/>
-              </a:lnSpc>
-              <a:buNone/>
-            </a:pPr>
-            <a:r>
-              <a:rPr lang="en-US" sz="1100" dirty="0">
+            <a:endParaRPr lang="en-US" sz="1050" dirty="0"/>
+          </a:p>
+          <a:p>
+            <a:pPr algn="l" indent="0" marL="0">
+              <a:lnSpc>
+                <a:spcPct val="140000"/>
+              </a:lnSpc>
+              <a:buNone/>
+            </a:pPr>
+            <a:r>
+              <a:rPr lang="en-US" sz="1050" dirty="0">
                 <a:solidFill>
                   <a:srgbClr val="E6E9EF"/>
                 </a:solidFill>
@@ -10367,17 +10368,17 @@
               </a:rPr>
               <a:t>OkHttp · kotlinx.serialization</a:t>
             </a:r>
-            <a:endParaRPr lang="en-US" sz="1100" dirty="0"/>
-          </a:p>
-          <a:p>
-            <a:pPr algn="l" indent="0" marL="0">
-              <a:lnSpc>
-                <a:spcPct val="135000"/>
-              </a:lnSpc>
-              <a:buNone/>
-            </a:pPr>
-            <a:r>
-              <a:rPr lang="en-US" sz="1100" dirty="0">
+            <a:endParaRPr lang="en-US" sz="1050" dirty="0"/>
+          </a:p>
+          <a:p>
+            <a:pPr algn="l" indent="0" marL="0">
+              <a:lnSpc>
+                <a:spcPct val="140000"/>
+              </a:lnSpc>
+              <a:buNone/>
+            </a:pPr>
+            <a:r>
+              <a:rPr lang="en-US" sz="1050" dirty="0">
                 <a:solidFill>
                   <a:srgbClr val="E6E9EF"/>
                 </a:solidFill>
@@ -10387,7 +10388,7 @@
               </a:rPr>
               <a:t>DataStore · WorkManager</a:t>
             </a:r>
-            <a:endParaRPr lang="en-US" sz="1100" dirty="0"/>
+            <a:endParaRPr lang="en-US" sz="1050" dirty="0"/>
           </a:p>
         </p:txBody>
       </p:sp>
@@ -10399,12 +10400,12 @@
         </p:nvSpPr>
         <p:spPr>
           <a:xfrm>
-            <a:off x="6233008" y="2011680"/>
-            <a:ext cx="5318608" cy="1737360"/>
+            <a:off x="6233008" y="1920240"/>
+            <a:ext cx="5318608" cy="1783080"/>
           </a:xfrm>
           <a:prstGeom prst="roundRect">
             <a:avLst>
-              <a:gd name="adj" fmla="val 6316"/>
+              <a:gd name="adj" fmla="val 6154"/>
             </a:avLst>
           </a:prstGeom>
           <a:solidFill>
@@ -10426,8 +10427,8 @@
         </p:nvSpPr>
         <p:spPr>
           <a:xfrm>
-            <a:off x="6489040" y="2212848"/>
-            <a:ext cx="4806544" cy="320040"/>
+            <a:off x="6489040" y="2121408"/>
+            <a:ext cx="4806544" cy="292608"/>
           </a:xfrm>
           <a:prstGeom prst="rect">
             <a:avLst/>
@@ -10446,7 +10447,7 @@
               <a:buNone/>
             </a:pPr>
             <a:r>
-              <a:rPr lang="en-US" sz="1600" b="1" dirty="0">
+              <a:rPr lang="en-US" sz="1500" b="1" dirty="0">
                 <a:solidFill>
                   <a:srgbClr val="4C8DFF"/>
                 </a:solidFill>
@@ -10456,7 +10457,7 @@
               </a:rPr>
               <a:t>Agent</a:t>
             </a:r>
-            <a:endParaRPr lang="en-US" sz="1600" dirty="0"/>
+            <a:endParaRPr lang="en-US" sz="1500" dirty="0"/>
           </a:p>
         </p:txBody>
       </p:sp>
@@ -10468,8 +10469,8 @@
         </p:nvSpPr>
         <p:spPr>
           <a:xfrm>
-            <a:off x="6489040" y="2651760"/>
-            <a:ext cx="4806544" cy="914400"/>
+            <a:off x="6489040" y="2542032"/>
+            <a:ext cx="4806544" cy="978408"/>
           </a:xfrm>
           <a:prstGeom prst="rect">
             <a:avLst/>
@@ -10483,12 +10484,12 @@
           <a:p>
             <a:pPr algn="l" indent="0" marL="0">
               <a:lnSpc>
-                <a:spcPct val="135000"/>
-              </a:lnSpc>
-              <a:buNone/>
-            </a:pPr>
-            <a:r>
-              <a:rPr lang="en-US" sz="1100" dirty="0">
+                <a:spcPct val="140000"/>
+              </a:lnSpc>
+              <a:buNone/>
+            </a:pPr>
+            <a:r>
+              <a:rPr lang="en-US" sz="1050" dirty="0">
                 <a:solidFill>
                   <a:srgbClr val="E6E9EF"/>
                 </a:solidFill>
@@ -10498,17 +10499,17 @@
               </a:rPr>
               <a:t>Python 3 · 표준 라이브러리만</a:t>
             </a:r>
-            <a:endParaRPr lang="en-US" sz="1100" dirty="0"/>
-          </a:p>
-          <a:p>
-            <a:pPr algn="l" indent="0" marL="0">
-              <a:lnSpc>
-                <a:spcPct val="135000"/>
-              </a:lnSpc>
-              <a:buNone/>
-            </a:pPr>
-            <a:r>
-              <a:rPr lang="en-US" sz="1100" dirty="0">
+            <a:endParaRPr lang="en-US" sz="1050" dirty="0"/>
+          </a:p>
+          <a:p>
+            <a:pPr algn="l" indent="0" marL="0">
+              <a:lnSpc>
+                <a:spcPct val="140000"/>
+              </a:lnSpc>
+              <a:buNone/>
+            </a:pPr>
+            <a:r>
+              <a:rPr lang="en-US" sz="1050" dirty="0">
                 <a:solidFill>
                   <a:srgbClr val="E6E9EF"/>
                 </a:solidFill>
@@ -10518,17 +10519,17 @@
               </a:rPr>
               <a:t>단일 파일 servex-agent.py</a:t>
             </a:r>
-            <a:endParaRPr lang="en-US" sz="1100" dirty="0"/>
-          </a:p>
-          <a:p>
-            <a:pPr algn="l" indent="0" marL="0">
-              <a:lnSpc>
-                <a:spcPct val="135000"/>
-              </a:lnSpc>
-              <a:buNone/>
-            </a:pPr>
-            <a:r>
-              <a:rPr lang="en-US" sz="1100" dirty="0">
+            <a:endParaRPr lang="en-US" sz="1050" dirty="0"/>
+          </a:p>
+          <a:p>
+            <a:pPr algn="l" indent="0" marL="0">
+              <a:lnSpc>
+                <a:spcPct val="140000"/>
+              </a:lnSpc>
+              <a:buNone/>
+            </a:pPr>
+            <a:r>
+              <a:rPr lang="en-US" sz="1050" dirty="0">
                 <a:solidFill>
                   <a:srgbClr val="E6E9EF"/>
                 </a:solidFill>
@@ -10538,17 +10539,17 @@
               </a:rPr>
               <a:t>Bearer 토큰 인증</a:t>
             </a:r>
-            <a:endParaRPr lang="en-US" sz="1100" dirty="0"/>
-          </a:p>
-          <a:p>
-            <a:pPr algn="l" indent="0" marL="0">
-              <a:lnSpc>
-                <a:spcPct val="135000"/>
-              </a:lnSpc>
-              <a:buNone/>
-            </a:pPr>
-            <a:r>
-              <a:rPr lang="en-US" sz="1100" dirty="0">
+            <a:endParaRPr lang="en-US" sz="1050" dirty="0"/>
+          </a:p>
+          <a:p>
+            <a:pPr algn="l" indent="0" marL="0">
+              <a:lnSpc>
+                <a:spcPct val="140000"/>
+              </a:lnSpc>
+              <a:buNone/>
+            </a:pPr>
+            <a:r>
+              <a:rPr lang="en-US" sz="1050" dirty="0">
                 <a:solidFill>
                   <a:srgbClr val="E6E9EF"/>
                 </a:solidFill>
@@ -10558,7 +10559,7 @@
               </a:rPr>
               <a:t>/proc 수집 · 링버퍼</a:t>
             </a:r>
-            <a:endParaRPr lang="en-US" sz="1100" dirty="0"/>
+            <a:endParaRPr lang="en-US" sz="1050" dirty="0"/>
           </a:p>
         </p:txBody>
       </p:sp>
@@ -10570,12 +10571,12 @@
         </p:nvSpPr>
         <p:spPr>
           <a:xfrm>
-            <a:off x="640080" y="4023360"/>
-            <a:ext cx="5318608" cy="1737360"/>
+            <a:off x="640080" y="3977640"/>
+            <a:ext cx="5318608" cy="1783080"/>
           </a:xfrm>
           <a:prstGeom prst="roundRect">
             <a:avLst>
-              <a:gd name="adj" fmla="val 6316"/>
+              <a:gd name="adj" fmla="val 6154"/>
             </a:avLst>
           </a:prstGeom>
           <a:solidFill>
@@ -10597,8 +10598,8 @@
         </p:nvSpPr>
         <p:spPr>
           <a:xfrm>
-            <a:off x="896112" y="4224528"/>
-            <a:ext cx="4806544" cy="320040"/>
+            <a:off x="896112" y="4178808"/>
+            <a:ext cx="4806544" cy="292608"/>
           </a:xfrm>
           <a:prstGeom prst="rect">
             <a:avLst/>
@@ -10617,7 +10618,7 @@
               <a:buNone/>
             </a:pPr>
             <a:r>
-              <a:rPr lang="en-US" sz="1600" b="1" dirty="0">
+              <a:rPr lang="en-US" sz="1500" b="1" dirty="0">
                 <a:solidFill>
                   <a:srgbClr val="4C8DFF"/>
                 </a:solidFill>
@@ -10627,7 +10628,7 @@
               </a:rPr>
               <a:t>Design</a:t>
             </a:r>
-            <a:endParaRPr lang="en-US" sz="1600" dirty="0"/>
+            <a:endParaRPr lang="en-US" sz="1500" dirty="0"/>
           </a:p>
         </p:txBody>
       </p:sp>
@@ -10639,8 +10640,8 @@
         </p:nvSpPr>
         <p:spPr>
           <a:xfrm>
-            <a:off x="896112" y="4663440"/>
-            <a:ext cx="4806544" cy="914400"/>
+            <a:off x="896112" y="4599432"/>
+            <a:ext cx="4806544" cy="978408"/>
           </a:xfrm>
           <a:prstGeom prst="rect">
             <a:avLst/>
@@ -10654,12 +10655,12 @@
           <a:p>
             <a:pPr algn="l" indent="0" marL="0">
               <a:lnSpc>
-                <a:spcPct val="135000"/>
-              </a:lnSpc>
-              <a:buNone/>
-            </a:pPr>
-            <a:r>
-              <a:rPr lang="en-US" sz="1100" dirty="0">
+                <a:spcPct val="140000"/>
+              </a:lnSpc>
+              <a:buNone/>
+            </a:pPr>
+            <a:r>
+              <a:rPr lang="en-US" sz="1050" dirty="0">
                 <a:solidFill>
                   <a:srgbClr val="E6E9EF"/>
                 </a:solidFill>
@@ -10669,17 +10670,17 @@
               </a:rPr>
               <a:t>다크 우선 색상 토큰 10종</a:t>
             </a:r>
-            <a:endParaRPr lang="en-US" sz="1100" dirty="0"/>
-          </a:p>
-          <a:p>
-            <a:pPr algn="l" indent="0" marL="0">
-              <a:lnSpc>
-                <a:spcPct val="135000"/>
-              </a:lnSpc>
-              <a:buNone/>
-            </a:pPr>
-            <a:r>
-              <a:rPr lang="en-US" sz="1100" dirty="0">
+            <a:endParaRPr lang="en-US" sz="1050" dirty="0"/>
+          </a:p>
+          <a:p>
+            <a:pPr algn="l" indent="0" marL="0">
+              <a:lnSpc>
+                <a:spcPct val="140000"/>
+              </a:lnSpc>
+              <a:buNone/>
+            </a:pPr>
+            <a:r>
+              <a:rPr lang="en-US" sz="1050" dirty="0">
                 <a:solidFill>
                   <a:srgbClr val="E6E9EF"/>
                 </a:solidFill>
@@ -10687,19 +10688,19 @@
                 <a:ea typeface="Malgun Gothic" pitchFamily="34" charset="-122"/>
                 <a:cs typeface="Malgun Gothic" pitchFamily="34" charset="-120"/>
               </a:rPr>
-              <a:t>4/8dp 간격 리듬</a:t>
-            </a:r>
-            <a:endParaRPr lang="en-US" sz="1100" dirty="0"/>
-          </a:p>
-          <a:p>
-            <a:pPr algn="l" indent="0" marL="0">
-              <a:lnSpc>
-                <a:spcPct val="135000"/>
-              </a:lnSpc>
-              <a:buNone/>
-            </a:pPr>
-            <a:r>
-              <a:rPr lang="en-US" sz="1100" dirty="0">
+              <a:t>4/8 dp 간격 리듬</a:t>
+            </a:r>
+            <a:endParaRPr lang="en-US" sz="1050" dirty="0"/>
+          </a:p>
+          <a:p>
+            <a:pPr algn="l" indent="0" marL="0">
+              <a:lnSpc>
+                <a:spcPct val="140000"/>
+              </a:lnSpc>
+              <a:buNone/>
+            </a:pPr>
+            <a:r>
+              <a:rPr lang="en-US" sz="1050" dirty="0">
                 <a:solidFill>
                   <a:srgbClr val="E6E9EF"/>
                 </a:solidFill>
@@ -10709,17 +10710,17 @@
               </a:rPr>
               <a:t>직접 그린 벡터 아이콘</a:t>
             </a:r>
-            <a:endParaRPr lang="en-US" sz="1100" dirty="0"/>
-          </a:p>
-          <a:p>
-            <a:pPr algn="l" indent="0" marL="0">
-              <a:lnSpc>
-                <a:spcPct val="135000"/>
-              </a:lnSpc>
-              <a:buNone/>
-            </a:pPr>
-            <a:r>
-              <a:rPr lang="en-US" sz="1100" dirty="0">
+            <a:endParaRPr lang="en-US" sz="1050" dirty="0"/>
+          </a:p>
+          <a:p>
+            <a:pPr algn="l" indent="0" marL="0">
+              <a:lnSpc>
+                <a:spcPct val="140000"/>
+              </a:lnSpc>
+              <a:buNone/>
+            </a:pPr>
+            <a:r>
+              <a:rPr lang="en-US" sz="1050" dirty="0">
                 <a:solidFill>
                   <a:srgbClr val="E6E9EF"/>
                 </a:solidFill>
@@ -10729,7 +10730,7 @@
               </a:rPr>
               <a:t>이모지 미사용</a:t>
             </a:r>
-            <a:endParaRPr lang="en-US" sz="1100" dirty="0"/>
+            <a:endParaRPr lang="en-US" sz="1050" dirty="0"/>
           </a:p>
         </p:txBody>
       </p:sp>
@@ -10741,12 +10742,12 @@
         </p:nvSpPr>
         <p:spPr>
           <a:xfrm>
-            <a:off x="6233008" y="4023360"/>
-            <a:ext cx="5318608" cy="1737360"/>
+            <a:off x="6233008" y="3977640"/>
+            <a:ext cx="5318608" cy="1783080"/>
           </a:xfrm>
           <a:prstGeom prst="roundRect">
             <a:avLst>
-              <a:gd name="adj" fmla="val 6316"/>
+              <a:gd name="adj" fmla="val 6154"/>
             </a:avLst>
           </a:prstGeom>
           <a:solidFill>
@@ -10768,8 +10769,8 @@
         </p:nvSpPr>
         <p:spPr>
           <a:xfrm>
-            <a:off x="6489040" y="4224528"/>
-            <a:ext cx="4806544" cy="320040"/>
+            <a:off x="6489040" y="4178808"/>
+            <a:ext cx="4806544" cy="292608"/>
           </a:xfrm>
           <a:prstGeom prst="rect">
             <a:avLst/>
@@ -10788,7 +10789,7 @@
               <a:buNone/>
             </a:pPr>
             <a:r>
-              <a:rPr lang="en-US" sz="1600" b="1" dirty="0">
+              <a:rPr lang="en-US" sz="1500" b="1" dirty="0">
                 <a:solidFill>
                   <a:srgbClr val="4C8DFF"/>
                 </a:solidFill>
@@ -10798,7 +10799,7 @@
               </a:rPr>
               <a:t>License</a:t>
             </a:r>
-            <a:endParaRPr lang="en-US" sz="1600" dirty="0"/>
+            <a:endParaRPr lang="en-US" sz="1500" dirty="0"/>
           </a:p>
         </p:txBody>
       </p:sp>
@@ -10810,8 +10811,8 @@
         </p:nvSpPr>
         <p:spPr>
           <a:xfrm>
-            <a:off x="6489040" y="4663440"/>
-            <a:ext cx="4806544" cy="914400"/>
+            <a:off x="6489040" y="4599432"/>
+            <a:ext cx="4806544" cy="978408"/>
           </a:xfrm>
           <a:prstGeom prst="rect">
             <a:avLst/>
@@ -10825,12 +10826,12 @@
           <a:p>
             <a:pPr algn="l" indent="0" marL="0">
               <a:lnSpc>
-                <a:spcPct val="135000"/>
-              </a:lnSpc>
-              <a:buNone/>
-            </a:pPr>
-            <a:r>
-              <a:rPr lang="en-US" sz="1100" dirty="0">
+                <a:spcPct val="140000"/>
+              </a:lnSpc>
+              <a:buNone/>
+            </a:pPr>
+            <a:r>
+              <a:rPr lang="en-US" sz="1050" dirty="0">
                 <a:solidFill>
                   <a:srgbClr val="E6E9EF"/>
                 </a:solidFill>
@@ -10840,17 +10841,17 @@
               </a:rPr>
               <a:t>GPL-3.0</a:t>
             </a:r>
-            <a:endParaRPr lang="en-US" sz="1100" dirty="0"/>
-          </a:p>
-          <a:p>
-            <a:pPr algn="l" indent="0" marL="0">
-              <a:lnSpc>
-                <a:spcPct val="135000"/>
-              </a:lnSpc>
-              <a:buNone/>
-            </a:pPr>
-            <a:r>
-              <a:rPr lang="en-US" sz="1100" dirty="0">
+            <a:endParaRPr lang="en-US" sz="1050" dirty="0"/>
+          </a:p>
+          <a:p>
+            <a:pPr algn="l" indent="0" marL="0">
+              <a:lnSpc>
+                <a:spcPct val="140000"/>
+              </a:lnSpc>
+              <a:buNone/>
+            </a:pPr>
+            <a:r>
+              <a:rPr lang="en-US" sz="1050" dirty="0">
                 <a:solidFill>
                   <a:srgbClr val="E6E9EF"/>
                 </a:solidFill>
@@ -10860,17 +10861,17 @@
               </a:rPr>
               <a:t>오픈소스 · 셀프호스팅</a:t>
             </a:r>
-            <a:endParaRPr lang="en-US" sz="1100" dirty="0"/>
-          </a:p>
-          <a:p>
-            <a:pPr algn="l" indent="0" marL="0">
-              <a:lnSpc>
-                <a:spcPct val="135000"/>
-              </a:lnSpc>
-              <a:buNone/>
-            </a:pPr>
-            <a:r>
-              <a:rPr lang="en-US" sz="1100" dirty="0">
+            <a:endParaRPr lang="en-US" sz="1050" dirty="0"/>
+          </a:p>
+          <a:p>
+            <a:pPr algn="l" indent="0" marL="0">
+              <a:lnSpc>
+                <a:spcPct val="140000"/>
+              </a:lnSpc>
+              <a:buNone/>
+            </a:pPr>
+            <a:r>
+              <a:rPr lang="en-US" sz="1050" dirty="0">
                 <a:solidFill>
                   <a:srgbClr val="E6E9EF"/>
                 </a:solidFill>
@@ -10880,17 +10881,17 @@
               </a:rPr>
               <a:t>에이전트 직접 접속</a:t>
             </a:r>
-            <a:endParaRPr lang="en-US" sz="1100" dirty="0"/>
-          </a:p>
-          <a:p>
-            <a:pPr algn="l" indent="0" marL="0">
-              <a:lnSpc>
-                <a:spcPct val="135000"/>
-              </a:lnSpc>
-              <a:buNone/>
-            </a:pPr>
-            <a:r>
-              <a:rPr lang="en-US" sz="1100" dirty="0">
+            <a:endParaRPr lang="en-US" sz="1050" dirty="0"/>
+          </a:p>
+          <a:p>
+            <a:pPr algn="l" indent="0" marL="0">
+              <a:lnSpc>
+                <a:spcPct val="140000"/>
+              </a:lnSpc>
+              <a:buNone/>
+            </a:pPr>
+            <a:r>
+              <a:rPr lang="en-US" sz="1050" dirty="0">
                 <a:solidFill>
                   <a:srgbClr val="E6E9EF"/>
                 </a:solidFill>
@@ -10900,7 +10901,7 @@
               </a:rPr>
               <a:t>서버 데이터는 사용자 소유</a:t>
             </a:r>
-            <a:endParaRPr lang="en-US" sz="1100" dirty="0"/>
+            <a:endParaRPr lang="en-US" sz="1050" dirty="0"/>
           </a:p>
         </p:txBody>
       </p:sp>
@@ -10912,7 +10913,7 @@
         </p:nvSpPr>
         <p:spPr>
           <a:xfrm>
-            <a:off x="640080" y="6355080"/>
+            <a:off x="640080" y="6382512"/>
             <a:ext cx="10911535" cy="0"/>
           </a:xfrm>
           <a:prstGeom prst="line">
@@ -10935,7 +10936,7 @@
         </p:nvSpPr>
         <p:spPr>
           <a:xfrm>
-            <a:off x="640080" y="6419088"/>
+            <a:off x="640080" y="6455664"/>
             <a:ext cx="5486400" cy="274320"/>
           </a:xfrm>
           <a:prstGeom prst="rect">
@@ -10977,7 +10978,7 @@
         </p:nvSpPr>
         <p:spPr>
           <a:xfrm>
-            <a:off x="9722815" y="6419088"/>
+            <a:off x="9722815" y="6455664"/>
             <a:ext cx="1828800" cy="274320"/>
           </a:xfrm>
           <a:prstGeom prst="rect">
